--- a/modules/05-performance-optimization/assets/performance-optimization.pptx
+++ b/modules/05-performance-optimization/assets/performance-optimization.pptx
@@ -119,6 +119,1841 @@
     </a:lvl9pPr>
   </p:defaultTextStyle>
 </p:presentation>
+</file>
+
+<file path=ppt/notesMasters/notesMaster1.xml><?xml version="1.0" encoding="utf-8"?>
+<p:notesMaster xmlns:a="http://schemas.openxmlformats.org/drawingml/2006/main" xmlns:p="http://schemas.openxmlformats.org/presentationml/2006/main" xmlns:r="http://schemas.openxmlformats.org/officeDocument/2006/relationships">
+  <p:cSld>
+    <p:bg>
+      <p:bgRef idx="1001">
+        <a:schemeClr val="bg1"/>
+      </p:bgRef>
+    </p:bg>
+    <p:spTree>
+      <p:nvGrpSpPr>
+        <p:cNvPr id="1" name=""/>
+        <p:cNvGrpSpPr/>
+        <p:nvPr/>
+      </p:nvGrpSpPr>
+      <p:grpSpPr>
+        <a:xfrm>
+          <a:off x="0" y="0"/>
+          <a:ext cx="0" cy="0"/>
+          <a:chOff x="0" y="0"/>
+          <a:chExt cx="0" cy="0"/>
+        </a:xfrm>
+      </p:grpSpPr>
+      <p:sp>
+        <p:nvSpPr>
+          <p:cNvPr id="2" name="Header Placeholder 1"/>
+          <p:cNvSpPr>
+            <a:spLocks noGrp="1"/>
+          </p:cNvSpPr>
+          <p:nvPr>
+            <p:ph type="hdr" sz="quarter"/>
+          </p:nvPr>
+        </p:nvSpPr>
+        <p:spPr>
+          <a:xfrm>
+            <a:off x="0" y="0"/>
+            <a:ext cx="2971800" cy="457200"/>
+          </a:xfrm>
+          <a:prstGeom prst="rect">
+            <a:avLst/>
+          </a:prstGeom>
+        </p:spPr>
+        <p:txBody>
+          <a:bodyPr vert="horz" lIns="91440" tIns="45720" rIns="91440" bIns="45720" rtlCol="0"/>
+          <a:lstStyle>
+            <a:lvl1pPr algn="l">
+              <a:defRPr sz="1200"/>
+            </a:lvl1pPr>
+          </a:lstStyle>
+          <a:p>
+            <a:endParaRPr lang="en-US"/>
+          </a:p>
+        </p:txBody>
+      </p:sp>
+      <p:sp>
+        <p:nvSpPr>
+          <p:cNvPr id="3" name="Date Placeholder 2"/>
+          <p:cNvSpPr>
+            <a:spLocks noGrp="1"/>
+          </p:cNvSpPr>
+          <p:nvPr>
+            <p:ph type="dt" idx="1"/>
+          </p:nvPr>
+        </p:nvSpPr>
+        <p:spPr>
+          <a:xfrm>
+            <a:off x="3884613" y="0"/>
+            <a:ext cx="2971800" cy="457200"/>
+          </a:xfrm>
+          <a:prstGeom prst="rect">
+            <a:avLst/>
+          </a:prstGeom>
+        </p:spPr>
+        <p:txBody>
+          <a:bodyPr vert="horz" lIns="91440" tIns="45720" rIns="91440" bIns="45720" rtlCol="0"/>
+          <a:lstStyle>
+            <a:lvl1pPr algn="r">
+              <a:defRPr sz="1200"/>
+            </a:lvl1pPr>
+          </a:lstStyle>
+          <a:p>
+            <a:fld id="{0F89C1C7-3DCD-1040-A9CF-14679D8B5DDD}" type="datetimeFigureOut">
+              <a:rPr lang="en-US" smtClean="0"/>
+              <a:t>10/17/16</a:t>
+            </a:fld>
+            <a:endParaRPr lang="en-US"/>
+          </a:p>
+        </p:txBody>
+      </p:sp>
+      <p:sp>
+        <p:nvSpPr>
+          <p:cNvPr id="4" name="Slide Image Placeholder 3"/>
+          <p:cNvSpPr>
+            <a:spLocks noGrp="1" noRot="1" noChangeAspect="1"/>
+          </p:cNvSpPr>
+          <p:nvPr>
+            <p:ph type="sldImg" idx="2"/>
+          </p:nvPr>
+        </p:nvSpPr>
+        <p:spPr>
+          <a:xfrm>
+            <a:off x="1143000" y="685800"/>
+            <a:ext cx="4572000" cy="3429000"/>
+          </a:xfrm>
+          <a:prstGeom prst="rect">
+            <a:avLst/>
+          </a:prstGeom>
+          <a:noFill/>
+          <a:ln w="12700">
+            <a:solidFill>
+              <a:prstClr val="black"/>
+            </a:solidFill>
+          </a:ln>
+        </p:spPr>
+        <p:txBody>
+          <a:bodyPr vert="horz" lIns="91440" tIns="45720" rIns="91440" bIns="45720" rtlCol="0" anchor="ctr"/>
+          <a:lstStyle/>
+          <a:p>
+            <a:endParaRPr lang="en-US"/>
+          </a:p>
+        </p:txBody>
+      </p:sp>
+      <p:sp>
+        <p:nvSpPr>
+          <p:cNvPr id="5" name="Notes Placeholder 4"/>
+          <p:cNvSpPr>
+            <a:spLocks noGrp="1"/>
+          </p:cNvSpPr>
+          <p:nvPr>
+            <p:ph type="body" sz="quarter" idx="3"/>
+          </p:nvPr>
+        </p:nvSpPr>
+        <p:spPr>
+          <a:xfrm>
+            <a:off x="685800" y="4343400"/>
+            <a:ext cx="5486400" cy="4114800"/>
+          </a:xfrm>
+          <a:prstGeom prst="rect">
+            <a:avLst/>
+          </a:prstGeom>
+        </p:spPr>
+        <p:txBody>
+          <a:bodyPr vert="horz" lIns="91440" tIns="45720" rIns="91440" bIns="45720" rtlCol="0"/>
+          <a:lstStyle/>
+          <a:p>
+            <a:pPr lvl="0"/>
+            <a:r>
+              <a:rPr lang="en-US" smtClean="0"/>
+              <a:t>Click to edit Master text styles</a:t>
+            </a:r>
+          </a:p>
+          <a:p>
+            <a:pPr lvl="1"/>
+            <a:r>
+              <a:rPr lang="en-US" smtClean="0"/>
+              <a:t>Second level</a:t>
+            </a:r>
+          </a:p>
+          <a:p>
+            <a:pPr lvl="2"/>
+            <a:r>
+              <a:rPr lang="en-US" smtClean="0"/>
+              <a:t>Third level</a:t>
+            </a:r>
+          </a:p>
+          <a:p>
+            <a:pPr lvl="3"/>
+            <a:r>
+              <a:rPr lang="en-US" smtClean="0"/>
+              <a:t>Fourth level</a:t>
+            </a:r>
+          </a:p>
+          <a:p>
+            <a:pPr lvl="4"/>
+            <a:r>
+              <a:rPr lang="en-US" smtClean="0"/>
+              <a:t>Fifth level</a:t>
+            </a:r>
+            <a:endParaRPr lang="en-US"/>
+          </a:p>
+        </p:txBody>
+      </p:sp>
+      <p:sp>
+        <p:nvSpPr>
+          <p:cNvPr id="6" name="Footer Placeholder 5"/>
+          <p:cNvSpPr>
+            <a:spLocks noGrp="1"/>
+          </p:cNvSpPr>
+          <p:nvPr>
+            <p:ph type="ftr" sz="quarter" idx="4"/>
+          </p:nvPr>
+        </p:nvSpPr>
+        <p:spPr>
+          <a:xfrm>
+            <a:off x="0" y="8685213"/>
+            <a:ext cx="2971800" cy="457200"/>
+          </a:xfrm>
+          <a:prstGeom prst="rect">
+            <a:avLst/>
+          </a:prstGeom>
+        </p:spPr>
+        <p:txBody>
+          <a:bodyPr vert="horz" lIns="91440" tIns="45720" rIns="91440" bIns="45720" rtlCol="0" anchor="b"/>
+          <a:lstStyle>
+            <a:lvl1pPr algn="l">
+              <a:defRPr sz="1200"/>
+            </a:lvl1pPr>
+          </a:lstStyle>
+          <a:p>
+            <a:endParaRPr lang="en-US"/>
+          </a:p>
+        </p:txBody>
+      </p:sp>
+      <p:sp>
+        <p:nvSpPr>
+          <p:cNvPr id="7" name="Slide Number Placeholder 6"/>
+          <p:cNvSpPr>
+            <a:spLocks noGrp="1"/>
+          </p:cNvSpPr>
+          <p:nvPr>
+            <p:ph type="sldNum" sz="quarter" idx="5"/>
+          </p:nvPr>
+        </p:nvSpPr>
+        <p:spPr>
+          <a:xfrm>
+            <a:off x="3884613" y="8685213"/>
+            <a:ext cx="2971800" cy="457200"/>
+          </a:xfrm>
+          <a:prstGeom prst="rect">
+            <a:avLst/>
+          </a:prstGeom>
+        </p:spPr>
+        <p:txBody>
+          <a:bodyPr vert="horz" lIns="91440" tIns="45720" rIns="91440" bIns="45720" rtlCol="0" anchor="b"/>
+          <a:lstStyle>
+            <a:lvl1pPr algn="r">
+              <a:defRPr sz="1200"/>
+            </a:lvl1pPr>
+          </a:lstStyle>
+          <a:p>
+            <a:fld id="{BB5E49A5-4136-284D-997B-48E1D791AD67}" type="slidenum">
+              <a:rPr lang="en-US" smtClean="0"/>
+              <a:t>‹#›</a:t>
+            </a:fld>
+            <a:endParaRPr lang="en-US"/>
+          </a:p>
+        </p:txBody>
+      </p:sp>
+    </p:spTree>
+    <p:extLst>
+      <p:ext uri="{BB962C8B-B14F-4D97-AF65-F5344CB8AC3E}">
+        <p14:creationId xmlns:p14="http://schemas.microsoft.com/office/powerpoint/2010/main" val="2623252185"/>
+      </p:ext>
+    </p:extLst>
+  </p:cSld>
+  <p:clrMap bg1="lt1" tx1="dk1" bg2="lt2" tx2="dk2" accent1="accent1" accent2="accent2" accent3="accent3" accent4="accent4" accent5="accent5" accent6="accent6" hlink="hlink" folHlink="folHlink"/>
+  <p:notesStyle>
+    <a:lvl1pPr marL="0" algn="l" defTabSz="457200" rtl="0" eaLnBrk="1" latinLnBrk="0" hangingPunct="1">
+      <a:defRPr sz="1200" kern="1200">
+        <a:solidFill>
+          <a:schemeClr val="tx1"/>
+        </a:solidFill>
+        <a:latin typeface="+mn-lt"/>
+        <a:ea typeface="+mn-ea"/>
+        <a:cs typeface="+mn-cs"/>
+      </a:defRPr>
+    </a:lvl1pPr>
+    <a:lvl2pPr marL="457200" algn="l" defTabSz="457200" rtl="0" eaLnBrk="1" latinLnBrk="0" hangingPunct="1">
+      <a:defRPr sz="1200" kern="1200">
+        <a:solidFill>
+          <a:schemeClr val="tx1"/>
+        </a:solidFill>
+        <a:latin typeface="+mn-lt"/>
+        <a:ea typeface="+mn-ea"/>
+        <a:cs typeface="+mn-cs"/>
+      </a:defRPr>
+    </a:lvl2pPr>
+    <a:lvl3pPr marL="914400" algn="l" defTabSz="457200" rtl="0" eaLnBrk="1" latinLnBrk="0" hangingPunct="1">
+      <a:defRPr sz="1200" kern="1200">
+        <a:solidFill>
+          <a:schemeClr val="tx1"/>
+        </a:solidFill>
+        <a:latin typeface="+mn-lt"/>
+        <a:ea typeface="+mn-ea"/>
+        <a:cs typeface="+mn-cs"/>
+      </a:defRPr>
+    </a:lvl3pPr>
+    <a:lvl4pPr marL="1371600" algn="l" defTabSz="457200" rtl="0" eaLnBrk="1" latinLnBrk="0" hangingPunct="1">
+      <a:defRPr sz="1200" kern="1200">
+        <a:solidFill>
+          <a:schemeClr val="tx1"/>
+        </a:solidFill>
+        <a:latin typeface="+mn-lt"/>
+        <a:ea typeface="+mn-ea"/>
+        <a:cs typeface="+mn-cs"/>
+      </a:defRPr>
+    </a:lvl4pPr>
+    <a:lvl5pPr marL="1828800" algn="l" defTabSz="457200" rtl="0" eaLnBrk="1" latinLnBrk="0" hangingPunct="1">
+      <a:defRPr sz="1200" kern="1200">
+        <a:solidFill>
+          <a:schemeClr val="tx1"/>
+        </a:solidFill>
+        <a:latin typeface="+mn-lt"/>
+        <a:ea typeface="+mn-ea"/>
+        <a:cs typeface="+mn-cs"/>
+      </a:defRPr>
+    </a:lvl5pPr>
+    <a:lvl6pPr marL="2286000" algn="l" defTabSz="457200" rtl="0" eaLnBrk="1" latinLnBrk="0" hangingPunct="1">
+      <a:defRPr sz="1200" kern="1200">
+        <a:solidFill>
+          <a:schemeClr val="tx1"/>
+        </a:solidFill>
+        <a:latin typeface="+mn-lt"/>
+        <a:ea typeface="+mn-ea"/>
+        <a:cs typeface="+mn-cs"/>
+      </a:defRPr>
+    </a:lvl6pPr>
+    <a:lvl7pPr marL="2743200" algn="l" defTabSz="457200" rtl="0" eaLnBrk="1" latinLnBrk="0" hangingPunct="1">
+      <a:defRPr sz="1200" kern="1200">
+        <a:solidFill>
+          <a:schemeClr val="tx1"/>
+        </a:solidFill>
+        <a:latin typeface="+mn-lt"/>
+        <a:ea typeface="+mn-ea"/>
+        <a:cs typeface="+mn-cs"/>
+      </a:defRPr>
+    </a:lvl7pPr>
+    <a:lvl8pPr marL="3200400" algn="l" defTabSz="457200" rtl="0" eaLnBrk="1" latinLnBrk="0" hangingPunct="1">
+      <a:defRPr sz="1200" kern="1200">
+        <a:solidFill>
+          <a:schemeClr val="tx1"/>
+        </a:solidFill>
+        <a:latin typeface="+mn-lt"/>
+        <a:ea typeface="+mn-ea"/>
+        <a:cs typeface="+mn-cs"/>
+      </a:defRPr>
+    </a:lvl8pPr>
+    <a:lvl9pPr marL="3657600" algn="l" defTabSz="457200" rtl="0" eaLnBrk="1" latinLnBrk="0" hangingPunct="1">
+      <a:defRPr sz="1200" kern="1200">
+        <a:solidFill>
+          <a:schemeClr val="tx1"/>
+        </a:solidFill>
+        <a:latin typeface="+mn-lt"/>
+        <a:ea typeface="+mn-ea"/>
+        <a:cs typeface="+mn-cs"/>
+      </a:defRPr>
+    </a:lvl9pPr>
+  </p:notesStyle>
+</p:notesMaster>
+</file>
+
+<file path=ppt/notesSlides/notesSlide1.xml><?xml version="1.0" encoding="utf-8"?>
+<p:notes xmlns:a="http://schemas.openxmlformats.org/drawingml/2006/main" xmlns:p="http://schemas.openxmlformats.org/presentationml/2006/main" xmlns:r="http://schemas.openxmlformats.org/officeDocument/2006/relationships">
+  <p:cSld>
+    <p:spTree>
+      <p:nvGrpSpPr>
+        <p:cNvPr id="1" name=""/>
+        <p:cNvGrpSpPr/>
+        <p:nvPr/>
+      </p:nvGrpSpPr>
+      <p:grpSpPr>
+        <a:xfrm>
+          <a:off x="0" y="0"/>
+          <a:ext cx="0" cy="0"/>
+          <a:chOff x="0" y="0"/>
+          <a:chExt cx="0" cy="0"/>
+        </a:xfrm>
+      </p:grpSpPr>
+      <p:sp>
+        <p:nvSpPr>
+          <p:cNvPr id="2" name="Slide Image Placeholder 1"/>
+          <p:cNvSpPr>
+            <a:spLocks noGrp="1"/>
+          </p:cNvSpPr>
+          <p:nvPr>
+            <p:ph type="sldImg" idx="2"/>
+          </p:nvPr>
+        </p:nvSpPr>
+        <p:spPr/>
+      </p:sp>
+      <p:sp>
+        <p:nvSpPr>
+          <p:cNvPr id="3" name="Notes Placeholder 2"/>
+          <p:cNvSpPr>
+            <a:spLocks noGrp="1"/>
+          </p:cNvSpPr>
+          <p:nvPr>
+            <p:ph type="body" idx="3" sz="quarter"/>
+          </p:nvPr>
+        </p:nvSpPr>
+        <p:spPr/>
+        <p:txBody>
+          <a:bodyPr/>
+          <a:lstStyle/>
+          <a:p>
+            <a:r>
+              <a:t>Opening talk track: Welcome students to this module and explain that the goal is not to memorize features. The goal is to understand when a pattern helps authors build more trustworthy, maintainable, user-friendly Power BI solutions.</a:t>
+            </a:r>
+          </a:p>
+          <a:p>
+            <a:r>
+              <a:t>Module framing: Frame this module as evidence-based optimization. Learners should measure before changing and document before/after results.</a:t>
+            </a:r>
+          </a:p>
+          <a:p>
+            <a:r>
+              <a:t>Set expectations: presentation will introduce the theme, then the lab will let learners build or evaluate the pattern hands-on. Encourage questions about tradeoffs, not just button clicks.</a:t>
+            </a:r>
+          </a:p>
+          <a:p>
+            <a:r>
+              <a:t>Further learning: Performance Analyzer: https://learn.microsoft.com/power-bi/create-reports/desktop-performance-analyzer | Optimization guidance: https://learn.microsoft.com/power-bi/guidance/power-bi-optimization | Aggregations: https://learn.microsoft.com/power-bi/transform-model/aggregations-advanced</a:t>
+            </a:r>
+          </a:p>
+        </p:txBody>
+      </p:sp>
+      <p:sp>
+        <p:nvSpPr>
+          <p:cNvPr id="4" name="Slide Number Placeholder 3"/>
+          <p:cNvSpPr>
+            <a:spLocks noGrp="1"/>
+          </p:cNvSpPr>
+          <p:nvPr>
+            <p:ph type="sldNum" idx="5" sz="quarter"/>
+          </p:nvPr>
+        </p:nvSpPr>
+        <p:spPr/>
+      </p:sp>
+    </p:spTree>
+  </p:cSld>
+  <p:clrMapOvr>
+    <a:masterClrMapping/>
+  </p:clrMapOvr>
+</p:notes>
+</file>
+
+<file path=ppt/notesSlides/notesSlide10.xml><?xml version="1.0" encoding="utf-8"?>
+<p:notes xmlns:a="http://schemas.openxmlformats.org/drawingml/2006/main" xmlns:p="http://schemas.openxmlformats.org/presentationml/2006/main" xmlns:r="http://schemas.openxmlformats.org/officeDocument/2006/relationships">
+  <p:cSld>
+    <p:spTree>
+      <p:nvGrpSpPr>
+        <p:cNvPr id="1" name=""/>
+        <p:cNvGrpSpPr/>
+        <p:nvPr/>
+      </p:nvGrpSpPr>
+      <p:grpSpPr>
+        <a:xfrm>
+          <a:off x="0" y="0"/>
+          <a:ext cx="0" cy="0"/>
+          <a:chOff x="0" y="0"/>
+          <a:chExt cx="0" cy="0"/>
+        </a:xfrm>
+      </p:grpSpPr>
+      <p:sp>
+        <p:nvSpPr>
+          <p:cNvPr id="2" name="Slide Image Placeholder 1"/>
+          <p:cNvSpPr>
+            <a:spLocks noGrp="1"/>
+          </p:cNvSpPr>
+          <p:nvPr>
+            <p:ph type="sldImg" idx="2"/>
+          </p:nvPr>
+        </p:nvSpPr>
+        <p:spPr/>
+      </p:sp>
+      <p:sp>
+        <p:nvSpPr>
+          <p:cNvPr id="3" name="Notes Placeholder 2"/>
+          <p:cNvSpPr>
+            <a:spLocks noGrp="1"/>
+          </p:cNvSpPr>
+          <p:nvPr>
+            <p:ph type="body" idx="3" sz="quarter"/>
+          </p:nvPr>
+        </p:nvSpPr>
+        <p:spPr/>
+        <p:txBody>
+          <a:bodyPr/>
+          <a:lstStyle/>
+          <a:p>
+            <a:r>
+              <a:t>Core message: 8. Aggregations.</a:t>
+            </a:r>
+          </a:p>
+          <a:p>
+            <a:r>
+              <a:t>Talking points to expand: Talking points, learner value, and lab connection Talking points • Import aggregation tables • DirectQuery detail tables • Group-by columns Why it helps • Manage aggregations • Source validation Lab connection Coverage: Covered. Use the lab README to demonstrate or discuss this topic. Review terms: group, import, manage. 10</a:t>
+            </a:r>
+          </a:p>
+          <a:p>
+            <a:r>
+              <a:t>Why it matters: Frame this module as evidence-based optimization. Learners should measure before changing and document before/after results.</a:t>
+            </a:r>
+          </a:p>
+          <a:p>
+            <a:r>
+              <a:t>How it helps users: connect the technical pattern to clearer decisions, fewer confusing report interactions, better trust in results, or easier support.</a:t>
+            </a:r>
+          </a:p>
+          <a:p>
+            <a:r>
+              <a:t>How it builds on prior lessons: reference the previous layer in the workshop, such as prepared data, a clean model, tested measures, or report UX conventions.</a:t>
+            </a:r>
+          </a:p>
+          <a:p>
+            <a:r>
+              <a:t>Lab connection: Show where this concept appears in the module lab. If the lab path is conceptual or Verify for Gov, explain what learners should document instead of building hands-on.</a:t>
+            </a:r>
+          </a:p>
+          <a:p>
+            <a:r>
+              <a:t>Instructor prompt: Ask one learner to describe the risk of skipping this pattern or using it without validation.</a:t>
+            </a:r>
+          </a:p>
+          <a:p>
+            <a:r>
+              <a:t>Further learning: Performance Analyzer: https://learn.microsoft.com/power-bi/create-reports/desktop-performance-analyzer | Optimization guidance: https://learn.microsoft.com/power-bi/guidance/power-bi-optimization | Aggregations: https://learn.microsoft.com/power-bi/transform-model/aggregations-advanced</a:t>
+            </a:r>
+          </a:p>
+        </p:txBody>
+      </p:sp>
+      <p:sp>
+        <p:nvSpPr>
+          <p:cNvPr id="4" name="Slide Number Placeholder 3"/>
+          <p:cNvSpPr>
+            <a:spLocks noGrp="1"/>
+          </p:cNvSpPr>
+          <p:nvPr>
+            <p:ph type="sldNum" idx="5" sz="quarter"/>
+          </p:nvPr>
+        </p:nvSpPr>
+        <p:spPr/>
+      </p:sp>
+    </p:spTree>
+  </p:cSld>
+  <p:clrMapOvr>
+    <a:masterClrMapping/>
+  </p:clrMapOvr>
+</p:notes>
+</file>
+
+<file path=ppt/notesSlides/notesSlide11.xml><?xml version="1.0" encoding="utf-8"?>
+<p:notes xmlns:a="http://schemas.openxmlformats.org/drawingml/2006/main" xmlns:p="http://schemas.openxmlformats.org/presentationml/2006/main" xmlns:r="http://schemas.openxmlformats.org/officeDocument/2006/relationships">
+  <p:cSld>
+    <p:spTree>
+      <p:nvGrpSpPr>
+        <p:cNvPr id="1" name=""/>
+        <p:cNvGrpSpPr/>
+        <p:nvPr/>
+      </p:nvGrpSpPr>
+      <p:grpSpPr>
+        <a:xfrm>
+          <a:off x="0" y="0"/>
+          <a:ext cx="0" cy="0"/>
+          <a:chOff x="0" y="0"/>
+          <a:chExt cx="0" cy="0"/>
+        </a:xfrm>
+      </p:grpSpPr>
+      <p:sp>
+        <p:nvSpPr>
+          <p:cNvPr id="2" name="Slide Image Placeholder 1"/>
+          <p:cNvSpPr>
+            <a:spLocks noGrp="1"/>
+          </p:cNvSpPr>
+          <p:nvPr>
+            <p:ph type="sldImg" idx="2"/>
+          </p:nvPr>
+        </p:nvSpPr>
+        <p:spPr/>
+      </p:sp>
+      <p:sp>
+        <p:nvSpPr>
+          <p:cNvPr id="3" name="Notes Placeholder 2"/>
+          <p:cNvSpPr>
+            <a:spLocks noGrp="1"/>
+          </p:cNvSpPr>
+          <p:nvPr>
+            <p:ph type="body" idx="3" sz="quarter"/>
+          </p:nvPr>
+        </p:nvSpPr>
+        <p:spPr/>
+        <p:txBody>
+          <a:bodyPr/>
+          <a:lstStyle/>
+          <a:p>
+            <a:r>
+              <a:t>Core message: 9. DirectQuery and hybrid patterns.</a:t>
+            </a:r>
+          </a:p>
+          <a:p>
+            <a:r>
+              <a:t>Talking points to expand: Talking points, learner value, and lab connection Talking points • Import vs. DirectQuery • Dual mode • Hybrid tables Why it helps • Large models • Tradeoffs Lab connection Coverage: Partial. Use the lab README to demonstrate or discuss this topic. Review terms: hybrid, import, large, tradeoffs. 11</a:t>
+            </a:r>
+          </a:p>
+          <a:p>
+            <a:r>
+              <a:t>Why it matters: Frame this module as evidence-based optimization. Learners should measure before changing and document before/after results.</a:t>
+            </a:r>
+          </a:p>
+          <a:p>
+            <a:r>
+              <a:t>How it helps users: connect the technical pattern to clearer decisions, fewer confusing report interactions, better trust in results, or easier support.</a:t>
+            </a:r>
+          </a:p>
+          <a:p>
+            <a:r>
+              <a:t>How it builds on prior lessons: reference the previous layer in the workshop, such as prepared data, a clean model, tested measures, or report UX conventions.</a:t>
+            </a:r>
+          </a:p>
+          <a:p>
+            <a:r>
+              <a:t>Lab connection: Show where this concept appears in the module lab. If the lab path is conceptual or Verify for Gov, explain what learners should document instead of building hands-on.</a:t>
+            </a:r>
+          </a:p>
+          <a:p>
+            <a:r>
+              <a:t>Instructor prompt: Ask one learner to describe the risk of skipping this pattern or using it without validation.</a:t>
+            </a:r>
+          </a:p>
+          <a:p>
+            <a:r>
+              <a:t>Further learning: Performance Analyzer: https://learn.microsoft.com/power-bi/create-reports/desktop-performance-analyzer | Optimization guidance: https://learn.microsoft.com/power-bi/guidance/power-bi-optimization | Aggregations: https://learn.microsoft.com/power-bi/transform-model/aggregations-advanced</a:t>
+            </a:r>
+          </a:p>
+        </p:txBody>
+      </p:sp>
+      <p:sp>
+        <p:nvSpPr>
+          <p:cNvPr id="4" name="Slide Number Placeholder 3"/>
+          <p:cNvSpPr>
+            <a:spLocks noGrp="1"/>
+          </p:cNvSpPr>
+          <p:nvPr>
+            <p:ph type="sldNum" idx="5" sz="quarter"/>
+          </p:nvPr>
+        </p:nvSpPr>
+        <p:spPr/>
+      </p:sp>
+    </p:spTree>
+  </p:cSld>
+  <p:clrMapOvr>
+    <a:masterClrMapping/>
+  </p:clrMapOvr>
+</p:notes>
+</file>
+
+<file path=ppt/notesSlides/notesSlide12.xml><?xml version="1.0" encoding="utf-8"?>
+<p:notes xmlns:a="http://schemas.openxmlformats.org/drawingml/2006/main" xmlns:p="http://schemas.openxmlformats.org/presentationml/2006/main" xmlns:r="http://schemas.openxmlformats.org/officeDocument/2006/relationships">
+  <p:cSld>
+    <p:spTree>
+      <p:nvGrpSpPr>
+        <p:cNvPr id="1" name=""/>
+        <p:cNvGrpSpPr/>
+        <p:nvPr/>
+      </p:nvGrpSpPr>
+      <p:grpSpPr>
+        <a:xfrm>
+          <a:off x="0" y="0"/>
+          <a:ext cx="0" cy="0"/>
+          <a:chOff x="0" y="0"/>
+          <a:chExt cx="0" cy="0"/>
+        </a:xfrm>
+      </p:grpSpPr>
+      <p:sp>
+        <p:nvSpPr>
+          <p:cNvPr id="2" name="Slide Image Placeholder 1"/>
+          <p:cNvSpPr>
+            <a:spLocks noGrp="1"/>
+          </p:cNvSpPr>
+          <p:nvPr>
+            <p:ph type="sldImg" idx="2"/>
+          </p:nvPr>
+        </p:nvSpPr>
+        <p:spPr/>
+      </p:sp>
+      <p:sp>
+        <p:nvSpPr>
+          <p:cNvPr id="3" name="Notes Placeholder 2"/>
+          <p:cNvSpPr>
+            <a:spLocks noGrp="1"/>
+          </p:cNvSpPr>
+          <p:nvPr>
+            <p:ph type="body" idx="3" sz="quarter"/>
+          </p:nvPr>
+        </p:nvSpPr>
+        <p:spPr/>
+        <p:txBody>
+          <a:bodyPr/>
+          <a:lstStyle/>
+          <a:p>
+            <a:r>
+              <a:t>Core message: 10. Service and capacity monitoring.</a:t>
+            </a:r>
+          </a:p>
+          <a:p>
+            <a:r>
+              <a:t>Talking points to expand: Talking points, learner value, and lab connection Talking points • Refresh history • Dataset settings • Capacity metrics Why it helps • Admin monitoring • Gov validation requirements Lab connection Coverage: Covered. Use the lab README to demonstrate or discuss this topic. Review terms: admin, dataset, history, monitoring. 12</a:t>
+            </a:r>
+          </a:p>
+          <a:p>
+            <a:r>
+              <a:t>Why it matters: Frame this module as evidence-based optimization. Learners should measure before changing and document before/after results.</a:t>
+            </a:r>
+          </a:p>
+          <a:p>
+            <a:r>
+              <a:t>How it helps users: connect the technical pattern to clearer decisions, fewer confusing report interactions, better trust in results, or easier support.</a:t>
+            </a:r>
+          </a:p>
+          <a:p>
+            <a:r>
+              <a:t>How it builds on prior lessons: reference the previous layer in the workshop, such as prepared data, a clean model, tested measures, or report UX conventions.</a:t>
+            </a:r>
+          </a:p>
+          <a:p>
+            <a:r>
+              <a:t>Lab connection: Show where this concept appears in the module lab. If the lab path is conceptual or Verify for Gov, explain what learners should document instead of building hands-on.</a:t>
+            </a:r>
+          </a:p>
+          <a:p>
+            <a:r>
+              <a:t>Instructor prompt: Ask one learner to describe the risk of skipping this pattern or using it without validation.</a:t>
+            </a:r>
+          </a:p>
+          <a:p>
+            <a:r>
+              <a:t>Further learning: Performance Analyzer: https://learn.microsoft.com/power-bi/create-reports/desktop-performance-analyzer | Optimization guidance: https://learn.microsoft.com/power-bi/guidance/power-bi-optimization | Aggregations: https://learn.microsoft.com/power-bi/transform-model/aggregations-advanced</a:t>
+            </a:r>
+          </a:p>
+        </p:txBody>
+      </p:sp>
+      <p:sp>
+        <p:nvSpPr>
+          <p:cNvPr id="4" name="Slide Number Placeholder 3"/>
+          <p:cNvSpPr>
+            <a:spLocks noGrp="1"/>
+          </p:cNvSpPr>
+          <p:nvPr>
+            <p:ph type="sldNum" idx="5" sz="quarter"/>
+          </p:nvPr>
+        </p:nvSpPr>
+        <p:spPr/>
+      </p:sp>
+    </p:spTree>
+  </p:cSld>
+  <p:clrMapOvr>
+    <a:masterClrMapping/>
+  </p:clrMapOvr>
+</p:notes>
+</file>
+
+<file path=ppt/notesSlides/notesSlide13.xml><?xml version="1.0" encoding="utf-8"?>
+<p:notes xmlns:a="http://schemas.openxmlformats.org/drawingml/2006/main" xmlns:p="http://schemas.openxmlformats.org/presentationml/2006/main" xmlns:r="http://schemas.openxmlformats.org/officeDocument/2006/relationships">
+  <p:cSld>
+    <p:spTree>
+      <p:nvGrpSpPr>
+        <p:cNvPr id="1" name=""/>
+        <p:cNvGrpSpPr/>
+        <p:nvPr/>
+      </p:nvGrpSpPr>
+      <p:grpSpPr>
+        <a:xfrm>
+          <a:off x="0" y="0"/>
+          <a:ext cx="0" cy="0"/>
+          <a:chOff x="0" y="0"/>
+          <a:chExt cx="0" cy="0"/>
+        </a:xfrm>
+      </p:grpSpPr>
+      <p:sp>
+        <p:nvSpPr>
+          <p:cNvPr id="2" name="Slide Image Placeholder 1"/>
+          <p:cNvSpPr>
+            <a:spLocks noGrp="1"/>
+          </p:cNvSpPr>
+          <p:nvPr>
+            <p:ph type="sldImg" idx="2"/>
+          </p:nvPr>
+        </p:nvSpPr>
+        <p:spPr/>
+      </p:sp>
+      <p:sp>
+        <p:nvSpPr>
+          <p:cNvPr id="3" name="Notes Placeholder 2"/>
+          <p:cNvSpPr>
+            <a:spLocks noGrp="1"/>
+          </p:cNvSpPr>
+          <p:nvPr>
+            <p:ph type="body" idx="3" sz="quarter"/>
+          </p:nvPr>
+        </p:nvSpPr>
+        <p:spPr/>
+        <p:txBody>
+          <a:bodyPr/>
+          <a:lstStyle/>
+          <a:p>
+            <a:r>
+              <a:t>Core message: 11. External tools.</a:t>
+            </a:r>
+          </a:p>
+          <a:p>
+            <a:r>
+              <a:t>Talking points to expand: Talking points, learner value, and lab connection Talking points • DAX Studio • VertiPaq Analyzer Why it helps • Tabular Editor • Customer workstation and tenant policy Lab connection Coverage: Covered. Use the lab README to demonstrate or discuss this topic. Review terms: customer, editor, tabular, tools. 13</a:t>
+            </a:r>
+          </a:p>
+          <a:p>
+            <a:r>
+              <a:t>Why it matters: Frame this module as evidence-based optimization. Learners should measure before changing and document before/after results.</a:t>
+            </a:r>
+          </a:p>
+          <a:p>
+            <a:r>
+              <a:t>How it helps users: connect the technical pattern to clearer decisions, fewer confusing report interactions, better trust in results, or easier support.</a:t>
+            </a:r>
+          </a:p>
+          <a:p>
+            <a:r>
+              <a:t>How it builds on prior lessons: reference the previous layer in the workshop, such as prepared data, a clean model, tested measures, or report UX conventions.</a:t>
+            </a:r>
+          </a:p>
+          <a:p>
+            <a:r>
+              <a:t>Lab connection: Show where this concept appears in the module lab. If the lab path is conceptual or Verify for Gov, explain what learners should document instead of building hands-on.</a:t>
+            </a:r>
+          </a:p>
+          <a:p>
+            <a:r>
+              <a:t>Instructor prompt: Ask one learner to describe the risk of skipping this pattern or using it without validation.</a:t>
+            </a:r>
+          </a:p>
+          <a:p>
+            <a:r>
+              <a:t>Further learning: Performance Analyzer: https://learn.microsoft.com/power-bi/create-reports/desktop-performance-analyzer | Optimization guidance: https://learn.microsoft.com/power-bi/guidance/power-bi-optimization | Aggregations: https://learn.microsoft.com/power-bi/transform-model/aggregations-advanced</a:t>
+            </a:r>
+          </a:p>
+        </p:txBody>
+      </p:sp>
+      <p:sp>
+        <p:nvSpPr>
+          <p:cNvPr id="4" name="Slide Number Placeholder 3"/>
+          <p:cNvSpPr>
+            <a:spLocks noGrp="1"/>
+          </p:cNvSpPr>
+          <p:nvPr>
+            <p:ph type="sldNum" idx="5" sz="quarter"/>
+          </p:nvPr>
+        </p:nvSpPr>
+        <p:spPr/>
+      </p:sp>
+    </p:spTree>
+  </p:cSld>
+  <p:clrMapOvr>
+    <a:masterClrMapping/>
+  </p:clrMapOvr>
+</p:notes>
+</file>
+
+<file path=ppt/notesSlides/notesSlide14.xml><?xml version="1.0" encoding="utf-8"?>
+<p:notes xmlns:a="http://schemas.openxmlformats.org/drawingml/2006/main" xmlns:p="http://schemas.openxmlformats.org/presentationml/2006/main" xmlns:r="http://schemas.openxmlformats.org/officeDocument/2006/relationships">
+  <p:cSld>
+    <p:spTree>
+      <p:nvGrpSpPr>
+        <p:cNvPr id="1" name=""/>
+        <p:cNvGrpSpPr/>
+        <p:nvPr/>
+      </p:nvGrpSpPr>
+      <p:grpSpPr>
+        <a:xfrm>
+          <a:off x="0" y="0"/>
+          <a:ext cx="0" cy="0"/>
+          <a:chOff x="0" y="0"/>
+          <a:chExt cx="0" cy="0"/>
+        </a:xfrm>
+      </p:grpSpPr>
+      <p:sp>
+        <p:nvSpPr>
+          <p:cNvPr id="2" name="Slide Image Placeholder 1"/>
+          <p:cNvSpPr>
+            <a:spLocks noGrp="1"/>
+          </p:cNvSpPr>
+          <p:nvPr>
+            <p:ph type="sldImg" idx="2"/>
+          </p:nvPr>
+        </p:nvSpPr>
+        <p:spPr/>
+      </p:sp>
+      <p:sp>
+        <p:nvSpPr>
+          <p:cNvPr id="3" name="Notes Placeholder 2"/>
+          <p:cNvSpPr>
+            <a:spLocks noGrp="1"/>
+          </p:cNvSpPr>
+          <p:nvPr>
+            <p:ph type="body" idx="3" sz="quarter"/>
+          </p:nvPr>
+        </p:nvSpPr>
+        <p:spPr/>
+        <p:txBody>
+          <a:bodyPr/>
+          <a:lstStyle/>
+          <a:p>
+            <a:r>
+              <a:t>Speaker guidance: Treat this as a checkpoint. Ask learners to explain the pattern in their own words and identify where they would use it in a real report.</a:t>
+            </a:r>
+          </a:p>
+          <a:p>
+            <a:r>
+              <a:t>Validation prompt: What would prove this worked? Look for a simple visual, expected filter behavior, or a documented before/after result.</a:t>
+            </a:r>
+          </a:p>
+          <a:p>
+            <a:r>
+              <a:t>Further learning: Performance Analyzer: https://learn.microsoft.com/power-bi/create-reports/desktop-performance-analyzer | Optimization guidance: https://learn.microsoft.com/power-bi/guidance/power-bi-optimization | Aggregations: https://learn.microsoft.com/power-bi/transform-model/aggregations-advanced</a:t>
+            </a:r>
+          </a:p>
+        </p:txBody>
+      </p:sp>
+      <p:sp>
+        <p:nvSpPr>
+          <p:cNvPr id="4" name="Slide Number Placeholder 3"/>
+          <p:cNvSpPr>
+            <a:spLocks noGrp="1"/>
+          </p:cNvSpPr>
+          <p:nvPr>
+            <p:ph type="sldNum" idx="5" sz="quarter"/>
+          </p:nvPr>
+        </p:nvSpPr>
+        <p:spPr/>
+      </p:sp>
+    </p:spTree>
+  </p:cSld>
+  <p:clrMapOvr>
+    <a:masterClrMapping/>
+  </p:clrMapOvr>
+</p:notes>
+</file>
+
+<file path=ppt/notesSlides/notesSlide15.xml><?xml version="1.0" encoding="utf-8"?>
+<p:notes xmlns:a="http://schemas.openxmlformats.org/drawingml/2006/main" xmlns:p="http://schemas.openxmlformats.org/presentationml/2006/main" xmlns:r="http://schemas.openxmlformats.org/officeDocument/2006/relationships">
+  <p:cSld>
+    <p:spTree>
+      <p:nvGrpSpPr>
+        <p:cNvPr id="1" name=""/>
+        <p:cNvGrpSpPr/>
+        <p:nvPr/>
+      </p:nvGrpSpPr>
+      <p:grpSpPr>
+        <a:xfrm>
+          <a:off x="0" y="0"/>
+          <a:ext cx="0" cy="0"/>
+          <a:chOff x="0" y="0"/>
+          <a:chExt cx="0" cy="0"/>
+        </a:xfrm>
+      </p:grpSpPr>
+      <p:sp>
+        <p:nvSpPr>
+          <p:cNvPr id="2" name="Slide Image Placeholder 1"/>
+          <p:cNvSpPr>
+            <a:spLocks noGrp="1"/>
+          </p:cNvSpPr>
+          <p:nvPr>
+            <p:ph type="sldImg" idx="2"/>
+          </p:nvPr>
+        </p:nvSpPr>
+        <p:spPr/>
+      </p:sp>
+      <p:sp>
+        <p:nvSpPr>
+          <p:cNvPr id="3" name="Notes Placeholder 2"/>
+          <p:cNvSpPr>
+            <a:spLocks noGrp="1"/>
+          </p:cNvSpPr>
+          <p:nvPr>
+            <p:ph type="body" idx="3" sz="quarter"/>
+          </p:nvPr>
+        </p:nvSpPr>
+        <p:spPr/>
+        <p:txBody>
+          <a:bodyPr/>
+          <a:lstStyle/>
+          <a:p>
+            <a:r>
+              <a:t>Speaker guidance: Use this slide as the handoff for self-study. Do not read every link aloud. Point out which source is most relevant to the lab just completed and which source helps learners go deeper after class.</a:t>
+            </a:r>
+          </a:p>
+          <a:p>
+            <a:r>
+              <a:t>Suggested prompt: Ask learners to bookmark the source that best matches the skill they want to improve next.</a:t>
+            </a:r>
+          </a:p>
+          <a:p>
+            <a:r>
+              <a:t>Further learning: Performance Analyzer: https://learn.microsoft.com/power-bi/create-reports/desktop-performance-analyzer | Optimization guidance: https://learn.microsoft.com/power-bi/guidance/power-bi-optimization | Aggregations: https://learn.microsoft.com/power-bi/transform-model/aggregations-advanced</a:t>
+            </a:r>
+          </a:p>
+        </p:txBody>
+      </p:sp>
+      <p:sp>
+        <p:nvSpPr>
+          <p:cNvPr id="4" name="Slide Number Placeholder 3"/>
+          <p:cNvSpPr>
+            <a:spLocks noGrp="1"/>
+          </p:cNvSpPr>
+          <p:nvPr>
+            <p:ph type="sldNum" idx="5" sz="quarter"/>
+          </p:nvPr>
+        </p:nvSpPr>
+        <p:spPr/>
+      </p:sp>
+    </p:spTree>
+  </p:cSld>
+  <p:clrMapOvr>
+    <a:masterClrMapping/>
+  </p:clrMapOvr>
+</p:notes>
+</file>
+
+<file path=ppt/notesSlides/notesSlide2.xml><?xml version="1.0" encoding="utf-8"?>
+<p:notes xmlns:a="http://schemas.openxmlformats.org/drawingml/2006/main" xmlns:p="http://schemas.openxmlformats.org/presentationml/2006/main" xmlns:r="http://schemas.openxmlformats.org/officeDocument/2006/relationships">
+  <p:cSld>
+    <p:spTree>
+      <p:nvGrpSpPr>
+        <p:cNvPr id="1" name=""/>
+        <p:cNvGrpSpPr/>
+        <p:nvPr/>
+      </p:nvGrpSpPr>
+      <p:grpSpPr>
+        <a:xfrm>
+          <a:off x="0" y="0"/>
+          <a:ext cx="0" cy="0"/>
+          <a:chOff x="0" y="0"/>
+          <a:chExt cx="0" cy="0"/>
+        </a:xfrm>
+      </p:grpSpPr>
+      <p:sp>
+        <p:nvSpPr>
+          <p:cNvPr id="2" name="Slide Image Placeholder 1"/>
+          <p:cNvSpPr>
+            <a:spLocks noGrp="1"/>
+          </p:cNvSpPr>
+          <p:nvPr>
+            <p:ph type="sldImg" idx="2"/>
+          </p:nvPr>
+        </p:nvSpPr>
+        <p:spPr/>
+      </p:sp>
+      <p:sp>
+        <p:nvSpPr>
+          <p:cNvPr id="3" name="Notes Placeholder 2"/>
+          <p:cNvSpPr>
+            <a:spLocks noGrp="1"/>
+          </p:cNvSpPr>
+          <p:nvPr>
+            <p:ph type="body" idx="3" sz="quarter"/>
+          </p:nvPr>
+        </p:nvSpPr>
+        <p:spPr/>
+        <p:txBody>
+          <a:bodyPr/>
+          <a:lstStyle/>
+          <a:p>
+            <a:r>
+              <a:t>Speaker guidance: Emphasize sequence and dependency. Explain what students should already know from prior modules and what this module adds on top.</a:t>
+            </a:r>
+          </a:p>
+          <a:p>
+            <a:r>
+              <a:t>Module framing: Frame this module as evidence-based optimization. Learners should measure before changing and document before/after results.</a:t>
+            </a:r>
+          </a:p>
+          <a:p>
+            <a:r>
+              <a:t>Transition: After this slide, move from the concept map into the specific pattern or lab activity.</a:t>
+            </a:r>
+          </a:p>
+          <a:p>
+            <a:r>
+              <a:t>Further learning: Performance Analyzer: https://learn.microsoft.com/power-bi/create-reports/desktop-performance-analyzer | Optimization guidance: https://learn.microsoft.com/power-bi/guidance/power-bi-optimization | Aggregations: https://learn.microsoft.com/power-bi/transform-model/aggregations-advanced</a:t>
+            </a:r>
+          </a:p>
+        </p:txBody>
+      </p:sp>
+      <p:sp>
+        <p:nvSpPr>
+          <p:cNvPr id="4" name="Slide Number Placeholder 3"/>
+          <p:cNvSpPr>
+            <a:spLocks noGrp="1"/>
+          </p:cNvSpPr>
+          <p:nvPr>
+            <p:ph type="sldNum" idx="5" sz="quarter"/>
+          </p:nvPr>
+        </p:nvSpPr>
+        <p:spPr/>
+      </p:sp>
+    </p:spTree>
+  </p:cSld>
+  <p:clrMapOvr>
+    <a:masterClrMapping/>
+  </p:clrMapOvr>
+</p:notes>
+</file>
+
+<file path=ppt/notesSlides/notesSlide3.xml><?xml version="1.0" encoding="utf-8"?>
+<p:notes xmlns:a="http://schemas.openxmlformats.org/drawingml/2006/main" xmlns:p="http://schemas.openxmlformats.org/presentationml/2006/main" xmlns:r="http://schemas.openxmlformats.org/officeDocument/2006/relationships">
+  <p:cSld>
+    <p:spTree>
+      <p:nvGrpSpPr>
+        <p:cNvPr id="1" name=""/>
+        <p:cNvGrpSpPr/>
+        <p:nvPr/>
+      </p:nvGrpSpPr>
+      <p:grpSpPr>
+        <a:xfrm>
+          <a:off x="0" y="0"/>
+          <a:ext cx="0" cy="0"/>
+          <a:chOff x="0" y="0"/>
+          <a:chExt cx="0" cy="0"/>
+        </a:xfrm>
+      </p:grpSpPr>
+      <p:sp>
+        <p:nvSpPr>
+          <p:cNvPr id="2" name="Slide Image Placeholder 1"/>
+          <p:cNvSpPr>
+            <a:spLocks noGrp="1"/>
+          </p:cNvSpPr>
+          <p:nvPr>
+            <p:ph type="sldImg" idx="2"/>
+          </p:nvPr>
+        </p:nvSpPr>
+        <p:spPr/>
+      </p:sp>
+      <p:sp>
+        <p:nvSpPr>
+          <p:cNvPr id="3" name="Notes Placeholder 2"/>
+          <p:cNvSpPr>
+            <a:spLocks noGrp="1"/>
+          </p:cNvSpPr>
+          <p:nvPr>
+            <p:ph type="body" idx="3" sz="quarter"/>
+          </p:nvPr>
+        </p:nvSpPr>
+        <p:spPr/>
+        <p:txBody>
+          <a:bodyPr/>
+          <a:lstStyle/>
+          <a:p>
+            <a:r>
+              <a:t>Core message: 1. Performance optimization mindset.</a:t>
+            </a:r>
+          </a:p>
+          <a:p>
+            <a:r>
+              <a:t>Talking points to expand: Talking points, learner value, and lab connection Talking points • Measure first. • Identify the bottleneck. Why it helps • Change one thing. • Measure again. Lab connection Coverage: Covered. Use the lab README to demonstrate or discuss this topic. Review terms: again, bottleneck, mindset, thing. 03</a:t>
+            </a:r>
+          </a:p>
+          <a:p>
+            <a:r>
+              <a:t>Why it matters: Frame this module as evidence-based optimization. Learners should measure before changing and document before/after results.</a:t>
+            </a:r>
+          </a:p>
+          <a:p>
+            <a:r>
+              <a:t>How it helps users: connect the technical pattern to clearer decisions, fewer confusing report interactions, better trust in results, or easier support.</a:t>
+            </a:r>
+          </a:p>
+          <a:p>
+            <a:r>
+              <a:t>How it builds on prior lessons: reference the previous layer in the workshop, such as prepared data, a clean model, tested measures, or report UX conventions.</a:t>
+            </a:r>
+          </a:p>
+          <a:p>
+            <a:r>
+              <a:t>Lab connection: Show where this concept appears in the module lab. If the lab path is conceptual or Verify for Gov, explain what learners should document instead of building hands-on.</a:t>
+            </a:r>
+          </a:p>
+          <a:p>
+            <a:r>
+              <a:t>Instructor prompt: Ask one learner to describe the risk of skipping this pattern or using it without validation.</a:t>
+            </a:r>
+          </a:p>
+          <a:p>
+            <a:r>
+              <a:t>Further learning: Performance Analyzer: https://learn.microsoft.com/power-bi/create-reports/desktop-performance-analyzer | Optimization guidance: https://learn.microsoft.com/power-bi/guidance/power-bi-optimization | Aggregations: https://learn.microsoft.com/power-bi/transform-model/aggregations-advanced</a:t>
+            </a:r>
+          </a:p>
+        </p:txBody>
+      </p:sp>
+      <p:sp>
+        <p:nvSpPr>
+          <p:cNvPr id="4" name="Slide Number Placeholder 3"/>
+          <p:cNvSpPr>
+            <a:spLocks noGrp="1"/>
+          </p:cNvSpPr>
+          <p:nvPr>
+            <p:ph type="sldNum" idx="5" sz="quarter"/>
+          </p:nvPr>
+        </p:nvSpPr>
+        <p:spPr/>
+      </p:sp>
+    </p:spTree>
+  </p:cSld>
+  <p:clrMapOvr>
+    <a:masterClrMapping/>
+  </p:clrMapOvr>
+</p:notes>
+</file>
+
+<file path=ppt/notesSlides/notesSlide4.xml><?xml version="1.0" encoding="utf-8"?>
+<p:notes xmlns:a="http://schemas.openxmlformats.org/drawingml/2006/main" xmlns:p="http://schemas.openxmlformats.org/presentationml/2006/main" xmlns:r="http://schemas.openxmlformats.org/officeDocument/2006/relationships">
+  <p:cSld>
+    <p:spTree>
+      <p:nvGrpSpPr>
+        <p:cNvPr id="1" name=""/>
+        <p:cNvGrpSpPr/>
+        <p:nvPr/>
+      </p:nvGrpSpPr>
+      <p:grpSpPr>
+        <a:xfrm>
+          <a:off x="0" y="0"/>
+          <a:ext cx="0" cy="0"/>
+          <a:chOff x="0" y="0"/>
+          <a:chExt cx="0" cy="0"/>
+        </a:xfrm>
+      </p:grpSpPr>
+      <p:sp>
+        <p:nvSpPr>
+          <p:cNvPr id="2" name="Slide Image Placeholder 1"/>
+          <p:cNvSpPr>
+            <a:spLocks noGrp="1"/>
+          </p:cNvSpPr>
+          <p:nvPr>
+            <p:ph type="sldImg" idx="2"/>
+          </p:nvPr>
+        </p:nvSpPr>
+        <p:spPr/>
+      </p:sp>
+      <p:sp>
+        <p:nvSpPr>
+          <p:cNvPr id="3" name="Notes Placeholder 2"/>
+          <p:cNvSpPr>
+            <a:spLocks noGrp="1"/>
+          </p:cNvSpPr>
+          <p:nvPr>
+            <p:ph type="body" idx="3" sz="quarter"/>
+          </p:nvPr>
+        </p:nvSpPr>
+        <p:spPr/>
+        <p:txBody>
+          <a:bodyPr/>
+          <a:lstStyle/>
+          <a:p>
+            <a:r>
+              <a:t>Core message: 2. Performance layers.</a:t>
+            </a:r>
+          </a:p>
+          <a:p>
+            <a:r>
+              <a:t>Talking points to expand: Talking points, learner value, and lab connection Talking points • Source system • Power Query • Semantic model Why it helps • DAX • Visual rendering Lab connection Coverage: Covered. Use the lab README to demonstrate or discuss this topic. Review terms: layers, rendering, system. 04</a:t>
+            </a:r>
+          </a:p>
+          <a:p>
+            <a:r>
+              <a:t>Why it matters: Frame this module as evidence-based optimization. Learners should measure before changing and document before/after results.</a:t>
+            </a:r>
+          </a:p>
+          <a:p>
+            <a:r>
+              <a:t>How it helps users: connect the technical pattern to clearer decisions, fewer confusing report interactions, better trust in results, or easier support.</a:t>
+            </a:r>
+          </a:p>
+          <a:p>
+            <a:r>
+              <a:t>How it builds on prior lessons: reference the previous layer in the workshop, such as prepared data, a clean model, tested measures, or report UX conventions.</a:t>
+            </a:r>
+          </a:p>
+          <a:p>
+            <a:r>
+              <a:t>Lab connection: Show where this concept appears in the module lab. If the lab path is conceptual or Verify for Gov, explain what learners should document instead of building hands-on.</a:t>
+            </a:r>
+          </a:p>
+          <a:p>
+            <a:r>
+              <a:t>Instructor prompt: Ask one learner to describe the risk of skipping this pattern or using it without validation.</a:t>
+            </a:r>
+          </a:p>
+          <a:p>
+            <a:r>
+              <a:t>Further learning: Performance Analyzer: https://learn.microsoft.com/power-bi/create-reports/desktop-performance-analyzer | Optimization guidance: https://learn.microsoft.com/power-bi/guidance/power-bi-optimization | Aggregations: https://learn.microsoft.com/power-bi/transform-model/aggregations-advanced</a:t>
+            </a:r>
+          </a:p>
+        </p:txBody>
+      </p:sp>
+      <p:sp>
+        <p:nvSpPr>
+          <p:cNvPr id="4" name="Slide Number Placeholder 3"/>
+          <p:cNvSpPr>
+            <a:spLocks noGrp="1"/>
+          </p:cNvSpPr>
+          <p:nvPr>
+            <p:ph type="sldNum" idx="5" sz="quarter"/>
+          </p:nvPr>
+        </p:nvSpPr>
+        <p:spPr/>
+      </p:sp>
+    </p:spTree>
+  </p:cSld>
+  <p:clrMapOvr>
+    <a:masterClrMapping/>
+  </p:clrMapOvr>
+</p:notes>
+</file>
+
+<file path=ppt/notesSlides/notesSlide5.xml><?xml version="1.0" encoding="utf-8"?>
+<p:notes xmlns:a="http://schemas.openxmlformats.org/drawingml/2006/main" xmlns:p="http://schemas.openxmlformats.org/presentationml/2006/main" xmlns:r="http://schemas.openxmlformats.org/officeDocument/2006/relationships">
+  <p:cSld>
+    <p:spTree>
+      <p:nvGrpSpPr>
+        <p:cNvPr id="1" name=""/>
+        <p:cNvGrpSpPr/>
+        <p:nvPr/>
+      </p:nvGrpSpPr>
+      <p:grpSpPr>
+        <a:xfrm>
+          <a:off x="0" y="0"/>
+          <a:ext cx="0" cy="0"/>
+          <a:chOff x="0" y="0"/>
+          <a:chExt cx="0" cy="0"/>
+        </a:xfrm>
+      </p:grpSpPr>
+      <p:sp>
+        <p:nvSpPr>
+          <p:cNvPr id="2" name="Slide Image Placeholder 1"/>
+          <p:cNvSpPr>
+            <a:spLocks noGrp="1"/>
+          </p:cNvSpPr>
+          <p:nvPr>
+            <p:ph type="sldImg" idx="2"/>
+          </p:nvPr>
+        </p:nvSpPr>
+        <p:spPr/>
+      </p:sp>
+      <p:sp>
+        <p:nvSpPr>
+          <p:cNvPr id="3" name="Notes Placeholder 2"/>
+          <p:cNvSpPr>
+            <a:spLocks noGrp="1"/>
+          </p:cNvSpPr>
+          <p:nvPr>
+            <p:ph type="body" idx="3" sz="quarter"/>
+          </p:nvPr>
+        </p:nvSpPr>
+        <p:spPr/>
+        <p:txBody>
+          <a:bodyPr/>
+          <a:lstStyle/>
+          <a:p>
+            <a:r>
+              <a:t>Core message: 3. Performance Analyzer.</a:t>
+            </a:r>
+          </a:p>
+          <a:p>
+            <a:r>
+              <a:t>Talking points to expand: Talking points, learner value, and lab connection Talking points • Recording interactions • Visual display time • DAX query time Why it helps • Other/render time • Copying queries for deeper analysis Lab connection Coverage: Covered. Use the lab README to demonstrate or discuss this topic. Review terms: analysis, copying. 05</a:t>
+            </a:r>
+          </a:p>
+          <a:p>
+            <a:r>
+              <a:t>Why it matters: Frame this module as evidence-based optimization. Learners should measure before changing and document before/after results.</a:t>
+            </a:r>
+          </a:p>
+          <a:p>
+            <a:r>
+              <a:t>How it helps users: connect the technical pattern to clearer decisions, fewer confusing report interactions, better trust in results, or easier support.</a:t>
+            </a:r>
+          </a:p>
+          <a:p>
+            <a:r>
+              <a:t>How it builds on prior lessons: reference the previous layer in the workshop, such as prepared data, a clean model, tested measures, or report UX conventions.</a:t>
+            </a:r>
+          </a:p>
+          <a:p>
+            <a:r>
+              <a:t>Lab connection: Show where this concept appears in the module lab. If the lab path is conceptual or Verify for Gov, explain what learners should document instead of building hands-on.</a:t>
+            </a:r>
+          </a:p>
+          <a:p>
+            <a:r>
+              <a:t>Instructor prompt: Ask one learner to describe the risk of skipping this pattern or using it without validation.</a:t>
+            </a:r>
+          </a:p>
+          <a:p>
+            <a:r>
+              <a:t>Further learning: Performance Analyzer: https://learn.microsoft.com/power-bi/create-reports/desktop-performance-analyzer | Optimization guidance: https://learn.microsoft.com/power-bi/guidance/power-bi-optimization | Aggregations: https://learn.microsoft.com/power-bi/transform-model/aggregations-advanced</a:t>
+            </a:r>
+          </a:p>
+        </p:txBody>
+      </p:sp>
+      <p:sp>
+        <p:nvSpPr>
+          <p:cNvPr id="4" name="Slide Number Placeholder 3"/>
+          <p:cNvSpPr>
+            <a:spLocks noGrp="1"/>
+          </p:cNvSpPr>
+          <p:nvPr>
+            <p:ph type="sldNum" idx="5" sz="quarter"/>
+          </p:nvPr>
+        </p:nvSpPr>
+        <p:spPr/>
+      </p:sp>
+    </p:spTree>
+  </p:cSld>
+  <p:clrMapOvr>
+    <a:masterClrMapping/>
+  </p:clrMapOvr>
+</p:notes>
+</file>
+
+<file path=ppt/notesSlides/notesSlide6.xml><?xml version="1.0" encoding="utf-8"?>
+<p:notes xmlns:a="http://schemas.openxmlformats.org/drawingml/2006/main" xmlns:p="http://schemas.openxmlformats.org/presentationml/2006/main" xmlns:r="http://schemas.openxmlformats.org/officeDocument/2006/relationships">
+  <p:cSld>
+    <p:spTree>
+      <p:nvGrpSpPr>
+        <p:cNvPr id="1" name=""/>
+        <p:cNvGrpSpPr/>
+        <p:nvPr/>
+      </p:nvGrpSpPr>
+      <p:grpSpPr>
+        <a:xfrm>
+          <a:off x="0" y="0"/>
+          <a:ext cx="0" cy="0"/>
+          <a:chOff x="0" y="0"/>
+          <a:chExt cx="0" cy="0"/>
+        </a:xfrm>
+      </p:grpSpPr>
+      <p:sp>
+        <p:nvSpPr>
+          <p:cNvPr id="2" name="Slide Image Placeholder 1"/>
+          <p:cNvSpPr>
+            <a:spLocks noGrp="1"/>
+          </p:cNvSpPr>
+          <p:nvPr>
+            <p:ph type="sldImg" idx="2"/>
+          </p:nvPr>
+        </p:nvSpPr>
+        <p:spPr/>
+      </p:sp>
+      <p:sp>
+        <p:nvSpPr>
+          <p:cNvPr id="3" name="Notes Placeholder 2"/>
+          <p:cNvSpPr>
+            <a:spLocks noGrp="1"/>
+          </p:cNvSpPr>
+          <p:nvPr>
+            <p:ph type="body" idx="3" sz="quarter"/>
+          </p:nvPr>
+        </p:nvSpPr>
+        <p:spPr/>
+        <p:txBody>
+          <a:bodyPr/>
+          <a:lstStyle/>
+          <a:p>
+            <a:r>
+              <a:t>Core message: 4. Model size and cardinality.</a:t>
+            </a:r>
+          </a:p>
+          <a:p>
+            <a:r>
+              <a:t>Talking points to expand: Talking points, learner value, and lab connection Talking points • Column cardinality • Data types • Precision Why it helps • Date/time splits • Unused columns Lab connection Coverage: Covered. Use the lab README to demonstrate or discuss this topic. Review terms: relationship, splits, types. 06</a:t>
+            </a:r>
+          </a:p>
+          <a:p>
+            <a:r>
+              <a:t>Why it matters: Frame this module as evidence-based optimization. Learners should measure before changing and document before/after results.</a:t>
+            </a:r>
+          </a:p>
+          <a:p>
+            <a:r>
+              <a:t>How it helps users: connect the technical pattern to clearer decisions, fewer confusing report interactions, better trust in results, or easier support.</a:t>
+            </a:r>
+          </a:p>
+          <a:p>
+            <a:r>
+              <a:t>How it builds on prior lessons: reference the previous layer in the workshop, such as prepared data, a clean model, tested measures, or report UX conventions.</a:t>
+            </a:r>
+          </a:p>
+          <a:p>
+            <a:r>
+              <a:t>Lab connection: Show where this concept appears in the module lab. If the lab path is conceptual or Verify for Gov, explain what learners should document instead of building hands-on.</a:t>
+            </a:r>
+          </a:p>
+          <a:p>
+            <a:r>
+              <a:t>Instructor prompt: Ask one learner to describe the risk of skipping this pattern or using it without validation.</a:t>
+            </a:r>
+          </a:p>
+          <a:p>
+            <a:r>
+              <a:t>Further learning: Performance Analyzer: https://learn.microsoft.com/power-bi/create-reports/desktop-performance-analyzer | Optimization guidance: https://learn.microsoft.com/power-bi/guidance/power-bi-optimization | Aggregations: https://learn.microsoft.com/power-bi/transform-model/aggregations-advanced</a:t>
+            </a:r>
+          </a:p>
+        </p:txBody>
+      </p:sp>
+      <p:sp>
+        <p:nvSpPr>
+          <p:cNvPr id="4" name="Slide Number Placeholder 3"/>
+          <p:cNvSpPr>
+            <a:spLocks noGrp="1"/>
+          </p:cNvSpPr>
+          <p:nvPr>
+            <p:ph type="sldNum" idx="5" sz="quarter"/>
+          </p:nvPr>
+        </p:nvSpPr>
+        <p:spPr/>
+      </p:sp>
+    </p:spTree>
+  </p:cSld>
+  <p:clrMapOvr>
+    <a:masterClrMapping/>
+  </p:clrMapOvr>
+</p:notes>
+</file>
+
+<file path=ppt/notesSlides/notesSlide7.xml><?xml version="1.0" encoding="utf-8"?>
+<p:notes xmlns:a="http://schemas.openxmlformats.org/drawingml/2006/main" xmlns:p="http://schemas.openxmlformats.org/presentationml/2006/main" xmlns:r="http://schemas.openxmlformats.org/officeDocument/2006/relationships">
+  <p:cSld>
+    <p:spTree>
+      <p:nvGrpSpPr>
+        <p:cNvPr id="1" name=""/>
+        <p:cNvGrpSpPr/>
+        <p:nvPr/>
+      </p:nvGrpSpPr>
+      <p:grpSpPr>
+        <a:xfrm>
+          <a:off x="0" y="0"/>
+          <a:ext cx="0" cy="0"/>
+          <a:chOff x="0" y="0"/>
+          <a:chExt cx="0" cy="0"/>
+        </a:xfrm>
+      </p:grpSpPr>
+      <p:sp>
+        <p:nvSpPr>
+          <p:cNvPr id="2" name="Slide Image Placeholder 1"/>
+          <p:cNvSpPr>
+            <a:spLocks noGrp="1"/>
+          </p:cNvSpPr>
+          <p:nvPr>
+            <p:ph type="sldImg" idx="2"/>
+          </p:nvPr>
+        </p:nvSpPr>
+        <p:spPr/>
+      </p:sp>
+      <p:sp>
+        <p:nvSpPr>
+          <p:cNvPr id="3" name="Notes Placeholder 2"/>
+          <p:cNvSpPr>
+            <a:spLocks noGrp="1"/>
+          </p:cNvSpPr>
+          <p:nvPr>
+            <p:ph type="body" idx="3" sz="quarter"/>
+          </p:nvPr>
+        </p:nvSpPr>
+        <p:spPr/>
+        <p:txBody>
+          <a:bodyPr/>
+          <a:lstStyle/>
+          <a:p>
+            <a:r>
+              <a:t>Core message: 5. DAX optimization.</a:t>
+            </a:r>
+          </a:p>
+          <a:p>
+            <a:r>
+              <a:t>Talking points to expand: Talking points, learner value, and lab connection Talking points • Variables • Measure branching • Avoiding repeated logic Why it helps • Filter scope • Iterator caution Lab connection Coverage: Covered. Use the lab README to demonstrate or discuss this topic. Review terms: avoiding, caution, iterator, scope. 07</a:t>
+            </a:r>
+          </a:p>
+          <a:p>
+            <a:r>
+              <a:t>Why it matters: Frame this module as evidence-based optimization. Learners should measure before changing and document before/after results.</a:t>
+            </a:r>
+          </a:p>
+          <a:p>
+            <a:r>
+              <a:t>How it helps users: connect the technical pattern to clearer decisions, fewer confusing report interactions, better trust in results, or easier support.</a:t>
+            </a:r>
+          </a:p>
+          <a:p>
+            <a:r>
+              <a:t>How it builds on prior lessons: reference the previous layer in the workshop, such as prepared data, a clean model, tested measures, or report UX conventions.</a:t>
+            </a:r>
+          </a:p>
+          <a:p>
+            <a:r>
+              <a:t>Lab connection: Show where this concept appears in the module lab. If the lab path is conceptual or Verify for Gov, explain what learners should document instead of building hands-on.</a:t>
+            </a:r>
+          </a:p>
+          <a:p>
+            <a:r>
+              <a:t>Instructor prompt: Ask one learner to describe the risk of skipping this pattern or using it without validation.</a:t>
+            </a:r>
+          </a:p>
+          <a:p>
+            <a:r>
+              <a:t>Further learning: Performance Analyzer: https://learn.microsoft.com/power-bi/create-reports/desktop-performance-analyzer | Optimization guidance: https://learn.microsoft.com/power-bi/guidance/power-bi-optimization | Aggregations: https://learn.microsoft.com/power-bi/transform-model/aggregations-advanced</a:t>
+            </a:r>
+          </a:p>
+        </p:txBody>
+      </p:sp>
+      <p:sp>
+        <p:nvSpPr>
+          <p:cNvPr id="4" name="Slide Number Placeholder 3"/>
+          <p:cNvSpPr>
+            <a:spLocks noGrp="1"/>
+          </p:cNvSpPr>
+          <p:nvPr>
+            <p:ph type="sldNum" idx="5" sz="quarter"/>
+          </p:nvPr>
+        </p:nvSpPr>
+        <p:spPr/>
+      </p:sp>
+    </p:spTree>
+  </p:cSld>
+  <p:clrMapOvr>
+    <a:masterClrMapping/>
+  </p:clrMapOvr>
+</p:notes>
+</file>
+
+<file path=ppt/notesSlides/notesSlide8.xml><?xml version="1.0" encoding="utf-8"?>
+<p:notes xmlns:a="http://schemas.openxmlformats.org/drawingml/2006/main" xmlns:p="http://schemas.openxmlformats.org/presentationml/2006/main" xmlns:r="http://schemas.openxmlformats.org/officeDocument/2006/relationships">
+  <p:cSld>
+    <p:spTree>
+      <p:nvGrpSpPr>
+        <p:cNvPr id="1" name=""/>
+        <p:cNvGrpSpPr/>
+        <p:nvPr/>
+      </p:nvGrpSpPr>
+      <p:grpSpPr>
+        <a:xfrm>
+          <a:off x="0" y="0"/>
+          <a:ext cx="0" cy="0"/>
+          <a:chOff x="0" y="0"/>
+          <a:chExt cx="0" cy="0"/>
+        </a:xfrm>
+      </p:grpSpPr>
+      <p:sp>
+        <p:nvSpPr>
+          <p:cNvPr id="2" name="Slide Image Placeholder 1"/>
+          <p:cNvSpPr>
+            <a:spLocks noGrp="1"/>
+          </p:cNvSpPr>
+          <p:nvPr>
+            <p:ph type="sldImg" idx="2"/>
+          </p:nvPr>
+        </p:nvSpPr>
+        <p:spPr/>
+      </p:sp>
+      <p:sp>
+        <p:nvSpPr>
+          <p:cNvPr id="3" name="Notes Placeholder 2"/>
+          <p:cNvSpPr>
+            <a:spLocks noGrp="1"/>
+          </p:cNvSpPr>
+          <p:nvPr>
+            <p:ph type="body" idx="3" sz="quarter"/>
+          </p:nvPr>
+        </p:nvSpPr>
+        <p:spPr/>
+        <p:txBody>
+          <a:bodyPr/>
+          <a:lstStyle/>
+          <a:p>
+            <a:r>
+              <a:t>Core message: 6. Visual optimization.</a:t>
+            </a:r>
+          </a:p>
+          <a:p>
+            <a:r>
+              <a:t>Talking points to expand: Talking points, learner value, and lab connection Talking points • Visual count • High-cardinality visuals • Tables and matrices Why it helps • Cross-highlighting • Custom visuals Lab connection Coverage: Covered. Use the lab README to demonstrate or discuss this topic. Review terms: complexity, custom, highlighting, matrices. 08</a:t>
+            </a:r>
+          </a:p>
+          <a:p>
+            <a:r>
+              <a:t>Why it matters: Frame this module as evidence-based optimization. Learners should measure before changing and document before/after results.</a:t>
+            </a:r>
+          </a:p>
+          <a:p>
+            <a:r>
+              <a:t>How it helps users: connect the technical pattern to clearer decisions, fewer confusing report interactions, better trust in results, or easier support.</a:t>
+            </a:r>
+          </a:p>
+          <a:p>
+            <a:r>
+              <a:t>How it builds on prior lessons: reference the previous layer in the workshop, such as prepared data, a clean model, tested measures, or report UX conventions.</a:t>
+            </a:r>
+          </a:p>
+          <a:p>
+            <a:r>
+              <a:t>Lab connection: Show where this concept appears in the module lab. If the lab path is conceptual or Verify for Gov, explain what learners should document instead of building hands-on.</a:t>
+            </a:r>
+          </a:p>
+          <a:p>
+            <a:r>
+              <a:t>Instructor prompt: Ask one learner to describe the risk of skipping this pattern or using it without validation.</a:t>
+            </a:r>
+          </a:p>
+          <a:p>
+            <a:r>
+              <a:t>Further learning: Performance Analyzer: https://learn.microsoft.com/power-bi/create-reports/desktop-performance-analyzer | Optimization guidance: https://learn.microsoft.com/power-bi/guidance/power-bi-optimization | Aggregations: https://learn.microsoft.com/power-bi/transform-model/aggregations-advanced</a:t>
+            </a:r>
+          </a:p>
+        </p:txBody>
+      </p:sp>
+      <p:sp>
+        <p:nvSpPr>
+          <p:cNvPr id="4" name="Slide Number Placeholder 3"/>
+          <p:cNvSpPr>
+            <a:spLocks noGrp="1"/>
+          </p:cNvSpPr>
+          <p:nvPr>
+            <p:ph type="sldNum" idx="5" sz="quarter"/>
+          </p:nvPr>
+        </p:nvSpPr>
+        <p:spPr/>
+      </p:sp>
+    </p:spTree>
+  </p:cSld>
+  <p:clrMapOvr>
+    <a:masterClrMapping/>
+  </p:clrMapOvr>
+</p:notes>
+</file>
+
+<file path=ppt/notesSlides/notesSlide9.xml><?xml version="1.0" encoding="utf-8"?>
+<p:notes xmlns:a="http://schemas.openxmlformats.org/drawingml/2006/main" xmlns:p="http://schemas.openxmlformats.org/presentationml/2006/main" xmlns:r="http://schemas.openxmlformats.org/officeDocument/2006/relationships">
+  <p:cSld>
+    <p:spTree>
+      <p:nvGrpSpPr>
+        <p:cNvPr id="1" name=""/>
+        <p:cNvGrpSpPr/>
+        <p:nvPr/>
+      </p:nvGrpSpPr>
+      <p:grpSpPr>
+        <a:xfrm>
+          <a:off x="0" y="0"/>
+          <a:ext cx="0" cy="0"/>
+          <a:chOff x="0" y="0"/>
+          <a:chExt cx="0" cy="0"/>
+        </a:xfrm>
+      </p:grpSpPr>
+      <p:sp>
+        <p:nvSpPr>
+          <p:cNvPr id="2" name="Slide Image Placeholder 1"/>
+          <p:cNvSpPr>
+            <a:spLocks noGrp="1"/>
+          </p:cNvSpPr>
+          <p:nvPr>
+            <p:ph type="sldImg" idx="2"/>
+          </p:nvPr>
+        </p:nvSpPr>
+        <p:spPr/>
+      </p:sp>
+      <p:sp>
+        <p:nvSpPr>
+          <p:cNvPr id="3" name="Notes Placeholder 2"/>
+          <p:cNvSpPr>
+            <a:spLocks noGrp="1"/>
+          </p:cNvSpPr>
+          <p:nvPr>
+            <p:ph type="body" idx="3" sz="quarter"/>
+          </p:nvPr>
+        </p:nvSpPr>
+        <p:spPr/>
+        <p:txBody>
+          <a:bodyPr/>
+          <a:lstStyle/>
+          <a:p>
+            <a:r>
+              <a:t>Core message: 7. Power Query and refresh optimization.</a:t>
+            </a:r>
+          </a:p>
+          <a:p>
+            <a:r>
+              <a:t>Talking points to expand: Talking points, learner value, and lab connection Talking points • Query folding • Staging • Filtering early Why it helps • Removing columns early • Incremental refresh preparation Lab connection Coverage: Partial. Use the lab README to demonstrate or discuss this topic. Review terms: early, filtering, folding, preparation, removing. 09</a:t>
+            </a:r>
+          </a:p>
+          <a:p>
+            <a:r>
+              <a:t>Why it matters: Frame this module as evidence-based optimization. Learners should measure before changing and document before/after results.</a:t>
+            </a:r>
+          </a:p>
+          <a:p>
+            <a:r>
+              <a:t>How it helps users: connect the technical pattern to clearer decisions, fewer confusing report interactions, better trust in results, or easier support.</a:t>
+            </a:r>
+          </a:p>
+          <a:p>
+            <a:r>
+              <a:t>How it builds on prior lessons: reference the previous layer in the workshop, such as prepared data, a clean model, tested measures, or report UX conventions.</a:t>
+            </a:r>
+          </a:p>
+          <a:p>
+            <a:r>
+              <a:t>Lab connection: Show where this concept appears in the module lab. If the lab path is conceptual or Verify for Gov, explain what learners should document instead of building hands-on.</a:t>
+            </a:r>
+          </a:p>
+          <a:p>
+            <a:r>
+              <a:t>Instructor prompt: Ask one learner to describe the risk of skipping this pattern or using it without validation.</a:t>
+            </a:r>
+          </a:p>
+          <a:p>
+            <a:r>
+              <a:t>Further learning: Performance Analyzer: https://learn.microsoft.com/power-bi/create-reports/desktop-performance-analyzer | Optimization guidance: https://learn.microsoft.com/power-bi/guidance/power-bi-optimization | Aggregations: https://learn.microsoft.com/power-bi/transform-model/aggregations-advanced</a:t>
+            </a:r>
+          </a:p>
+        </p:txBody>
+      </p:sp>
+      <p:sp>
+        <p:nvSpPr>
+          <p:cNvPr id="4" name="Slide Number Placeholder 3"/>
+          <p:cNvSpPr>
+            <a:spLocks noGrp="1"/>
+          </p:cNvSpPr>
+          <p:nvPr>
+            <p:ph type="sldNum" idx="5" sz="quarter"/>
+          </p:nvPr>
+        </p:nvSpPr>
+        <p:spPr/>
+      </p:sp>
+    </p:spTree>
+  </p:cSld>
+  <p:clrMapOvr>
+    <a:masterClrMapping/>
+  </p:clrMapOvr>
+</p:notes>
 </file>
 
 <file path=ppt/slideLayouts/slideLayout1.xml><?xml version="1.0" encoding="utf-8"?>
@@ -13303,4 +15138,324 @@
   </a:objectDefaults>
   <a:extraClrSchemeLst/>
 </a:theme>
+</file>
+
+<file path=ppt/theme/theme2.xml><?xml version="1.0" encoding="utf-8"?>
+<a:theme xmlns:a="http://schemas.openxmlformats.org/drawingml/2006/main" name="Office Theme">
+  <a:themeElements>
+    <a:clrScheme name="Office">
+      <a:dk1>
+        <a:sysClr val="windowText" lastClr="000000"/>
+      </a:dk1>
+      <a:lt1>
+        <a:sysClr val="window" lastClr="FFFFFF"/>
+      </a:lt1>
+      <a:dk2>
+        <a:srgbClr val="1F497D"/>
+      </a:dk2>
+      <a:lt2>
+        <a:srgbClr val="EEECE1"/>
+      </a:lt2>
+      <a:accent1>
+        <a:srgbClr val="4F81BD"/>
+      </a:accent1>
+      <a:accent2>
+        <a:srgbClr val="C0504D"/>
+      </a:accent2>
+      <a:accent3>
+        <a:srgbClr val="9BBB59"/>
+      </a:accent3>
+      <a:accent4>
+        <a:srgbClr val="8064A2"/>
+      </a:accent4>
+      <a:accent5>
+        <a:srgbClr val="4BACC6"/>
+      </a:accent5>
+      <a:accent6>
+        <a:srgbClr val="F79646"/>
+      </a:accent6>
+      <a:hlink>
+        <a:srgbClr val="0000FF"/>
+      </a:hlink>
+      <a:folHlink>
+        <a:srgbClr val="800080"/>
+      </a:folHlink>
+    </a:clrScheme>
+    <a:fontScheme name="Office">
+      <a:majorFont>
+        <a:latin typeface="Calibri"/>
+        <a:ea typeface=""/>
+        <a:cs typeface=""/>
+        <a:font script="Jpan" typeface="ＭＳ Ｐゴシック"/>
+        <a:font script="Hang" typeface="맑은 고딕"/>
+        <a:font script="Hans" typeface="宋体"/>
+        <a:font script="Hant" typeface="新細明體"/>
+        <a:font script="Arab" typeface="Times New Roman"/>
+        <a:font script="Hebr" typeface="Times New Roman"/>
+        <a:font script="Thai" typeface="Angsana New"/>
+        <a:font script="Ethi" typeface="Nyala"/>
+        <a:font script="Beng" typeface="Vrinda"/>
+        <a:font script="Gujr" typeface="Shruti"/>
+        <a:font script="Khmr" typeface="MoolBoran"/>
+        <a:font script="Knda" typeface="Tunga"/>
+        <a:font script="Guru" typeface="Raavi"/>
+        <a:font script="Cans" typeface="Euphemia"/>
+        <a:font script="Cher" typeface="Plantagenet Cherokee"/>
+        <a:font script="Yiii" typeface="Microsoft Yi Baiti"/>
+        <a:font script="Tibt" typeface="Microsoft Himalaya"/>
+        <a:font script="Thaa" typeface="MV Boli"/>
+        <a:font script="Deva" typeface="Mangal"/>
+        <a:font script="Telu" typeface="Gautami"/>
+        <a:font script="Taml" typeface="Latha"/>
+        <a:font script="Syrc" typeface="Estrangelo Edessa"/>
+        <a:font script="Orya" typeface="Kalinga"/>
+        <a:font script="Mlym" typeface="Kartika"/>
+        <a:font script="Laoo" typeface="DokChampa"/>
+        <a:font script="Sinh" typeface="Iskoola Pota"/>
+        <a:font script="Mong" typeface="Mongolian Baiti"/>
+        <a:font script="Viet" typeface="Times New Roman"/>
+        <a:font script="Uigh" typeface="Microsoft Uighur"/>
+        <a:font script="Geor" typeface="Sylfaen"/>
+      </a:majorFont>
+      <a:minorFont>
+        <a:latin typeface="Calibri"/>
+        <a:ea typeface=""/>
+        <a:cs typeface=""/>
+        <a:font script="Jpan" typeface="ＭＳ Ｐゴシック"/>
+        <a:font script="Hang" typeface="맑은 고딕"/>
+        <a:font script="Hans" typeface="宋体"/>
+        <a:font script="Hant" typeface="新細明體"/>
+        <a:font script="Arab" typeface="Arial"/>
+        <a:font script="Hebr" typeface="Arial"/>
+        <a:font script="Thai" typeface="Cordia New"/>
+        <a:font script="Ethi" typeface="Nyala"/>
+        <a:font script="Beng" typeface="Vrinda"/>
+        <a:font script="Gujr" typeface="Shruti"/>
+        <a:font script="Khmr" typeface="DaunPenh"/>
+        <a:font script="Knda" typeface="Tunga"/>
+        <a:font script="Guru" typeface="Raavi"/>
+        <a:font script="Cans" typeface="Euphemia"/>
+        <a:font script="Cher" typeface="Plantagenet Cherokee"/>
+        <a:font script="Yiii" typeface="Microsoft Yi Baiti"/>
+        <a:font script="Tibt" typeface="Microsoft Himalaya"/>
+        <a:font script="Thaa" typeface="MV Boli"/>
+        <a:font script="Deva" typeface="Mangal"/>
+        <a:font script="Telu" typeface="Gautami"/>
+        <a:font script="Taml" typeface="Latha"/>
+        <a:font script="Syrc" typeface="Estrangelo Edessa"/>
+        <a:font script="Orya" typeface="Kalinga"/>
+        <a:font script="Mlym" typeface="Kartika"/>
+        <a:font script="Laoo" typeface="DokChampa"/>
+        <a:font script="Sinh" typeface="Iskoola Pota"/>
+        <a:font script="Mong" typeface="Mongolian Baiti"/>
+        <a:font script="Viet" typeface="Arial"/>
+        <a:font script="Uigh" typeface="Microsoft Uighur"/>
+        <a:font script="Geor" typeface="Sylfaen"/>
+      </a:minorFont>
+    </a:fontScheme>
+    <a:fmtScheme name="Office">
+      <a:fillStyleLst>
+        <a:solidFill>
+          <a:schemeClr val="phClr"/>
+        </a:solidFill>
+        <a:gradFill rotWithShape="1">
+          <a:gsLst>
+            <a:gs pos="0">
+              <a:schemeClr val="phClr">
+                <a:tint val="50000"/>
+                <a:satMod val="300000"/>
+              </a:schemeClr>
+            </a:gs>
+            <a:gs pos="35000">
+              <a:schemeClr val="phClr">
+                <a:tint val="37000"/>
+                <a:satMod val="300000"/>
+              </a:schemeClr>
+            </a:gs>
+            <a:gs pos="100000">
+              <a:schemeClr val="phClr">
+                <a:tint val="15000"/>
+                <a:satMod val="350000"/>
+              </a:schemeClr>
+            </a:gs>
+          </a:gsLst>
+          <a:lin ang="16200000" scaled="1"/>
+        </a:gradFill>
+        <a:gradFill rotWithShape="1">
+          <a:gsLst>
+            <a:gs pos="0">
+              <a:schemeClr val="phClr">
+                <a:tint val="100000"/>
+                <a:shade val="100000"/>
+                <a:satMod val="130000"/>
+              </a:schemeClr>
+            </a:gs>
+            <a:gs pos="100000">
+              <a:schemeClr val="phClr">
+                <a:tint val="50000"/>
+                <a:shade val="100000"/>
+                <a:satMod val="350000"/>
+              </a:schemeClr>
+            </a:gs>
+          </a:gsLst>
+          <a:lin ang="16200000" scaled="0"/>
+        </a:gradFill>
+      </a:fillStyleLst>
+      <a:lnStyleLst>
+        <a:ln w="9525" cap="flat" cmpd="sng" algn="ctr">
+          <a:solidFill>
+            <a:schemeClr val="phClr">
+              <a:shade val="95000"/>
+              <a:satMod val="105000"/>
+            </a:schemeClr>
+          </a:solidFill>
+          <a:prstDash val="solid"/>
+        </a:ln>
+        <a:ln w="25400" cap="flat" cmpd="sng" algn="ctr">
+          <a:solidFill>
+            <a:schemeClr val="phClr"/>
+          </a:solidFill>
+          <a:prstDash val="solid"/>
+        </a:ln>
+        <a:ln w="38100" cap="flat" cmpd="sng" algn="ctr">
+          <a:solidFill>
+            <a:schemeClr val="phClr"/>
+          </a:solidFill>
+          <a:prstDash val="solid"/>
+        </a:ln>
+      </a:lnStyleLst>
+      <a:effectStyleLst>
+        <a:effectStyle>
+          <a:effectLst>
+            <a:outerShdw blurRad="40000" dist="20000" dir="5400000" rotWithShape="0">
+              <a:srgbClr val="000000">
+                <a:alpha val="38000"/>
+              </a:srgbClr>
+            </a:outerShdw>
+          </a:effectLst>
+        </a:effectStyle>
+        <a:effectStyle>
+          <a:effectLst>
+            <a:outerShdw blurRad="40000" dist="23000" dir="5400000" rotWithShape="0">
+              <a:srgbClr val="000000">
+                <a:alpha val="35000"/>
+              </a:srgbClr>
+            </a:outerShdw>
+          </a:effectLst>
+        </a:effectStyle>
+        <a:effectStyle>
+          <a:effectLst>
+            <a:outerShdw blurRad="40000" dist="23000" dir="5400000" rotWithShape="0">
+              <a:srgbClr val="000000">
+                <a:alpha val="35000"/>
+              </a:srgbClr>
+            </a:outerShdw>
+          </a:effectLst>
+          <a:scene3d>
+            <a:camera prst="orthographicFront">
+              <a:rot lat="0" lon="0" rev="0"/>
+            </a:camera>
+            <a:lightRig rig="threePt" dir="t">
+              <a:rot lat="0" lon="0" rev="1200000"/>
+            </a:lightRig>
+          </a:scene3d>
+          <a:sp3d>
+            <a:bevelT w="63500" h="25400"/>
+          </a:sp3d>
+        </a:effectStyle>
+      </a:effectStyleLst>
+      <a:bgFillStyleLst>
+        <a:solidFill>
+          <a:schemeClr val="phClr"/>
+        </a:solidFill>
+        <a:gradFill rotWithShape="1">
+          <a:gsLst>
+            <a:gs pos="0">
+              <a:schemeClr val="phClr">
+                <a:tint val="40000"/>
+                <a:satMod val="350000"/>
+              </a:schemeClr>
+            </a:gs>
+            <a:gs pos="40000">
+              <a:schemeClr val="phClr">
+                <a:tint val="45000"/>
+                <a:shade val="99000"/>
+                <a:satMod val="350000"/>
+              </a:schemeClr>
+            </a:gs>
+            <a:gs pos="100000">
+              <a:schemeClr val="phClr">
+                <a:shade val="20000"/>
+                <a:satMod val="255000"/>
+              </a:schemeClr>
+            </a:gs>
+          </a:gsLst>
+          <a:path path="circle">
+            <a:fillToRect l="50000" t="-80000" r="50000" b="180000"/>
+          </a:path>
+        </a:gradFill>
+        <a:gradFill rotWithShape="1">
+          <a:gsLst>
+            <a:gs pos="0">
+              <a:schemeClr val="phClr">
+                <a:tint val="80000"/>
+                <a:satMod val="300000"/>
+              </a:schemeClr>
+            </a:gs>
+            <a:gs pos="100000">
+              <a:schemeClr val="phClr">
+                <a:shade val="30000"/>
+                <a:satMod val="200000"/>
+              </a:schemeClr>
+            </a:gs>
+          </a:gsLst>
+          <a:path path="circle">
+            <a:fillToRect l="50000" t="50000" r="50000" b="50000"/>
+          </a:path>
+        </a:gradFill>
+      </a:bgFillStyleLst>
+    </a:fmtScheme>
+  </a:themeElements>
+  <a:objectDefaults>
+    <a:spDef>
+      <a:spPr/>
+      <a:bodyPr/>
+      <a:lstStyle/>
+      <a:style>
+        <a:lnRef idx="1">
+          <a:schemeClr val="accent1"/>
+        </a:lnRef>
+        <a:fillRef idx="3">
+          <a:schemeClr val="accent1"/>
+        </a:fillRef>
+        <a:effectRef idx="2">
+          <a:schemeClr val="accent1"/>
+        </a:effectRef>
+        <a:fontRef idx="minor">
+          <a:schemeClr val="lt1"/>
+        </a:fontRef>
+      </a:style>
+    </a:spDef>
+    <a:lnDef>
+      <a:spPr/>
+      <a:bodyPr/>
+      <a:lstStyle/>
+      <a:style>
+        <a:lnRef idx="2">
+          <a:schemeClr val="accent1"/>
+        </a:lnRef>
+        <a:fillRef idx="0">
+          <a:schemeClr val="accent1"/>
+        </a:fillRef>
+        <a:effectRef idx="1">
+          <a:schemeClr val="accent1"/>
+        </a:effectRef>
+        <a:fontRef idx="minor">
+          <a:schemeClr val="tx1"/>
+        </a:fontRef>
+      </a:style>
+    </a:lnDef>
+  </a:objectDefaults>
+  <a:extraClrSchemeLst/>
+</a:theme>
 </file>
--- a/modules/05-performance-optimization/assets/performance-optimization.pptx
+++ b/modules/05-performance-optimization/assets/performance-optimization.pptx
@@ -5047,7 +5047,7 @@
               </a:defRPr>
             </a:pPr>
             <a:r>
-              <a:t>Power BI Advanced Factory teaching deck</a:t>
+              <a:t>Student module overview</a:t>
             </a:r>
           </a:p>
         </p:txBody>
@@ -5571,42 +5571,6 @@
       </p:sp>
       <p:sp>
         <p:nvSpPr>
-          <p:cNvPr id="4" name="TextBox 3"/>
-          <p:cNvSpPr txBox="1"/>
-          <p:nvPr/>
-        </p:nvSpPr>
-        <p:spPr>
-          <a:xfrm>
-            <a:off x="530352" y="914400"/>
-            <a:ext cx="10515600" cy="320040"/>
-          </a:xfrm>
-          <a:prstGeom prst="rect">
-            <a:avLst/>
-          </a:prstGeom>
-          <a:noFill/>
-        </p:spPr>
-        <p:txBody>
-          <a:bodyPr wrap="none">
-            <a:spAutoFit/>
-          </a:bodyPr>
-          <a:lstStyle/>
-          <a:p>
-            <a:pPr>
-              <a:defRPr sz="1200">
-                <a:solidFill>
-                  <a:srgbClr val="5C5C5C"/>
-                </a:solidFill>
-                <a:latin typeface="Aptos"/>
-              </a:defRPr>
-            </a:pPr>
-            <a:r>
-              <a:t>Talking points, learner value, and lab connection</a:t>
-            </a:r>
-          </a:p>
-        </p:txBody>
-      </p:sp>
-      <p:sp>
-        <p:nvSpPr>
           <p:cNvPr id="5" name="Rounded Rectangle 4"/>
           <p:cNvSpPr/>
           <p:nvPr/>
@@ -5724,7 +5688,143 @@
               </a:defRPr>
             </a:pPr>
             <a:r>
-              <a:t>Talking points</a:t>
+              <a:t>Key ideas</a:t>
+            </a:r>
+            <a:br/>
+            <a:r>
+              <a:t>• Import aggregation tables</a:t>
+            </a:r>
+            <a:br/>
+            <a:r>
+              <a:t>• DirectQuery detail tables</a:t>
+            </a:r>
+            <a:br/>
+            <a:r>
+              <a:t>• Group-by columns</a:t>
+            </a:r>
+          </a:p>
+        </p:txBody>
+      </p:sp>
+      <p:sp>
+        <p:nvSpPr>
+          <p:cNvPr id="8" name="Rounded Rectangle 7"/>
+          <p:cNvSpPr/>
+          <p:nvPr/>
+        </p:nvSpPr>
+        <p:spPr>
+          <a:xfrm>
+            <a:off x="6263640" y="1234440"/>
+            <a:ext cx="5303520" cy="1828800"/>
+          </a:xfrm>
+          <a:prstGeom prst="roundRect">
+            <a:avLst/>
+          </a:prstGeom>
+          <a:solidFill>
+            <a:srgbClr val="FFFFFF"/>
+          </a:solidFill>
+          <a:ln>
+            <a:solidFill>
+              <a:srgbClr val="DCDCDC"/>
+            </a:solidFill>
+          </a:ln>
+        </p:spPr>
+        <p:style>
+          <a:lnRef idx="1">
+            <a:schemeClr val="accent1"/>
+          </a:lnRef>
+          <a:fillRef idx="3">
+            <a:schemeClr val="accent1"/>
+          </a:fillRef>
+          <a:effectRef idx="2">
+            <a:schemeClr val="accent1"/>
+          </a:effectRef>
+          <a:fontRef idx="minor">
+            <a:schemeClr val="lt1"/>
+          </a:fontRef>
+        </p:style>
+        <p:txBody>
+          <a:bodyPr rtlCol="0" anchor="ctr"/>
+          <a:lstStyle/>
+          <a:p>
+            <a:pPr algn="ctr"/>
+          </a:p>
+        </p:txBody>
+      </p:sp>
+      <p:sp>
+        <p:nvSpPr>
+          <p:cNvPr id="9" name="Rectangle 8"/>
+          <p:cNvSpPr/>
+          <p:nvPr/>
+        </p:nvSpPr>
+        <p:spPr>
+          <a:xfrm>
+            <a:off x="6263640" y="1234440"/>
+            <a:ext cx="91440" cy="1828800"/>
+          </a:xfrm>
+          <a:prstGeom prst="rect">
+            <a:avLst/>
+          </a:prstGeom>
+          <a:solidFill>
+            <a:srgbClr val="02C39A"/>
+          </a:solidFill>
+          <a:ln>
+            <a:noFill/>
+          </a:ln>
+        </p:spPr>
+        <p:style>
+          <a:lnRef idx="1">
+            <a:schemeClr val="accent1"/>
+          </a:lnRef>
+          <a:fillRef idx="3">
+            <a:schemeClr val="accent1"/>
+          </a:fillRef>
+          <a:effectRef idx="2">
+            <a:schemeClr val="accent1"/>
+          </a:effectRef>
+          <a:fontRef idx="minor">
+            <a:schemeClr val="lt1"/>
+          </a:fontRef>
+        </p:style>
+        <p:txBody>
+          <a:bodyPr rtlCol="0" anchor="ctr"/>
+          <a:lstStyle/>
+          <a:p>
+            <a:pPr algn="ctr"/>
+          </a:p>
+        </p:txBody>
+      </p:sp>
+      <p:sp>
+        <p:nvSpPr>
+          <p:cNvPr id="10" name="TextBox 9"/>
+          <p:cNvSpPr txBox="1"/>
+          <p:nvPr/>
+        </p:nvSpPr>
+        <p:spPr>
+          <a:xfrm>
+            <a:off x="6446520" y="1344168"/>
+            <a:ext cx="4983480" cy="1664208"/>
+          </a:xfrm>
+          <a:prstGeom prst="rect">
+            <a:avLst/>
+          </a:prstGeom>
+          <a:noFill/>
+        </p:spPr>
+        <p:txBody>
+          <a:bodyPr wrap="square" lIns="0" rIns="0">
+            <a:spAutoFit/>
+          </a:bodyPr>
+          <a:lstStyle/>
+          <a:p>
+            <a:pPr>
+              <a:defRPr b="1" sz="1500">
+                <a:solidFill>
+                  <a:srgbClr val="1E2761"/>
+                </a:solidFill>
+                <a:latin typeface="Aptos Display"/>
+              </a:defRPr>
+            </a:pPr>
+            <a:r>
+              <a:t>Why it helps</a:t>
             </a:r>
           </a:p>
           <a:p>
@@ -5740,29 +5840,25 @@
               </a:defRPr>
             </a:pPr>
             <a:r>
-              <a:t>• Import aggregation tables</a:t>
+              <a:t>• Manage aggregations</a:t>
             </a:r>
             <a:br/>
             <a:r>
-              <a:t>• DirectQuery detail tables</a:t>
-            </a:r>
-            <a:br/>
-            <a:r>
-              <a:t>• Group-by columns</a:t>
-            </a:r>
-          </a:p>
-        </p:txBody>
-      </p:sp>
-      <p:sp>
-        <p:nvSpPr>
-          <p:cNvPr id="8" name="Rounded Rectangle 7"/>
+              <a:t>• Source validation</a:t>
+            </a:r>
+          </a:p>
+        </p:txBody>
+      </p:sp>
+      <p:sp>
+        <p:nvSpPr>
+          <p:cNvPr id="11" name="Rounded Rectangle 10"/>
           <p:cNvSpPr/>
           <p:nvPr/>
         </p:nvSpPr>
         <p:spPr>
           <a:xfrm>
-            <a:off x="6263640" y="1234440"/>
-            <a:ext cx="5303520" cy="1828800"/>
+            <a:off x="822960" y="4160520"/>
+            <a:ext cx="10424160" cy="868680"/>
           </a:xfrm>
           <a:prstGeom prst="roundRect">
             <a:avLst/>
@@ -5800,20 +5896,20 @@
       </p:sp>
       <p:sp>
         <p:nvSpPr>
-          <p:cNvPr id="9" name="Rectangle 8"/>
+          <p:cNvPr id="12" name="Rectangle 11"/>
           <p:cNvSpPr/>
           <p:nvPr/>
         </p:nvSpPr>
         <p:spPr>
           <a:xfrm>
-            <a:off x="6263640" y="1234440"/>
-            <a:ext cx="91440" cy="1828800"/>
+            <a:off x="822960" y="4160520"/>
+            <a:ext cx="91440" cy="868680"/>
           </a:xfrm>
           <a:prstGeom prst="rect">
             <a:avLst/>
           </a:prstGeom>
           <a:solidFill>
-            <a:srgbClr val="02C39A"/>
+            <a:srgbClr val="F9B700"/>
           </a:solidFill>
           <a:ln>
             <a:noFill/>
@@ -5843,14 +5939,14 @@
       </p:sp>
       <p:sp>
         <p:nvSpPr>
-          <p:cNvPr id="10" name="TextBox 9"/>
+          <p:cNvPr id="13" name="TextBox 12"/>
           <p:cNvSpPr txBox="1"/>
           <p:nvPr/>
         </p:nvSpPr>
         <p:spPr>
           <a:xfrm>
-            <a:off x="6446520" y="1344168"/>
-            <a:ext cx="4983480" cy="1664208"/>
+            <a:off x="1005840" y="4270248"/>
+            <a:ext cx="10104120" cy="704088"/>
           </a:xfrm>
           <a:prstGeom prst="rect">
             <a:avLst/>
@@ -5872,167 +5968,7 @@
               </a:defRPr>
             </a:pPr>
             <a:r>
-              <a:t>Why it helps</a:t>
-            </a:r>
-          </a:p>
-          <a:p>
-            <a:pPr>
-              <a:spcBef>
-                <a:spcPts val="400"/>
-              </a:spcBef>
-              <a:defRPr sz="1050">
-                <a:solidFill>
-                  <a:srgbClr val="242424"/>
-                </a:solidFill>
-                <a:latin typeface="Aptos"/>
-              </a:defRPr>
-            </a:pPr>
-            <a:r>
-              <a:t>• Manage aggregations</a:t>
-            </a:r>
-            <a:br/>
-            <a:r>
-              <a:t>• Source validation</a:t>
-            </a:r>
-          </a:p>
-        </p:txBody>
-      </p:sp>
-      <p:sp>
-        <p:nvSpPr>
-          <p:cNvPr id="11" name="Rounded Rectangle 10"/>
-          <p:cNvSpPr/>
-          <p:nvPr/>
-        </p:nvSpPr>
-        <p:spPr>
-          <a:xfrm>
-            <a:off x="822960" y="4160520"/>
-            <a:ext cx="10424160" cy="868680"/>
-          </a:xfrm>
-          <a:prstGeom prst="roundRect">
-            <a:avLst/>
-          </a:prstGeom>
-          <a:solidFill>
-            <a:srgbClr val="FFFFFF"/>
-          </a:solidFill>
-          <a:ln>
-            <a:solidFill>
-              <a:srgbClr val="DCDCDC"/>
-            </a:solidFill>
-          </a:ln>
-        </p:spPr>
-        <p:style>
-          <a:lnRef idx="1">
-            <a:schemeClr val="accent1"/>
-          </a:lnRef>
-          <a:fillRef idx="3">
-            <a:schemeClr val="accent1"/>
-          </a:fillRef>
-          <a:effectRef idx="2">
-            <a:schemeClr val="accent1"/>
-          </a:effectRef>
-          <a:fontRef idx="minor">
-            <a:schemeClr val="lt1"/>
-          </a:fontRef>
-        </p:style>
-        <p:txBody>
-          <a:bodyPr rtlCol="0" anchor="ctr"/>
-          <a:lstStyle/>
-          <a:p>
-            <a:pPr algn="ctr"/>
-          </a:p>
-        </p:txBody>
-      </p:sp>
-      <p:sp>
-        <p:nvSpPr>
-          <p:cNvPr id="12" name="Rectangle 11"/>
-          <p:cNvSpPr/>
-          <p:nvPr/>
-        </p:nvSpPr>
-        <p:spPr>
-          <a:xfrm>
-            <a:off x="822960" y="4160520"/>
-            <a:ext cx="91440" cy="868680"/>
-          </a:xfrm>
-          <a:prstGeom prst="rect">
-            <a:avLst/>
-          </a:prstGeom>
-          <a:solidFill>
-            <a:srgbClr val="F9B700"/>
-          </a:solidFill>
-          <a:ln>
-            <a:noFill/>
-          </a:ln>
-        </p:spPr>
-        <p:style>
-          <a:lnRef idx="1">
-            <a:schemeClr val="accent1"/>
-          </a:lnRef>
-          <a:fillRef idx="3">
-            <a:schemeClr val="accent1"/>
-          </a:fillRef>
-          <a:effectRef idx="2">
-            <a:schemeClr val="accent1"/>
-          </a:effectRef>
-          <a:fontRef idx="minor">
-            <a:schemeClr val="lt1"/>
-          </a:fontRef>
-        </p:style>
-        <p:txBody>
-          <a:bodyPr rtlCol="0" anchor="ctr"/>
-          <a:lstStyle/>
-          <a:p>
-            <a:pPr algn="ctr"/>
-          </a:p>
-        </p:txBody>
-      </p:sp>
-      <p:sp>
-        <p:nvSpPr>
-          <p:cNvPr id="13" name="TextBox 12"/>
-          <p:cNvSpPr txBox="1"/>
-          <p:nvPr/>
-        </p:nvSpPr>
-        <p:spPr>
-          <a:xfrm>
-            <a:off x="1005840" y="4270248"/>
-            <a:ext cx="10104120" cy="704088"/>
-          </a:xfrm>
-          <a:prstGeom prst="rect">
-            <a:avLst/>
-          </a:prstGeom>
-          <a:noFill/>
-        </p:spPr>
-        <p:txBody>
-          <a:bodyPr wrap="square" lIns="0" rIns="0">
-            <a:spAutoFit/>
-          </a:bodyPr>
-          <a:lstStyle/>
-          <a:p>
-            <a:pPr>
-              <a:defRPr b="1" sz="1500">
-                <a:solidFill>
-                  <a:srgbClr val="1E2761"/>
-                </a:solidFill>
-                <a:latin typeface="Aptos Display"/>
-              </a:defRPr>
-            </a:pPr>
-            <a:r>
-              <a:t>Lab connection</a:t>
-            </a:r>
-          </a:p>
-          <a:p>
-            <a:pPr>
-              <a:spcBef>
-                <a:spcPts val="400"/>
-              </a:spcBef>
-              <a:defRPr sz="1050">
-                <a:solidFill>
-                  <a:srgbClr val="242424"/>
-                </a:solidFill>
-                <a:latin typeface="Aptos"/>
-              </a:defRPr>
-            </a:pPr>
-            <a:r>
-              <a:t>Coverage: Covered. Use the lab README to demonstrate or discuss this topic. Review terms: group, import, manage.</a:t>
+              <a:t>In the lab, you will apply this pattern, validate the expected behavior, and discuss where it fits in a real Power BI solution.</a:t>
             </a:r>
           </a:p>
         </p:txBody>
@@ -6171,42 +6107,6 @@
       </p:sp>
       <p:sp>
         <p:nvSpPr>
-          <p:cNvPr id="4" name="TextBox 3"/>
-          <p:cNvSpPr txBox="1"/>
-          <p:nvPr/>
-        </p:nvSpPr>
-        <p:spPr>
-          <a:xfrm>
-            <a:off x="530352" y="914400"/>
-            <a:ext cx="10515600" cy="320040"/>
-          </a:xfrm>
-          <a:prstGeom prst="rect">
-            <a:avLst/>
-          </a:prstGeom>
-          <a:noFill/>
-        </p:spPr>
-        <p:txBody>
-          <a:bodyPr wrap="none">
-            <a:spAutoFit/>
-          </a:bodyPr>
-          <a:lstStyle/>
-          <a:p>
-            <a:pPr>
-              <a:defRPr sz="1200">
-                <a:solidFill>
-                  <a:srgbClr val="5C5C5C"/>
-                </a:solidFill>
-                <a:latin typeface="Aptos"/>
-              </a:defRPr>
-            </a:pPr>
-            <a:r>
-              <a:t>Talking points, learner value, and lab connection</a:t>
-            </a:r>
-          </a:p>
-        </p:txBody>
-      </p:sp>
-      <p:sp>
-        <p:nvSpPr>
           <p:cNvPr id="5" name="Rounded Rectangle 4"/>
           <p:cNvSpPr/>
           <p:nvPr/>
@@ -6324,7 +6224,143 @@
               </a:defRPr>
             </a:pPr>
             <a:r>
-              <a:t>Talking points</a:t>
+              <a:t>Key ideas</a:t>
+            </a:r>
+            <a:br/>
+            <a:r>
+              <a:t>• Import vs. DirectQuery</a:t>
+            </a:r>
+            <a:br/>
+            <a:r>
+              <a:t>• Dual mode</a:t>
+            </a:r>
+            <a:br/>
+            <a:r>
+              <a:t>• Hybrid tables</a:t>
+            </a:r>
+          </a:p>
+        </p:txBody>
+      </p:sp>
+      <p:sp>
+        <p:nvSpPr>
+          <p:cNvPr id="8" name="Rounded Rectangle 7"/>
+          <p:cNvSpPr/>
+          <p:nvPr/>
+        </p:nvSpPr>
+        <p:spPr>
+          <a:xfrm>
+            <a:off x="6263640" y="1234440"/>
+            <a:ext cx="5303520" cy="1828800"/>
+          </a:xfrm>
+          <a:prstGeom prst="roundRect">
+            <a:avLst/>
+          </a:prstGeom>
+          <a:solidFill>
+            <a:srgbClr val="FFFFFF"/>
+          </a:solidFill>
+          <a:ln>
+            <a:solidFill>
+              <a:srgbClr val="DCDCDC"/>
+            </a:solidFill>
+          </a:ln>
+        </p:spPr>
+        <p:style>
+          <a:lnRef idx="1">
+            <a:schemeClr val="accent1"/>
+          </a:lnRef>
+          <a:fillRef idx="3">
+            <a:schemeClr val="accent1"/>
+          </a:fillRef>
+          <a:effectRef idx="2">
+            <a:schemeClr val="accent1"/>
+          </a:effectRef>
+          <a:fontRef idx="minor">
+            <a:schemeClr val="lt1"/>
+          </a:fontRef>
+        </p:style>
+        <p:txBody>
+          <a:bodyPr rtlCol="0" anchor="ctr"/>
+          <a:lstStyle/>
+          <a:p>
+            <a:pPr algn="ctr"/>
+          </a:p>
+        </p:txBody>
+      </p:sp>
+      <p:sp>
+        <p:nvSpPr>
+          <p:cNvPr id="9" name="Rectangle 8"/>
+          <p:cNvSpPr/>
+          <p:nvPr/>
+        </p:nvSpPr>
+        <p:spPr>
+          <a:xfrm>
+            <a:off x="6263640" y="1234440"/>
+            <a:ext cx="91440" cy="1828800"/>
+          </a:xfrm>
+          <a:prstGeom prst="rect">
+            <a:avLst/>
+          </a:prstGeom>
+          <a:solidFill>
+            <a:srgbClr val="02C39A"/>
+          </a:solidFill>
+          <a:ln>
+            <a:noFill/>
+          </a:ln>
+        </p:spPr>
+        <p:style>
+          <a:lnRef idx="1">
+            <a:schemeClr val="accent1"/>
+          </a:lnRef>
+          <a:fillRef idx="3">
+            <a:schemeClr val="accent1"/>
+          </a:fillRef>
+          <a:effectRef idx="2">
+            <a:schemeClr val="accent1"/>
+          </a:effectRef>
+          <a:fontRef idx="minor">
+            <a:schemeClr val="lt1"/>
+          </a:fontRef>
+        </p:style>
+        <p:txBody>
+          <a:bodyPr rtlCol="0" anchor="ctr"/>
+          <a:lstStyle/>
+          <a:p>
+            <a:pPr algn="ctr"/>
+          </a:p>
+        </p:txBody>
+      </p:sp>
+      <p:sp>
+        <p:nvSpPr>
+          <p:cNvPr id="10" name="TextBox 9"/>
+          <p:cNvSpPr txBox="1"/>
+          <p:nvPr/>
+        </p:nvSpPr>
+        <p:spPr>
+          <a:xfrm>
+            <a:off x="6446520" y="1344168"/>
+            <a:ext cx="4983480" cy="1664208"/>
+          </a:xfrm>
+          <a:prstGeom prst="rect">
+            <a:avLst/>
+          </a:prstGeom>
+          <a:noFill/>
+        </p:spPr>
+        <p:txBody>
+          <a:bodyPr wrap="square" lIns="0" rIns="0">
+            <a:spAutoFit/>
+          </a:bodyPr>
+          <a:lstStyle/>
+          <a:p>
+            <a:pPr>
+              <a:defRPr b="1" sz="1500">
+                <a:solidFill>
+                  <a:srgbClr val="1E2761"/>
+                </a:solidFill>
+                <a:latin typeface="Aptos Display"/>
+              </a:defRPr>
+            </a:pPr>
+            <a:r>
+              <a:t>Why it helps</a:t>
             </a:r>
           </a:p>
           <a:p>
@@ -6340,29 +6376,25 @@
               </a:defRPr>
             </a:pPr>
             <a:r>
-              <a:t>• Import vs. DirectQuery</a:t>
+              <a:t>• Large models</a:t>
             </a:r>
             <a:br/>
             <a:r>
-              <a:t>• Dual mode</a:t>
-            </a:r>
-            <a:br/>
-            <a:r>
-              <a:t>• Hybrid tables</a:t>
-            </a:r>
-          </a:p>
-        </p:txBody>
-      </p:sp>
-      <p:sp>
-        <p:nvSpPr>
-          <p:cNvPr id="8" name="Rounded Rectangle 7"/>
+              <a:t>• Tradeoffs</a:t>
+            </a:r>
+          </a:p>
+        </p:txBody>
+      </p:sp>
+      <p:sp>
+        <p:nvSpPr>
+          <p:cNvPr id="11" name="Rounded Rectangle 10"/>
           <p:cNvSpPr/>
           <p:nvPr/>
         </p:nvSpPr>
         <p:spPr>
           <a:xfrm>
-            <a:off x="6263640" y="1234440"/>
-            <a:ext cx="5303520" cy="1828800"/>
+            <a:off x="822960" y="4160520"/>
+            <a:ext cx="10424160" cy="868680"/>
           </a:xfrm>
           <a:prstGeom prst="roundRect">
             <a:avLst/>
@@ -6400,20 +6432,20 @@
       </p:sp>
       <p:sp>
         <p:nvSpPr>
-          <p:cNvPr id="9" name="Rectangle 8"/>
+          <p:cNvPr id="12" name="Rectangle 11"/>
           <p:cNvSpPr/>
           <p:nvPr/>
         </p:nvSpPr>
         <p:spPr>
           <a:xfrm>
-            <a:off x="6263640" y="1234440"/>
-            <a:ext cx="91440" cy="1828800"/>
+            <a:off x="822960" y="4160520"/>
+            <a:ext cx="91440" cy="868680"/>
           </a:xfrm>
           <a:prstGeom prst="rect">
             <a:avLst/>
           </a:prstGeom>
           <a:solidFill>
-            <a:srgbClr val="02C39A"/>
+            <a:srgbClr val="F9B700"/>
           </a:solidFill>
           <a:ln>
             <a:noFill/>
@@ -6443,14 +6475,14 @@
       </p:sp>
       <p:sp>
         <p:nvSpPr>
-          <p:cNvPr id="10" name="TextBox 9"/>
+          <p:cNvPr id="13" name="TextBox 12"/>
           <p:cNvSpPr txBox="1"/>
           <p:nvPr/>
         </p:nvSpPr>
         <p:spPr>
           <a:xfrm>
-            <a:off x="6446520" y="1344168"/>
-            <a:ext cx="4983480" cy="1664208"/>
+            <a:off x="1005840" y="4270248"/>
+            <a:ext cx="10104120" cy="704088"/>
           </a:xfrm>
           <a:prstGeom prst="rect">
             <a:avLst/>
@@ -6472,167 +6504,7 @@
               </a:defRPr>
             </a:pPr>
             <a:r>
-              <a:t>Why it helps</a:t>
-            </a:r>
-          </a:p>
-          <a:p>
-            <a:pPr>
-              <a:spcBef>
-                <a:spcPts val="400"/>
-              </a:spcBef>
-              <a:defRPr sz="1050">
-                <a:solidFill>
-                  <a:srgbClr val="242424"/>
-                </a:solidFill>
-                <a:latin typeface="Aptos"/>
-              </a:defRPr>
-            </a:pPr>
-            <a:r>
-              <a:t>• Large models</a:t>
-            </a:r>
-            <a:br/>
-            <a:r>
-              <a:t>• Tradeoffs</a:t>
-            </a:r>
-          </a:p>
-        </p:txBody>
-      </p:sp>
-      <p:sp>
-        <p:nvSpPr>
-          <p:cNvPr id="11" name="Rounded Rectangle 10"/>
-          <p:cNvSpPr/>
-          <p:nvPr/>
-        </p:nvSpPr>
-        <p:spPr>
-          <a:xfrm>
-            <a:off x="822960" y="4160520"/>
-            <a:ext cx="10424160" cy="868680"/>
-          </a:xfrm>
-          <a:prstGeom prst="roundRect">
-            <a:avLst/>
-          </a:prstGeom>
-          <a:solidFill>
-            <a:srgbClr val="FFFFFF"/>
-          </a:solidFill>
-          <a:ln>
-            <a:solidFill>
-              <a:srgbClr val="DCDCDC"/>
-            </a:solidFill>
-          </a:ln>
-        </p:spPr>
-        <p:style>
-          <a:lnRef idx="1">
-            <a:schemeClr val="accent1"/>
-          </a:lnRef>
-          <a:fillRef idx="3">
-            <a:schemeClr val="accent1"/>
-          </a:fillRef>
-          <a:effectRef idx="2">
-            <a:schemeClr val="accent1"/>
-          </a:effectRef>
-          <a:fontRef idx="minor">
-            <a:schemeClr val="lt1"/>
-          </a:fontRef>
-        </p:style>
-        <p:txBody>
-          <a:bodyPr rtlCol="0" anchor="ctr"/>
-          <a:lstStyle/>
-          <a:p>
-            <a:pPr algn="ctr"/>
-          </a:p>
-        </p:txBody>
-      </p:sp>
-      <p:sp>
-        <p:nvSpPr>
-          <p:cNvPr id="12" name="Rectangle 11"/>
-          <p:cNvSpPr/>
-          <p:nvPr/>
-        </p:nvSpPr>
-        <p:spPr>
-          <a:xfrm>
-            <a:off x="822960" y="4160520"/>
-            <a:ext cx="91440" cy="868680"/>
-          </a:xfrm>
-          <a:prstGeom prst="rect">
-            <a:avLst/>
-          </a:prstGeom>
-          <a:solidFill>
-            <a:srgbClr val="F9B700"/>
-          </a:solidFill>
-          <a:ln>
-            <a:noFill/>
-          </a:ln>
-        </p:spPr>
-        <p:style>
-          <a:lnRef idx="1">
-            <a:schemeClr val="accent1"/>
-          </a:lnRef>
-          <a:fillRef idx="3">
-            <a:schemeClr val="accent1"/>
-          </a:fillRef>
-          <a:effectRef idx="2">
-            <a:schemeClr val="accent1"/>
-          </a:effectRef>
-          <a:fontRef idx="minor">
-            <a:schemeClr val="lt1"/>
-          </a:fontRef>
-        </p:style>
-        <p:txBody>
-          <a:bodyPr rtlCol="0" anchor="ctr"/>
-          <a:lstStyle/>
-          <a:p>
-            <a:pPr algn="ctr"/>
-          </a:p>
-        </p:txBody>
-      </p:sp>
-      <p:sp>
-        <p:nvSpPr>
-          <p:cNvPr id="13" name="TextBox 12"/>
-          <p:cNvSpPr txBox="1"/>
-          <p:nvPr/>
-        </p:nvSpPr>
-        <p:spPr>
-          <a:xfrm>
-            <a:off x="1005840" y="4270248"/>
-            <a:ext cx="10104120" cy="704088"/>
-          </a:xfrm>
-          <a:prstGeom prst="rect">
-            <a:avLst/>
-          </a:prstGeom>
-          <a:noFill/>
-        </p:spPr>
-        <p:txBody>
-          <a:bodyPr wrap="square" lIns="0" rIns="0">
-            <a:spAutoFit/>
-          </a:bodyPr>
-          <a:lstStyle/>
-          <a:p>
-            <a:pPr>
-              <a:defRPr b="1" sz="1500">
-                <a:solidFill>
-                  <a:srgbClr val="1E2761"/>
-                </a:solidFill>
-                <a:latin typeface="Aptos Display"/>
-              </a:defRPr>
-            </a:pPr>
-            <a:r>
-              <a:t>Lab connection</a:t>
-            </a:r>
-          </a:p>
-          <a:p>
-            <a:pPr>
-              <a:spcBef>
-                <a:spcPts val="400"/>
-              </a:spcBef>
-              <a:defRPr sz="1050">
-                <a:solidFill>
-                  <a:srgbClr val="242424"/>
-                </a:solidFill>
-                <a:latin typeface="Aptos"/>
-              </a:defRPr>
-            </a:pPr>
-            <a:r>
-              <a:t>Coverage: Partial. Use the lab README to demonstrate or discuss this topic. Review terms: hybrid, import, large, tradeoffs.</a:t>
+              <a:t>In the lab, you will apply this pattern, validate the expected behavior, and discuss where it fits in a real Power BI solution.</a:t>
             </a:r>
           </a:p>
         </p:txBody>
@@ -6771,42 +6643,6 @@
       </p:sp>
       <p:sp>
         <p:nvSpPr>
-          <p:cNvPr id="4" name="TextBox 3"/>
-          <p:cNvSpPr txBox="1"/>
-          <p:nvPr/>
-        </p:nvSpPr>
-        <p:spPr>
-          <a:xfrm>
-            <a:off x="530352" y="914400"/>
-            <a:ext cx="10515600" cy="320040"/>
-          </a:xfrm>
-          <a:prstGeom prst="rect">
-            <a:avLst/>
-          </a:prstGeom>
-          <a:noFill/>
-        </p:spPr>
-        <p:txBody>
-          <a:bodyPr wrap="none">
-            <a:spAutoFit/>
-          </a:bodyPr>
-          <a:lstStyle/>
-          <a:p>
-            <a:pPr>
-              <a:defRPr sz="1200">
-                <a:solidFill>
-                  <a:srgbClr val="5C5C5C"/>
-                </a:solidFill>
-                <a:latin typeface="Aptos"/>
-              </a:defRPr>
-            </a:pPr>
-            <a:r>
-              <a:t>Talking points, learner value, and lab connection</a:t>
-            </a:r>
-          </a:p>
-        </p:txBody>
-      </p:sp>
-      <p:sp>
-        <p:nvSpPr>
           <p:cNvPr id="5" name="Rounded Rectangle 4"/>
           <p:cNvSpPr/>
           <p:nvPr/>
@@ -6924,7 +6760,143 @@
               </a:defRPr>
             </a:pPr>
             <a:r>
-              <a:t>Talking points</a:t>
+              <a:t>Key ideas</a:t>
+            </a:r>
+            <a:br/>
+            <a:r>
+              <a:t>• Refresh history</a:t>
+            </a:r>
+            <a:br/>
+            <a:r>
+              <a:t>• Dataset settings</a:t>
+            </a:r>
+            <a:br/>
+            <a:r>
+              <a:t>• Capacity metrics</a:t>
+            </a:r>
+          </a:p>
+        </p:txBody>
+      </p:sp>
+      <p:sp>
+        <p:nvSpPr>
+          <p:cNvPr id="8" name="Rounded Rectangle 7"/>
+          <p:cNvSpPr/>
+          <p:nvPr/>
+        </p:nvSpPr>
+        <p:spPr>
+          <a:xfrm>
+            <a:off x="6263640" y="1234440"/>
+            <a:ext cx="5303520" cy="1828800"/>
+          </a:xfrm>
+          <a:prstGeom prst="roundRect">
+            <a:avLst/>
+          </a:prstGeom>
+          <a:solidFill>
+            <a:srgbClr val="FFFFFF"/>
+          </a:solidFill>
+          <a:ln>
+            <a:solidFill>
+              <a:srgbClr val="DCDCDC"/>
+            </a:solidFill>
+          </a:ln>
+        </p:spPr>
+        <p:style>
+          <a:lnRef idx="1">
+            <a:schemeClr val="accent1"/>
+          </a:lnRef>
+          <a:fillRef idx="3">
+            <a:schemeClr val="accent1"/>
+          </a:fillRef>
+          <a:effectRef idx="2">
+            <a:schemeClr val="accent1"/>
+          </a:effectRef>
+          <a:fontRef idx="minor">
+            <a:schemeClr val="lt1"/>
+          </a:fontRef>
+        </p:style>
+        <p:txBody>
+          <a:bodyPr rtlCol="0" anchor="ctr"/>
+          <a:lstStyle/>
+          <a:p>
+            <a:pPr algn="ctr"/>
+          </a:p>
+        </p:txBody>
+      </p:sp>
+      <p:sp>
+        <p:nvSpPr>
+          <p:cNvPr id="9" name="Rectangle 8"/>
+          <p:cNvSpPr/>
+          <p:nvPr/>
+        </p:nvSpPr>
+        <p:spPr>
+          <a:xfrm>
+            <a:off x="6263640" y="1234440"/>
+            <a:ext cx="91440" cy="1828800"/>
+          </a:xfrm>
+          <a:prstGeom prst="rect">
+            <a:avLst/>
+          </a:prstGeom>
+          <a:solidFill>
+            <a:srgbClr val="02C39A"/>
+          </a:solidFill>
+          <a:ln>
+            <a:noFill/>
+          </a:ln>
+        </p:spPr>
+        <p:style>
+          <a:lnRef idx="1">
+            <a:schemeClr val="accent1"/>
+          </a:lnRef>
+          <a:fillRef idx="3">
+            <a:schemeClr val="accent1"/>
+          </a:fillRef>
+          <a:effectRef idx="2">
+            <a:schemeClr val="accent1"/>
+          </a:effectRef>
+          <a:fontRef idx="minor">
+            <a:schemeClr val="lt1"/>
+          </a:fontRef>
+        </p:style>
+        <p:txBody>
+          <a:bodyPr rtlCol="0" anchor="ctr"/>
+          <a:lstStyle/>
+          <a:p>
+            <a:pPr algn="ctr"/>
+          </a:p>
+        </p:txBody>
+      </p:sp>
+      <p:sp>
+        <p:nvSpPr>
+          <p:cNvPr id="10" name="TextBox 9"/>
+          <p:cNvSpPr txBox="1"/>
+          <p:nvPr/>
+        </p:nvSpPr>
+        <p:spPr>
+          <a:xfrm>
+            <a:off x="6446520" y="1344168"/>
+            <a:ext cx="4983480" cy="1664208"/>
+          </a:xfrm>
+          <a:prstGeom prst="rect">
+            <a:avLst/>
+          </a:prstGeom>
+          <a:noFill/>
+        </p:spPr>
+        <p:txBody>
+          <a:bodyPr wrap="square" lIns="0" rIns="0">
+            <a:spAutoFit/>
+          </a:bodyPr>
+          <a:lstStyle/>
+          <a:p>
+            <a:pPr>
+              <a:defRPr b="1" sz="1500">
+                <a:solidFill>
+                  <a:srgbClr val="1E2761"/>
+                </a:solidFill>
+                <a:latin typeface="Aptos Display"/>
+              </a:defRPr>
+            </a:pPr>
+            <a:r>
+              <a:t>Why it helps</a:t>
             </a:r>
           </a:p>
           <a:p>
@@ -6940,29 +6912,25 @@
               </a:defRPr>
             </a:pPr>
             <a:r>
-              <a:t>• Refresh history</a:t>
+              <a:t>• Admin monitoring</a:t>
             </a:r>
             <a:br/>
             <a:r>
-              <a:t>• Dataset settings</a:t>
-            </a:r>
-            <a:br/>
-            <a:r>
-              <a:t>• Capacity metrics</a:t>
-            </a:r>
-          </a:p>
-        </p:txBody>
-      </p:sp>
-      <p:sp>
-        <p:nvSpPr>
-          <p:cNvPr id="8" name="Rounded Rectangle 7"/>
+              <a:t>• Gov validation requirements</a:t>
+            </a:r>
+          </a:p>
+        </p:txBody>
+      </p:sp>
+      <p:sp>
+        <p:nvSpPr>
+          <p:cNvPr id="11" name="Rounded Rectangle 10"/>
           <p:cNvSpPr/>
           <p:nvPr/>
         </p:nvSpPr>
         <p:spPr>
           <a:xfrm>
-            <a:off x="6263640" y="1234440"/>
-            <a:ext cx="5303520" cy="1828800"/>
+            <a:off x="822960" y="4160520"/>
+            <a:ext cx="10424160" cy="868680"/>
           </a:xfrm>
           <a:prstGeom prst="roundRect">
             <a:avLst/>
@@ -7000,20 +6968,20 @@
       </p:sp>
       <p:sp>
         <p:nvSpPr>
-          <p:cNvPr id="9" name="Rectangle 8"/>
+          <p:cNvPr id="12" name="Rectangle 11"/>
           <p:cNvSpPr/>
           <p:nvPr/>
         </p:nvSpPr>
         <p:spPr>
           <a:xfrm>
-            <a:off x="6263640" y="1234440"/>
-            <a:ext cx="91440" cy="1828800"/>
+            <a:off x="822960" y="4160520"/>
+            <a:ext cx="91440" cy="868680"/>
           </a:xfrm>
           <a:prstGeom prst="rect">
             <a:avLst/>
           </a:prstGeom>
           <a:solidFill>
-            <a:srgbClr val="02C39A"/>
+            <a:srgbClr val="F9B700"/>
           </a:solidFill>
           <a:ln>
             <a:noFill/>
@@ -7043,14 +7011,14 @@
       </p:sp>
       <p:sp>
         <p:nvSpPr>
-          <p:cNvPr id="10" name="TextBox 9"/>
+          <p:cNvPr id="13" name="TextBox 12"/>
           <p:cNvSpPr txBox="1"/>
           <p:nvPr/>
         </p:nvSpPr>
         <p:spPr>
           <a:xfrm>
-            <a:off x="6446520" y="1344168"/>
-            <a:ext cx="4983480" cy="1664208"/>
+            <a:off x="1005840" y="4270248"/>
+            <a:ext cx="10104120" cy="704088"/>
           </a:xfrm>
           <a:prstGeom prst="rect">
             <a:avLst/>
@@ -7072,167 +7040,7 @@
               </a:defRPr>
             </a:pPr>
             <a:r>
-              <a:t>Why it helps</a:t>
-            </a:r>
-          </a:p>
-          <a:p>
-            <a:pPr>
-              <a:spcBef>
-                <a:spcPts val="400"/>
-              </a:spcBef>
-              <a:defRPr sz="1050">
-                <a:solidFill>
-                  <a:srgbClr val="242424"/>
-                </a:solidFill>
-                <a:latin typeface="Aptos"/>
-              </a:defRPr>
-            </a:pPr>
-            <a:r>
-              <a:t>• Admin monitoring</a:t>
-            </a:r>
-            <a:br/>
-            <a:r>
-              <a:t>• Gov validation requirements</a:t>
-            </a:r>
-          </a:p>
-        </p:txBody>
-      </p:sp>
-      <p:sp>
-        <p:nvSpPr>
-          <p:cNvPr id="11" name="Rounded Rectangle 10"/>
-          <p:cNvSpPr/>
-          <p:nvPr/>
-        </p:nvSpPr>
-        <p:spPr>
-          <a:xfrm>
-            <a:off x="822960" y="4160520"/>
-            <a:ext cx="10424160" cy="868680"/>
-          </a:xfrm>
-          <a:prstGeom prst="roundRect">
-            <a:avLst/>
-          </a:prstGeom>
-          <a:solidFill>
-            <a:srgbClr val="FFFFFF"/>
-          </a:solidFill>
-          <a:ln>
-            <a:solidFill>
-              <a:srgbClr val="DCDCDC"/>
-            </a:solidFill>
-          </a:ln>
-        </p:spPr>
-        <p:style>
-          <a:lnRef idx="1">
-            <a:schemeClr val="accent1"/>
-          </a:lnRef>
-          <a:fillRef idx="3">
-            <a:schemeClr val="accent1"/>
-          </a:fillRef>
-          <a:effectRef idx="2">
-            <a:schemeClr val="accent1"/>
-          </a:effectRef>
-          <a:fontRef idx="minor">
-            <a:schemeClr val="lt1"/>
-          </a:fontRef>
-        </p:style>
-        <p:txBody>
-          <a:bodyPr rtlCol="0" anchor="ctr"/>
-          <a:lstStyle/>
-          <a:p>
-            <a:pPr algn="ctr"/>
-          </a:p>
-        </p:txBody>
-      </p:sp>
-      <p:sp>
-        <p:nvSpPr>
-          <p:cNvPr id="12" name="Rectangle 11"/>
-          <p:cNvSpPr/>
-          <p:nvPr/>
-        </p:nvSpPr>
-        <p:spPr>
-          <a:xfrm>
-            <a:off x="822960" y="4160520"/>
-            <a:ext cx="91440" cy="868680"/>
-          </a:xfrm>
-          <a:prstGeom prst="rect">
-            <a:avLst/>
-          </a:prstGeom>
-          <a:solidFill>
-            <a:srgbClr val="F9B700"/>
-          </a:solidFill>
-          <a:ln>
-            <a:noFill/>
-          </a:ln>
-        </p:spPr>
-        <p:style>
-          <a:lnRef idx="1">
-            <a:schemeClr val="accent1"/>
-          </a:lnRef>
-          <a:fillRef idx="3">
-            <a:schemeClr val="accent1"/>
-          </a:fillRef>
-          <a:effectRef idx="2">
-            <a:schemeClr val="accent1"/>
-          </a:effectRef>
-          <a:fontRef idx="minor">
-            <a:schemeClr val="lt1"/>
-          </a:fontRef>
-        </p:style>
-        <p:txBody>
-          <a:bodyPr rtlCol="0" anchor="ctr"/>
-          <a:lstStyle/>
-          <a:p>
-            <a:pPr algn="ctr"/>
-          </a:p>
-        </p:txBody>
-      </p:sp>
-      <p:sp>
-        <p:nvSpPr>
-          <p:cNvPr id="13" name="TextBox 12"/>
-          <p:cNvSpPr txBox="1"/>
-          <p:nvPr/>
-        </p:nvSpPr>
-        <p:spPr>
-          <a:xfrm>
-            <a:off x="1005840" y="4270248"/>
-            <a:ext cx="10104120" cy="704088"/>
-          </a:xfrm>
-          <a:prstGeom prst="rect">
-            <a:avLst/>
-          </a:prstGeom>
-          <a:noFill/>
-        </p:spPr>
-        <p:txBody>
-          <a:bodyPr wrap="square" lIns="0" rIns="0">
-            <a:spAutoFit/>
-          </a:bodyPr>
-          <a:lstStyle/>
-          <a:p>
-            <a:pPr>
-              <a:defRPr b="1" sz="1500">
-                <a:solidFill>
-                  <a:srgbClr val="1E2761"/>
-                </a:solidFill>
-                <a:latin typeface="Aptos Display"/>
-              </a:defRPr>
-            </a:pPr>
-            <a:r>
-              <a:t>Lab connection</a:t>
-            </a:r>
-          </a:p>
-          <a:p>
-            <a:pPr>
-              <a:spcBef>
-                <a:spcPts val="400"/>
-              </a:spcBef>
-              <a:defRPr sz="1050">
-                <a:solidFill>
-                  <a:srgbClr val="242424"/>
-                </a:solidFill>
-                <a:latin typeface="Aptos"/>
-              </a:defRPr>
-            </a:pPr>
-            <a:r>
-              <a:t>Coverage: Covered. Use the lab README to demonstrate or discuss this topic. Review terms: admin, dataset, history, monitoring.</a:t>
+              <a:t>In the lab, you will apply this pattern, validate the expected behavior, and discuss where it fits in a real Power BI solution.</a:t>
             </a:r>
           </a:p>
         </p:txBody>
@@ -7371,42 +7179,6 @@
       </p:sp>
       <p:sp>
         <p:nvSpPr>
-          <p:cNvPr id="4" name="TextBox 3"/>
-          <p:cNvSpPr txBox="1"/>
-          <p:nvPr/>
-        </p:nvSpPr>
-        <p:spPr>
-          <a:xfrm>
-            <a:off x="530352" y="914400"/>
-            <a:ext cx="10515600" cy="320040"/>
-          </a:xfrm>
-          <a:prstGeom prst="rect">
-            <a:avLst/>
-          </a:prstGeom>
-          <a:noFill/>
-        </p:spPr>
-        <p:txBody>
-          <a:bodyPr wrap="none">
-            <a:spAutoFit/>
-          </a:bodyPr>
-          <a:lstStyle/>
-          <a:p>
-            <a:pPr>
-              <a:defRPr sz="1200">
-                <a:solidFill>
-                  <a:srgbClr val="5C5C5C"/>
-                </a:solidFill>
-                <a:latin typeface="Aptos"/>
-              </a:defRPr>
-            </a:pPr>
-            <a:r>
-              <a:t>Talking points, learner value, and lab connection</a:t>
-            </a:r>
-          </a:p>
-        </p:txBody>
-      </p:sp>
-      <p:sp>
-        <p:nvSpPr>
           <p:cNvPr id="5" name="Rounded Rectangle 4"/>
           <p:cNvSpPr/>
           <p:nvPr/>
@@ -7524,7 +7296,139 @@
               </a:defRPr>
             </a:pPr>
             <a:r>
-              <a:t>Talking points</a:t>
+              <a:t>Key ideas</a:t>
+            </a:r>
+            <a:br/>
+            <a:r>
+              <a:t>• DAX Studio</a:t>
+            </a:r>
+            <a:br/>
+            <a:r>
+              <a:t>• VertiPaq Analyzer</a:t>
+            </a:r>
+          </a:p>
+        </p:txBody>
+      </p:sp>
+      <p:sp>
+        <p:nvSpPr>
+          <p:cNvPr id="8" name="Rounded Rectangle 7"/>
+          <p:cNvSpPr/>
+          <p:nvPr/>
+        </p:nvSpPr>
+        <p:spPr>
+          <a:xfrm>
+            <a:off x="6263640" y="1234440"/>
+            <a:ext cx="5303520" cy="1828800"/>
+          </a:xfrm>
+          <a:prstGeom prst="roundRect">
+            <a:avLst/>
+          </a:prstGeom>
+          <a:solidFill>
+            <a:srgbClr val="FFFFFF"/>
+          </a:solidFill>
+          <a:ln>
+            <a:solidFill>
+              <a:srgbClr val="DCDCDC"/>
+            </a:solidFill>
+          </a:ln>
+        </p:spPr>
+        <p:style>
+          <a:lnRef idx="1">
+            <a:schemeClr val="accent1"/>
+          </a:lnRef>
+          <a:fillRef idx="3">
+            <a:schemeClr val="accent1"/>
+          </a:fillRef>
+          <a:effectRef idx="2">
+            <a:schemeClr val="accent1"/>
+          </a:effectRef>
+          <a:fontRef idx="minor">
+            <a:schemeClr val="lt1"/>
+          </a:fontRef>
+        </p:style>
+        <p:txBody>
+          <a:bodyPr rtlCol="0" anchor="ctr"/>
+          <a:lstStyle/>
+          <a:p>
+            <a:pPr algn="ctr"/>
+          </a:p>
+        </p:txBody>
+      </p:sp>
+      <p:sp>
+        <p:nvSpPr>
+          <p:cNvPr id="9" name="Rectangle 8"/>
+          <p:cNvSpPr/>
+          <p:nvPr/>
+        </p:nvSpPr>
+        <p:spPr>
+          <a:xfrm>
+            <a:off x="6263640" y="1234440"/>
+            <a:ext cx="91440" cy="1828800"/>
+          </a:xfrm>
+          <a:prstGeom prst="rect">
+            <a:avLst/>
+          </a:prstGeom>
+          <a:solidFill>
+            <a:srgbClr val="02C39A"/>
+          </a:solidFill>
+          <a:ln>
+            <a:noFill/>
+          </a:ln>
+        </p:spPr>
+        <p:style>
+          <a:lnRef idx="1">
+            <a:schemeClr val="accent1"/>
+          </a:lnRef>
+          <a:fillRef idx="3">
+            <a:schemeClr val="accent1"/>
+          </a:fillRef>
+          <a:effectRef idx="2">
+            <a:schemeClr val="accent1"/>
+          </a:effectRef>
+          <a:fontRef idx="minor">
+            <a:schemeClr val="lt1"/>
+          </a:fontRef>
+        </p:style>
+        <p:txBody>
+          <a:bodyPr rtlCol="0" anchor="ctr"/>
+          <a:lstStyle/>
+          <a:p>
+            <a:pPr algn="ctr"/>
+          </a:p>
+        </p:txBody>
+      </p:sp>
+      <p:sp>
+        <p:nvSpPr>
+          <p:cNvPr id="10" name="TextBox 9"/>
+          <p:cNvSpPr txBox="1"/>
+          <p:nvPr/>
+        </p:nvSpPr>
+        <p:spPr>
+          <a:xfrm>
+            <a:off x="6446520" y="1344168"/>
+            <a:ext cx="4983480" cy="1664208"/>
+          </a:xfrm>
+          <a:prstGeom prst="rect">
+            <a:avLst/>
+          </a:prstGeom>
+          <a:noFill/>
+        </p:spPr>
+        <p:txBody>
+          <a:bodyPr wrap="square" lIns="0" rIns="0">
+            <a:spAutoFit/>
+          </a:bodyPr>
+          <a:lstStyle/>
+          <a:p>
+            <a:pPr>
+              <a:defRPr b="1" sz="1500">
+                <a:solidFill>
+                  <a:srgbClr val="1E2761"/>
+                </a:solidFill>
+                <a:latin typeface="Aptos Display"/>
+              </a:defRPr>
+            </a:pPr>
+            <a:r>
+              <a:t>Why it helps</a:t>
             </a:r>
           </a:p>
           <a:p>
@@ -7540,25 +7444,25 @@
               </a:defRPr>
             </a:pPr>
             <a:r>
-              <a:t>• DAX Studio</a:t>
+              <a:t>• Tabular Editor</a:t>
             </a:r>
             <a:br/>
             <a:r>
-              <a:t>• VertiPaq Analyzer</a:t>
-            </a:r>
-          </a:p>
-        </p:txBody>
-      </p:sp>
-      <p:sp>
-        <p:nvSpPr>
-          <p:cNvPr id="8" name="Rounded Rectangle 7"/>
+              <a:t>• Customer workstation and tenant policy</a:t>
+            </a:r>
+          </a:p>
+        </p:txBody>
+      </p:sp>
+      <p:sp>
+        <p:nvSpPr>
+          <p:cNvPr id="11" name="Rounded Rectangle 10"/>
           <p:cNvSpPr/>
           <p:nvPr/>
         </p:nvSpPr>
         <p:spPr>
           <a:xfrm>
-            <a:off x="6263640" y="1234440"/>
-            <a:ext cx="5303520" cy="1828800"/>
+            <a:off x="822960" y="4160520"/>
+            <a:ext cx="10424160" cy="868680"/>
           </a:xfrm>
           <a:prstGeom prst="roundRect">
             <a:avLst/>
@@ -7596,20 +7500,20 @@
       </p:sp>
       <p:sp>
         <p:nvSpPr>
-          <p:cNvPr id="9" name="Rectangle 8"/>
+          <p:cNvPr id="12" name="Rectangle 11"/>
           <p:cNvSpPr/>
           <p:nvPr/>
         </p:nvSpPr>
         <p:spPr>
           <a:xfrm>
-            <a:off x="6263640" y="1234440"/>
-            <a:ext cx="91440" cy="1828800"/>
+            <a:off x="822960" y="4160520"/>
+            <a:ext cx="91440" cy="868680"/>
           </a:xfrm>
           <a:prstGeom prst="rect">
             <a:avLst/>
           </a:prstGeom>
           <a:solidFill>
-            <a:srgbClr val="02C39A"/>
+            <a:srgbClr val="F9B700"/>
           </a:solidFill>
           <a:ln>
             <a:noFill/>
@@ -7639,14 +7543,14 @@
       </p:sp>
       <p:sp>
         <p:nvSpPr>
-          <p:cNvPr id="10" name="TextBox 9"/>
+          <p:cNvPr id="13" name="TextBox 12"/>
           <p:cNvSpPr txBox="1"/>
           <p:nvPr/>
         </p:nvSpPr>
         <p:spPr>
           <a:xfrm>
-            <a:off x="6446520" y="1344168"/>
-            <a:ext cx="4983480" cy="1664208"/>
+            <a:off x="1005840" y="4270248"/>
+            <a:ext cx="10104120" cy="704088"/>
           </a:xfrm>
           <a:prstGeom prst="rect">
             <a:avLst/>
@@ -7668,167 +7572,7 @@
               </a:defRPr>
             </a:pPr>
             <a:r>
-              <a:t>Why it helps</a:t>
-            </a:r>
-          </a:p>
-          <a:p>
-            <a:pPr>
-              <a:spcBef>
-                <a:spcPts val="400"/>
-              </a:spcBef>
-              <a:defRPr sz="1050">
-                <a:solidFill>
-                  <a:srgbClr val="242424"/>
-                </a:solidFill>
-                <a:latin typeface="Aptos"/>
-              </a:defRPr>
-            </a:pPr>
-            <a:r>
-              <a:t>• Tabular Editor</a:t>
-            </a:r>
-            <a:br/>
-            <a:r>
-              <a:t>• Customer workstation and tenant policy</a:t>
-            </a:r>
-          </a:p>
-        </p:txBody>
-      </p:sp>
-      <p:sp>
-        <p:nvSpPr>
-          <p:cNvPr id="11" name="Rounded Rectangle 10"/>
-          <p:cNvSpPr/>
-          <p:nvPr/>
-        </p:nvSpPr>
-        <p:spPr>
-          <a:xfrm>
-            <a:off x="822960" y="4160520"/>
-            <a:ext cx="10424160" cy="868680"/>
-          </a:xfrm>
-          <a:prstGeom prst="roundRect">
-            <a:avLst/>
-          </a:prstGeom>
-          <a:solidFill>
-            <a:srgbClr val="FFFFFF"/>
-          </a:solidFill>
-          <a:ln>
-            <a:solidFill>
-              <a:srgbClr val="DCDCDC"/>
-            </a:solidFill>
-          </a:ln>
-        </p:spPr>
-        <p:style>
-          <a:lnRef idx="1">
-            <a:schemeClr val="accent1"/>
-          </a:lnRef>
-          <a:fillRef idx="3">
-            <a:schemeClr val="accent1"/>
-          </a:fillRef>
-          <a:effectRef idx="2">
-            <a:schemeClr val="accent1"/>
-          </a:effectRef>
-          <a:fontRef idx="minor">
-            <a:schemeClr val="lt1"/>
-          </a:fontRef>
-        </p:style>
-        <p:txBody>
-          <a:bodyPr rtlCol="0" anchor="ctr"/>
-          <a:lstStyle/>
-          <a:p>
-            <a:pPr algn="ctr"/>
-          </a:p>
-        </p:txBody>
-      </p:sp>
-      <p:sp>
-        <p:nvSpPr>
-          <p:cNvPr id="12" name="Rectangle 11"/>
-          <p:cNvSpPr/>
-          <p:nvPr/>
-        </p:nvSpPr>
-        <p:spPr>
-          <a:xfrm>
-            <a:off x="822960" y="4160520"/>
-            <a:ext cx="91440" cy="868680"/>
-          </a:xfrm>
-          <a:prstGeom prst="rect">
-            <a:avLst/>
-          </a:prstGeom>
-          <a:solidFill>
-            <a:srgbClr val="F9B700"/>
-          </a:solidFill>
-          <a:ln>
-            <a:noFill/>
-          </a:ln>
-        </p:spPr>
-        <p:style>
-          <a:lnRef idx="1">
-            <a:schemeClr val="accent1"/>
-          </a:lnRef>
-          <a:fillRef idx="3">
-            <a:schemeClr val="accent1"/>
-          </a:fillRef>
-          <a:effectRef idx="2">
-            <a:schemeClr val="accent1"/>
-          </a:effectRef>
-          <a:fontRef idx="minor">
-            <a:schemeClr val="lt1"/>
-          </a:fontRef>
-        </p:style>
-        <p:txBody>
-          <a:bodyPr rtlCol="0" anchor="ctr"/>
-          <a:lstStyle/>
-          <a:p>
-            <a:pPr algn="ctr"/>
-          </a:p>
-        </p:txBody>
-      </p:sp>
-      <p:sp>
-        <p:nvSpPr>
-          <p:cNvPr id="13" name="TextBox 12"/>
-          <p:cNvSpPr txBox="1"/>
-          <p:nvPr/>
-        </p:nvSpPr>
-        <p:spPr>
-          <a:xfrm>
-            <a:off x="1005840" y="4270248"/>
-            <a:ext cx="10104120" cy="704088"/>
-          </a:xfrm>
-          <a:prstGeom prst="rect">
-            <a:avLst/>
-          </a:prstGeom>
-          <a:noFill/>
-        </p:spPr>
-        <p:txBody>
-          <a:bodyPr wrap="square" lIns="0" rIns="0">
-            <a:spAutoFit/>
-          </a:bodyPr>
-          <a:lstStyle/>
-          <a:p>
-            <a:pPr>
-              <a:defRPr b="1" sz="1500">
-                <a:solidFill>
-                  <a:srgbClr val="1E2761"/>
-                </a:solidFill>
-                <a:latin typeface="Aptos Display"/>
-              </a:defRPr>
-            </a:pPr>
-            <a:r>
-              <a:t>Lab connection</a:t>
-            </a:r>
-          </a:p>
-          <a:p>
-            <a:pPr>
-              <a:spcBef>
-                <a:spcPts val="400"/>
-              </a:spcBef>
-              <a:defRPr sz="1050">
-                <a:solidFill>
-                  <a:srgbClr val="242424"/>
-                </a:solidFill>
-                <a:latin typeface="Aptos"/>
-              </a:defRPr>
-            </a:pPr>
-            <a:r>
-              <a:t>Coverage: Covered. Use the lab README to demonstrate or discuss this topic. Review terms: customer, editor, tabular, tools.</a:t>
+              <a:t>In the lab, you will apply this pattern, validate the expected behavior, and discuss where it fits in a real Power BI solution.</a:t>
             </a:r>
           </a:p>
         </p:txBody>
@@ -7967,42 +7711,6 @@
       </p:sp>
       <p:sp>
         <p:nvSpPr>
-          <p:cNvPr id="4" name="TextBox 3"/>
-          <p:cNvSpPr txBox="1"/>
-          <p:nvPr/>
-        </p:nvSpPr>
-        <p:spPr>
-          <a:xfrm>
-            <a:off x="530352" y="914400"/>
-            <a:ext cx="10515600" cy="320040"/>
-          </a:xfrm>
-          <a:prstGeom prst="rect">
-            <a:avLst/>
-          </a:prstGeom>
-          <a:noFill/>
-        </p:spPr>
-        <p:txBody>
-          <a:bodyPr wrap="none">
-            <a:spAutoFit/>
-          </a:bodyPr>
-          <a:lstStyle/>
-          <a:p>
-            <a:pPr>
-              <a:defRPr sz="1200">
-                <a:solidFill>
-                  <a:srgbClr val="5C5C5C"/>
-                </a:solidFill>
-                <a:latin typeface="Aptos"/>
-              </a:defRPr>
-            </a:pPr>
-            <a:r>
-              <a:t>Talking points, learner value, and lab connection</a:t>
-            </a:r>
-          </a:p>
-        </p:txBody>
-      </p:sp>
-      <p:sp>
-        <p:nvSpPr>
           <p:cNvPr id="5" name="Rounded Rectangle 4"/>
           <p:cNvSpPr/>
           <p:nvPr/>
@@ -8120,7 +7828,139 @@
               </a:defRPr>
             </a:pPr>
             <a:r>
-              <a:t>Talking points</a:t>
+              <a:t>Key ideas</a:t>
+            </a:r>
+            <a:br/>
+            <a:r>
+              <a:t>• Before/after observations</a:t>
+            </a:r>
+            <a:br/>
+            <a:r>
+              <a:t>• Production readiness</a:t>
+            </a:r>
+          </a:p>
+        </p:txBody>
+      </p:sp>
+      <p:sp>
+        <p:nvSpPr>
+          <p:cNvPr id="8" name="Rounded Rectangle 7"/>
+          <p:cNvSpPr/>
+          <p:nvPr/>
+        </p:nvSpPr>
+        <p:spPr>
+          <a:xfrm>
+            <a:off x="6263640" y="1234440"/>
+            <a:ext cx="5303520" cy="1828800"/>
+          </a:xfrm>
+          <a:prstGeom prst="roundRect">
+            <a:avLst/>
+          </a:prstGeom>
+          <a:solidFill>
+            <a:srgbClr val="FFFFFF"/>
+          </a:solidFill>
+          <a:ln>
+            <a:solidFill>
+              <a:srgbClr val="DCDCDC"/>
+            </a:solidFill>
+          </a:ln>
+        </p:spPr>
+        <p:style>
+          <a:lnRef idx="1">
+            <a:schemeClr val="accent1"/>
+          </a:lnRef>
+          <a:fillRef idx="3">
+            <a:schemeClr val="accent1"/>
+          </a:fillRef>
+          <a:effectRef idx="2">
+            <a:schemeClr val="accent1"/>
+          </a:effectRef>
+          <a:fontRef idx="minor">
+            <a:schemeClr val="lt1"/>
+          </a:fontRef>
+        </p:style>
+        <p:txBody>
+          <a:bodyPr rtlCol="0" anchor="ctr"/>
+          <a:lstStyle/>
+          <a:p>
+            <a:pPr algn="ctr"/>
+          </a:p>
+        </p:txBody>
+      </p:sp>
+      <p:sp>
+        <p:nvSpPr>
+          <p:cNvPr id="9" name="Rectangle 8"/>
+          <p:cNvSpPr/>
+          <p:nvPr/>
+        </p:nvSpPr>
+        <p:spPr>
+          <a:xfrm>
+            <a:off x="6263640" y="1234440"/>
+            <a:ext cx="91440" cy="1828800"/>
+          </a:xfrm>
+          <a:prstGeom prst="rect">
+            <a:avLst/>
+          </a:prstGeom>
+          <a:solidFill>
+            <a:srgbClr val="02C39A"/>
+          </a:solidFill>
+          <a:ln>
+            <a:noFill/>
+          </a:ln>
+        </p:spPr>
+        <p:style>
+          <a:lnRef idx="1">
+            <a:schemeClr val="accent1"/>
+          </a:lnRef>
+          <a:fillRef idx="3">
+            <a:schemeClr val="accent1"/>
+          </a:fillRef>
+          <a:effectRef idx="2">
+            <a:schemeClr val="accent1"/>
+          </a:effectRef>
+          <a:fontRef idx="minor">
+            <a:schemeClr val="lt1"/>
+          </a:fontRef>
+        </p:style>
+        <p:txBody>
+          <a:bodyPr rtlCol="0" anchor="ctr"/>
+          <a:lstStyle/>
+          <a:p>
+            <a:pPr algn="ctr"/>
+          </a:p>
+        </p:txBody>
+      </p:sp>
+      <p:sp>
+        <p:nvSpPr>
+          <p:cNvPr id="10" name="TextBox 9"/>
+          <p:cNvSpPr txBox="1"/>
+          <p:nvPr/>
+        </p:nvSpPr>
+        <p:spPr>
+          <a:xfrm>
+            <a:off x="6446520" y="1344168"/>
+            <a:ext cx="4983480" cy="1664208"/>
+          </a:xfrm>
+          <a:prstGeom prst="rect">
+            <a:avLst/>
+          </a:prstGeom>
+          <a:noFill/>
+        </p:spPr>
+        <p:txBody>
+          <a:bodyPr wrap="square" lIns="0" rIns="0">
+            <a:spAutoFit/>
+          </a:bodyPr>
+          <a:lstStyle/>
+          <a:p>
+            <a:pPr>
+              <a:defRPr b="1" sz="1500">
+                <a:solidFill>
+                  <a:srgbClr val="1E2761"/>
+                </a:solidFill>
+                <a:latin typeface="Aptos Display"/>
+              </a:defRPr>
+            </a:pPr>
+            <a:r>
+              <a:t>Why it helps</a:t>
             </a:r>
           </a:p>
           <a:p>
@@ -8136,25 +7976,21 @@
               </a:defRPr>
             </a:pPr>
             <a:r>
-              <a:t>• Before/after observations</a:t>
-            </a:r>
-            <a:br/>
-            <a:r>
-              <a:t>• Production readiness</a:t>
-            </a:r>
-          </a:p>
-        </p:txBody>
-      </p:sp>
-      <p:sp>
-        <p:nvSpPr>
-          <p:cNvPr id="8" name="Rounded Rectangle 7"/>
+              <a:t>• Documentation expectations</a:t>
+            </a:r>
+          </a:p>
+        </p:txBody>
+      </p:sp>
+      <p:sp>
+        <p:nvSpPr>
+          <p:cNvPr id="11" name="Rounded Rectangle 10"/>
           <p:cNvSpPr/>
           <p:nvPr/>
         </p:nvSpPr>
         <p:spPr>
           <a:xfrm>
-            <a:off x="6263640" y="1234440"/>
-            <a:ext cx="5303520" cy="1828800"/>
+            <a:off x="822960" y="4160520"/>
+            <a:ext cx="10424160" cy="868680"/>
           </a:xfrm>
           <a:prstGeom prst="roundRect">
             <a:avLst/>
@@ -8192,20 +8028,20 @@
       </p:sp>
       <p:sp>
         <p:nvSpPr>
-          <p:cNvPr id="9" name="Rectangle 8"/>
+          <p:cNvPr id="12" name="Rectangle 11"/>
           <p:cNvSpPr/>
           <p:nvPr/>
         </p:nvSpPr>
         <p:spPr>
           <a:xfrm>
-            <a:off x="6263640" y="1234440"/>
-            <a:ext cx="91440" cy="1828800"/>
+            <a:off x="822960" y="4160520"/>
+            <a:ext cx="91440" cy="868680"/>
           </a:xfrm>
           <a:prstGeom prst="rect">
             <a:avLst/>
           </a:prstGeom>
           <a:solidFill>
-            <a:srgbClr val="02C39A"/>
+            <a:srgbClr val="F9B700"/>
           </a:solidFill>
           <a:ln>
             <a:noFill/>
@@ -8235,14 +8071,14 @@
       </p:sp>
       <p:sp>
         <p:nvSpPr>
-          <p:cNvPr id="10" name="TextBox 9"/>
+          <p:cNvPr id="13" name="TextBox 12"/>
           <p:cNvSpPr txBox="1"/>
           <p:nvPr/>
         </p:nvSpPr>
         <p:spPr>
           <a:xfrm>
-            <a:off x="6446520" y="1344168"/>
-            <a:ext cx="4983480" cy="1664208"/>
+            <a:off x="1005840" y="4270248"/>
+            <a:ext cx="10104120" cy="704088"/>
           </a:xfrm>
           <a:prstGeom prst="rect">
             <a:avLst/>
@@ -8264,163 +8100,7 @@
               </a:defRPr>
             </a:pPr>
             <a:r>
-              <a:t>Why it helps</a:t>
-            </a:r>
-          </a:p>
-          <a:p>
-            <a:pPr>
-              <a:spcBef>
-                <a:spcPts val="400"/>
-              </a:spcBef>
-              <a:defRPr sz="1050">
-                <a:solidFill>
-                  <a:srgbClr val="242424"/>
-                </a:solidFill>
-                <a:latin typeface="Aptos"/>
-              </a:defRPr>
-            </a:pPr>
-            <a:r>
-              <a:t>• Documentation expectations</a:t>
-            </a:r>
-          </a:p>
-        </p:txBody>
-      </p:sp>
-      <p:sp>
-        <p:nvSpPr>
-          <p:cNvPr id="11" name="Rounded Rectangle 10"/>
-          <p:cNvSpPr/>
-          <p:nvPr/>
-        </p:nvSpPr>
-        <p:spPr>
-          <a:xfrm>
-            <a:off x="822960" y="4160520"/>
-            <a:ext cx="10424160" cy="868680"/>
-          </a:xfrm>
-          <a:prstGeom prst="roundRect">
-            <a:avLst/>
-          </a:prstGeom>
-          <a:solidFill>
-            <a:srgbClr val="FFFFFF"/>
-          </a:solidFill>
-          <a:ln>
-            <a:solidFill>
-              <a:srgbClr val="DCDCDC"/>
-            </a:solidFill>
-          </a:ln>
-        </p:spPr>
-        <p:style>
-          <a:lnRef idx="1">
-            <a:schemeClr val="accent1"/>
-          </a:lnRef>
-          <a:fillRef idx="3">
-            <a:schemeClr val="accent1"/>
-          </a:fillRef>
-          <a:effectRef idx="2">
-            <a:schemeClr val="accent1"/>
-          </a:effectRef>
-          <a:fontRef idx="minor">
-            <a:schemeClr val="lt1"/>
-          </a:fontRef>
-        </p:style>
-        <p:txBody>
-          <a:bodyPr rtlCol="0" anchor="ctr"/>
-          <a:lstStyle/>
-          <a:p>
-            <a:pPr algn="ctr"/>
-          </a:p>
-        </p:txBody>
-      </p:sp>
-      <p:sp>
-        <p:nvSpPr>
-          <p:cNvPr id="12" name="Rectangle 11"/>
-          <p:cNvSpPr/>
-          <p:nvPr/>
-        </p:nvSpPr>
-        <p:spPr>
-          <a:xfrm>
-            <a:off x="822960" y="4160520"/>
-            <a:ext cx="91440" cy="868680"/>
-          </a:xfrm>
-          <a:prstGeom prst="rect">
-            <a:avLst/>
-          </a:prstGeom>
-          <a:solidFill>
-            <a:srgbClr val="F9B700"/>
-          </a:solidFill>
-          <a:ln>
-            <a:noFill/>
-          </a:ln>
-        </p:spPr>
-        <p:style>
-          <a:lnRef idx="1">
-            <a:schemeClr val="accent1"/>
-          </a:lnRef>
-          <a:fillRef idx="3">
-            <a:schemeClr val="accent1"/>
-          </a:fillRef>
-          <a:effectRef idx="2">
-            <a:schemeClr val="accent1"/>
-          </a:effectRef>
-          <a:fontRef idx="minor">
-            <a:schemeClr val="lt1"/>
-          </a:fontRef>
-        </p:style>
-        <p:txBody>
-          <a:bodyPr rtlCol="0" anchor="ctr"/>
-          <a:lstStyle/>
-          <a:p>
-            <a:pPr algn="ctr"/>
-          </a:p>
-        </p:txBody>
-      </p:sp>
-      <p:sp>
-        <p:nvSpPr>
-          <p:cNvPr id="13" name="TextBox 12"/>
-          <p:cNvSpPr txBox="1"/>
-          <p:nvPr/>
-        </p:nvSpPr>
-        <p:spPr>
-          <a:xfrm>
-            <a:off x="1005840" y="4270248"/>
-            <a:ext cx="10104120" cy="704088"/>
-          </a:xfrm>
-          <a:prstGeom prst="rect">
-            <a:avLst/>
-          </a:prstGeom>
-          <a:noFill/>
-        </p:spPr>
-        <p:txBody>
-          <a:bodyPr wrap="square" lIns="0" rIns="0">
-            <a:spAutoFit/>
-          </a:bodyPr>
-          <a:lstStyle/>
-          <a:p>
-            <a:pPr>
-              <a:defRPr b="1" sz="1500">
-                <a:solidFill>
-                  <a:srgbClr val="1E2761"/>
-                </a:solidFill>
-                <a:latin typeface="Aptos Display"/>
-              </a:defRPr>
-            </a:pPr>
-            <a:r>
-              <a:t>Lab connection</a:t>
-            </a:r>
-          </a:p>
-          <a:p>
-            <a:pPr>
-              <a:spcBef>
-                <a:spcPts val="400"/>
-              </a:spcBef>
-              <a:defRPr sz="1050">
-                <a:solidFill>
-                  <a:srgbClr val="242424"/>
-                </a:solidFill>
-                <a:latin typeface="Aptos"/>
-              </a:defRPr>
-            </a:pPr>
-            <a:r>
-              <a:t>Coverage: Partial. Use the lab README to demonstrate or discuss this topic. Review terms: benchmark, documentation, expectations, production, targets.</a:t>
+              <a:t>In the lab, you will apply this pattern, validate the expected behavior, and discuss where it fits in a real Power BI solution.</a:t>
             </a:r>
           </a:p>
         </p:txBody>
@@ -9427,42 +9107,6 @@
       </p:sp>
       <p:sp>
         <p:nvSpPr>
-          <p:cNvPr id="4" name="TextBox 3"/>
-          <p:cNvSpPr txBox="1"/>
-          <p:nvPr/>
-        </p:nvSpPr>
-        <p:spPr>
-          <a:xfrm>
-            <a:off x="530352" y="914400"/>
-            <a:ext cx="10515600" cy="320040"/>
-          </a:xfrm>
-          <a:prstGeom prst="rect">
-            <a:avLst/>
-          </a:prstGeom>
-          <a:noFill/>
-        </p:spPr>
-        <p:txBody>
-          <a:bodyPr wrap="none">
-            <a:spAutoFit/>
-          </a:bodyPr>
-          <a:lstStyle/>
-          <a:p>
-            <a:pPr>
-              <a:defRPr sz="1200">
-                <a:solidFill>
-                  <a:srgbClr val="5C5C5C"/>
-                </a:solidFill>
-                <a:latin typeface="Aptos"/>
-              </a:defRPr>
-            </a:pPr>
-            <a:r>
-              <a:t>Use this to introduce the section before hands-on labs.</a:t>
-            </a:r>
-          </a:p>
-        </p:txBody>
-      </p:sp>
-      <p:sp>
-        <p:nvSpPr>
           <p:cNvPr id="5" name="Rounded Rectangle 4"/>
           <p:cNvSpPr/>
           <p:nvPr/>
@@ -10715,42 +10359,6 @@
       </p:sp>
       <p:sp>
         <p:nvSpPr>
-          <p:cNvPr id="4" name="TextBox 3"/>
-          <p:cNvSpPr txBox="1"/>
-          <p:nvPr/>
-        </p:nvSpPr>
-        <p:spPr>
-          <a:xfrm>
-            <a:off x="530352" y="914400"/>
-            <a:ext cx="10515600" cy="320040"/>
-          </a:xfrm>
-          <a:prstGeom prst="rect">
-            <a:avLst/>
-          </a:prstGeom>
-          <a:noFill/>
-        </p:spPr>
-        <p:txBody>
-          <a:bodyPr wrap="none">
-            <a:spAutoFit/>
-          </a:bodyPr>
-          <a:lstStyle/>
-          <a:p>
-            <a:pPr>
-              <a:defRPr sz="1200">
-                <a:solidFill>
-                  <a:srgbClr val="5C5C5C"/>
-                </a:solidFill>
-                <a:latin typeface="Aptos"/>
-              </a:defRPr>
-            </a:pPr>
-            <a:r>
-              <a:t>Talking points, learner value, and lab connection</a:t>
-            </a:r>
-          </a:p>
-        </p:txBody>
-      </p:sp>
-      <p:sp>
-        <p:nvSpPr>
           <p:cNvPr id="5" name="Rounded Rectangle 4"/>
           <p:cNvSpPr/>
           <p:nvPr/>
@@ -10868,7 +10476,139 @@
               </a:defRPr>
             </a:pPr>
             <a:r>
-              <a:t>Talking points</a:t>
+              <a:t>Key ideas</a:t>
+            </a:r>
+            <a:br/>
+            <a:r>
+              <a:t>• Measure first.</a:t>
+            </a:r>
+            <a:br/>
+            <a:r>
+              <a:t>• Identify the bottleneck.</a:t>
+            </a:r>
+          </a:p>
+        </p:txBody>
+      </p:sp>
+      <p:sp>
+        <p:nvSpPr>
+          <p:cNvPr id="8" name="Rounded Rectangle 7"/>
+          <p:cNvSpPr/>
+          <p:nvPr/>
+        </p:nvSpPr>
+        <p:spPr>
+          <a:xfrm>
+            <a:off x="6263640" y="1234440"/>
+            <a:ext cx="5303520" cy="1828800"/>
+          </a:xfrm>
+          <a:prstGeom prst="roundRect">
+            <a:avLst/>
+          </a:prstGeom>
+          <a:solidFill>
+            <a:srgbClr val="FFFFFF"/>
+          </a:solidFill>
+          <a:ln>
+            <a:solidFill>
+              <a:srgbClr val="DCDCDC"/>
+            </a:solidFill>
+          </a:ln>
+        </p:spPr>
+        <p:style>
+          <a:lnRef idx="1">
+            <a:schemeClr val="accent1"/>
+          </a:lnRef>
+          <a:fillRef idx="3">
+            <a:schemeClr val="accent1"/>
+          </a:fillRef>
+          <a:effectRef idx="2">
+            <a:schemeClr val="accent1"/>
+          </a:effectRef>
+          <a:fontRef idx="minor">
+            <a:schemeClr val="lt1"/>
+          </a:fontRef>
+        </p:style>
+        <p:txBody>
+          <a:bodyPr rtlCol="0" anchor="ctr"/>
+          <a:lstStyle/>
+          <a:p>
+            <a:pPr algn="ctr"/>
+          </a:p>
+        </p:txBody>
+      </p:sp>
+      <p:sp>
+        <p:nvSpPr>
+          <p:cNvPr id="9" name="Rectangle 8"/>
+          <p:cNvSpPr/>
+          <p:nvPr/>
+        </p:nvSpPr>
+        <p:spPr>
+          <a:xfrm>
+            <a:off x="6263640" y="1234440"/>
+            <a:ext cx="91440" cy="1828800"/>
+          </a:xfrm>
+          <a:prstGeom prst="rect">
+            <a:avLst/>
+          </a:prstGeom>
+          <a:solidFill>
+            <a:srgbClr val="02C39A"/>
+          </a:solidFill>
+          <a:ln>
+            <a:noFill/>
+          </a:ln>
+        </p:spPr>
+        <p:style>
+          <a:lnRef idx="1">
+            <a:schemeClr val="accent1"/>
+          </a:lnRef>
+          <a:fillRef idx="3">
+            <a:schemeClr val="accent1"/>
+          </a:fillRef>
+          <a:effectRef idx="2">
+            <a:schemeClr val="accent1"/>
+          </a:effectRef>
+          <a:fontRef idx="minor">
+            <a:schemeClr val="lt1"/>
+          </a:fontRef>
+        </p:style>
+        <p:txBody>
+          <a:bodyPr rtlCol="0" anchor="ctr"/>
+          <a:lstStyle/>
+          <a:p>
+            <a:pPr algn="ctr"/>
+          </a:p>
+        </p:txBody>
+      </p:sp>
+      <p:sp>
+        <p:nvSpPr>
+          <p:cNvPr id="10" name="TextBox 9"/>
+          <p:cNvSpPr txBox="1"/>
+          <p:nvPr/>
+        </p:nvSpPr>
+        <p:spPr>
+          <a:xfrm>
+            <a:off x="6446520" y="1344168"/>
+            <a:ext cx="4983480" cy="1664208"/>
+          </a:xfrm>
+          <a:prstGeom prst="rect">
+            <a:avLst/>
+          </a:prstGeom>
+          <a:noFill/>
+        </p:spPr>
+        <p:txBody>
+          <a:bodyPr wrap="square" lIns="0" rIns="0">
+            <a:spAutoFit/>
+          </a:bodyPr>
+          <a:lstStyle/>
+          <a:p>
+            <a:pPr>
+              <a:defRPr b="1" sz="1500">
+                <a:solidFill>
+                  <a:srgbClr val="1E2761"/>
+                </a:solidFill>
+                <a:latin typeface="Aptos Display"/>
+              </a:defRPr>
+            </a:pPr>
+            <a:r>
+              <a:t>Why it helps</a:t>
             </a:r>
           </a:p>
           <a:p>
@@ -10884,25 +10624,25 @@
               </a:defRPr>
             </a:pPr>
             <a:r>
-              <a:t>• Measure first.</a:t>
+              <a:t>• Change one thing.</a:t>
             </a:r>
             <a:br/>
             <a:r>
-              <a:t>• Identify the bottleneck.</a:t>
-            </a:r>
-          </a:p>
-        </p:txBody>
-      </p:sp>
-      <p:sp>
-        <p:nvSpPr>
-          <p:cNvPr id="8" name="Rounded Rectangle 7"/>
+              <a:t>• Measure again.</a:t>
+            </a:r>
+          </a:p>
+        </p:txBody>
+      </p:sp>
+      <p:sp>
+        <p:nvSpPr>
+          <p:cNvPr id="11" name="Rounded Rectangle 10"/>
           <p:cNvSpPr/>
           <p:nvPr/>
         </p:nvSpPr>
         <p:spPr>
           <a:xfrm>
-            <a:off x="6263640" y="1234440"/>
-            <a:ext cx="5303520" cy="1828800"/>
+            <a:off x="822960" y="4160520"/>
+            <a:ext cx="10424160" cy="868680"/>
           </a:xfrm>
           <a:prstGeom prst="roundRect">
             <a:avLst/>
@@ -10940,20 +10680,20 @@
       </p:sp>
       <p:sp>
         <p:nvSpPr>
-          <p:cNvPr id="9" name="Rectangle 8"/>
+          <p:cNvPr id="12" name="Rectangle 11"/>
           <p:cNvSpPr/>
           <p:nvPr/>
         </p:nvSpPr>
         <p:spPr>
           <a:xfrm>
-            <a:off x="6263640" y="1234440"/>
-            <a:ext cx="91440" cy="1828800"/>
+            <a:off x="822960" y="4160520"/>
+            <a:ext cx="91440" cy="868680"/>
           </a:xfrm>
           <a:prstGeom prst="rect">
             <a:avLst/>
           </a:prstGeom>
           <a:solidFill>
-            <a:srgbClr val="02C39A"/>
+            <a:srgbClr val="F9B700"/>
           </a:solidFill>
           <a:ln>
             <a:noFill/>
@@ -10983,14 +10723,14 @@
       </p:sp>
       <p:sp>
         <p:nvSpPr>
-          <p:cNvPr id="10" name="TextBox 9"/>
+          <p:cNvPr id="13" name="TextBox 12"/>
           <p:cNvSpPr txBox="1"/>
           <p:nvPr/>
         </p:nvSpPr>
         <p:spPr>
           <a:xfrm>
-            <a:off x="6446520" y="1344168"/>
-            <a:ext cx="4983480" cy="1664208"/>
+            <a:off x="1005840" y="4270248"/>
+            <a:ext cx="10104120" cy="704088"/>
           </a:xfrm>
           <a:prstGeom prst="rect">
             <a:avLst/>
@@ -11012,167 +10752,7 @@
               </a:defRPr>
             </a:pPr>
             <a:r>
-              <a:t>Why it helps</a:t>
-            </a:r>
-          </a:p>
-          <a:p>
-            <a:pPr>
-              <a:spcBef>
-                <a:spcPts val="400"/>
-              </a:spcBef>
-              <a:defRPr sz="1050">
-                <a:solidFill>
-                  <a:srgbClr val="242424"/>
-                </a:solidFill>
-                <a:latin typeface="Aptos"/>
-              </a:defRPr>
-            </a:pPr>
-            <a:r>
-              <a:t>• Change one thing.</a:t>
-            </a:r>
-            <a:br/>
-            <a:r>
-              <a:t>• Measure again.</a:t>
-            </a:r>
-          </a:p>
-        </p:txBody>
-      </p:sp>
-      <p:sp>
-        <p:nvSpPr>
-          <p:cNvPr id="11" name="Rounded Rectangle 10"/>
-          <p:cNvSpPr/>
-          <p:nvPr/>
-        </p:nvSpPr>
-        <p:spPr>
-          <a:xfrm>
-            <a:off x="822960" y="4160520"/>
-            <a:ext cx="10424160" cy="868680"/>
-          </a:xfrm>
-          <a:prstGeom prst="roundRect">
-            <a:avLst/>
-          </a:prstGeom>
-          <a:solidFill>
-            <a:srgbClr val="FFFFFF"/>
-          </a:solidFill>
-          <a:ln>
-            <a:solidFill>
-              <a:srgbClr val="DCDCDC"/>
-            </a:solidFill>
-          </a:ln>
-        </p:spPr>
-        <p:style>
-          <a:lnRef idx="1">
-            <a:schemeClr val="accent1"/>
-          </a:lnRef>
-          <a:fillRef idx="3">
-            <a:schemeClr val="accent1"/>
-          </a:fillRef>
-          <a:effectRef idx="2">
-            <a:schemeClr val="accent1"/>
-          </a:effectRef>
-          <a:fontRef idx="minor">
-            <a:schemeClr val="lt1"/>
-          </a:fontRef>
-        </p:style>
-        <p:txBody>
-          <a:bodyPr rtlCol="0" anchor="ctr"/>
-          <a:lstStyle/>
-          <a:p>
-            <a:pPr algn="ctr"/>
-          </a:p>
-        </p:txBody>
-      </p:sp>
-      <p:sp>
-        <p:nvSpPr>
-          <p:cNvPr id="12" name="Rectangle 11"/>
-          <p:cNvSpPr/>
-          <p:nvPr/>
-        </p:nvSpPr>
-        <p:spPr>
-          <a:xfrm>
-            <a:off x="822960" y="4160520"/>
-            <a:ext cx="91440" cy="868680"/>
-          </a:xfrm>
-          <a:prstGeom prst="rect">
-            <a:avLst/>
-          </a:prstGeom>
-          <a:solidFill>
-            <a:srgbClr val="F9B700"/>
-          </a:solidFill>
-          <a:ln>
-            <a:noFill/>
-          </a:ln>
-        </p:spPr>
-        <p:style>
-          <a:lnRef idx="1">
-            <a:schemeClr val="accent1"/>
-          </a:lnRef>
-          <a:fillRef idx="3">
-            <a:schemeClr val="accent1"/>
-          </a:fillRef>
-          <a:effectRef idx="2">
-            <a:schemeClr val="accent1"/>
-          </a:effectRef>
-          <a:fontRef idx="minor">
-            <a:schemeClr val="lt1"/>
-          </a:fontRef>
-        </p:style>
-        <p:txBody>
-          <a:bodyPr rtlCol="0" anchor="ctr"/>
-          <a:lstStyle/>
-          <a:p>
-            <a:pPr algn="ctr"/>
-          </a:p>
-        </p:txBody>
-      </p:sp>
-      <p:sp>
-        <p:nvSpPr>
-          <p:cNvPr id="13" name="TextBox 12"/>
-          <p:cNvSpPr txBox="1"/>
-          <p:nvPr/>
-        </p:nvSpPr>
-        <p:spPr>
-          <a:xfrm>
-            <a:off x="1005840" y="4270248"/>
-            <a:ext cx="10104120" cy="704088"/>
-          </a:xfrm>
-          <a:prstGeom prst="rect">
-            <a:avLst/>
-          </a:prstGeom>
-          <a:noFill/>
-        </p:spPr>
-        <p:txBody>
-          <a:bodyPr wrap="square" lIns="0" rIns="0">
-            <a:spAutoFit/>
-          </a:bodyPr>
-          <a:lstStyle/>
-          <a:p>
-            <a:pPr>
-              <a:defRPr b="1" sz="1500">
-                <a:solidFill>
-                  <a:srgbClr val="1E2761"/>
-                </a:solidFill>
-                <a:latin typeface="Aptos Display"/>
-              </a:defRPr>
-            </a:pPr>
-            <a:r>
-              <a:t>Lab connection</a:t>
-            </a:r>
-          </a:p>
-          <a:p>
-            <a:pPr>
-              <a:spcBef>
-                <a:spcPts val="400"/>
-              </a:spcBef>
-              <a:defRPr sz="1050">
-                <a:solidFill>
-                  <a:srgbClr val="242424"/>
-                </a:solidFill>
-                <a:latin typeface="Aptos"/>
-              </a:defRPr>
-            </a:pPr>
-            <a:r>
-              <a:t>Coverage: Covered. Use the lab README to demonstrate or discuss this topic. Review terms: again, bottleneck, mindset, thing.</a:t>
+              <a:t>In the lab, you will apply this pattern, validate the expected behavior, and discuss where it fits in a real Power BI solution.</a:t>
             </a:r>
           </a:p>
         </p:txBody>
@@ -11311,42 +10891,6 @@
       </p:sp>
       <p:sp>
         <p:nvSpPr>
-          <p:cNvPr id="4" name="TextBox 3"/>
-          <p:cNvSpPr txBox="1"/>
-          <p:nvPr/>
-        </p:nvSpPr>
-        <p:spPr>
-          <a:xfrm>
-            <a:off x="530352" y="914400"/>
-            <a:ext cx="10515600" cy="320040"/>
-          </a:xfrm>
-          <a:prstGeom prst="rect">
-            <a:avLst/>
-          </a:prstGeom>
-          <a:noFill/>
-        </p:spPr>
-        <p:txBody>
-          <a:bodyPr wrap="none">
-            <a:spAutoFit/>
-          </a:bodyPr>
-          <a:lstStyle/>
-          <a:p>
-            <a:pPr>
-              <a:defRPr sz="1200">
-                <a:solidFill>
-                  <a:srgbClr val="5C5C5C"/>
-                </a:solidFill>
-                <a:latin typeface="Aptos"/>
-              </a:defRPr>
-            </a:pPr>
-            <a:r>
-              <a:t>Talking points, learner value, and lab connection</a:t>
-            </a:r>
-          </a:p>
-        </p:txBody>
-      </p:sp>
-      <p:sp>
-        <p:nvSpPr>
           <p:cNvPr id="5" name="Rounded Rectangle 4"/>
           <p:cNvSpPr/>
           <p:nvPr/>
@@ -11464,7 +11008,143 @@
               </a:defRPr>
             </a:pPr>
             <a:r>
-              <a:t>Talking points</a:t>
+              <a:t>Key ideas</a:t>
+            </a:r>
+            <a:br/>
+            <a:r>
+              <a:t>• Source system</a:t>
+            </a:r>
+            <a:br/>
+            <a:r>
+              <a:t>• Power Query</a:t>
+            </a:r>
+            <a:br/>
+            <a:r>
+              <a:t>• Semantic model</a:t>
+            </a:r>
+          </a:p>
+        </p:txBody>
+      </p:sp>
+      <p:sp>
+        <p:nvSpPr>
+          <p:cNvPr id="8" name="Rounded Rectangle 7"/>
+          <p:cNvSpPr/>
+          <p:nvPr/>
+        </p:nvSpPr>
+        <p:spPr>
+          <a:xfrm>
+            <a:off x="6263640" y="1234440"/>
+            <a:ext cx="5303520" cy="1828800"/>
+          </a:xfrm>
+          <a:prstGeom prst="roundRect">
+            <a:avLst/>
+          </a:prstGeom>
+          <a:solidFill>
+            <a:srgbClr val="FFFFFF"/>
+          </a:solidFill>
+          <a:ln>
+            <a:solidFill>
+              <a:srgbClr val="DCDCDC"/>
+            </a:solidFill>
+          </a:ln>
+        </p:spPr>
+        <p:style>
+          <a:lnRef idx="1">
+            <a:schemeClr val="accent1"/>
+          </a:lnRef>
+          <a:fillRef idx="3">
+            <a:schemeClr val="accent1"/>
+          </a:fillRef>
+          <a:effectRef idx="2">
+            <a:schemeClr val="accent1"/>
+          </a:effectRef>
+          <a:fontRef idx="minor">
+            <a:schemeClr val="lt1"/>
+          </a:fontRef>
+        </p:style>
+        <p:txBody>
+          <a:bodyPr rtlCol="0" anchor="ctr"/>
+          <a:lstStyle/>
+          <a:p>
+            <a:pPr algn="ctr"/>
+          </a:p>
+        </p:txBody>
+      </p:sp>
+      <p:sp>
+        <p:nvSpPr>
+          <p:cNvPr id="9" name="Rectangle 8"/>
+          <p:cNvSpPr/>
+          <p:nvPr/>
+        </p:nvSpPr>
+        <p:spPr>
+          <a:xfrm>
+            <a:off x="6263640" y="1234440"/>
+            <a:ext cx="91440" cy="1828800"/>
+          </a:xfrm>
+          <a:prstGeom prst="rect">
+            <a:avLst/>
+          </a:prstGeom>
+          <a:solidFill>
+            <a:srgbClr val="02C39A"/>
+          </a:solidFill>
+          <a:ln>
+            <a:noFill/>
+          </a:ln>
+        </p:spPr>
+        <p:style>
+          <a:lnRef idx="1">
+            <a:schemeClr val="accent1"/>
+          </a:lnRef>
+          <a:fillRef idx="3">
+            <a:schemeClr val="accent1"/>
+          </a:fillRef>
+          <a:effectRef idx="2">
+            <a:schemeClr val="accent1"/>
+          </a:effectRef>
+          <a:fontRef idx="minor">
+            <a:schemeClr val="lt1"/>
+          </a:fontRef>
+        </p:style>
+        <p:txBody>
+          <a:bodyPr rtlCol="0" anchor="ctr"/>
+          <a:lstStyle/>
+          <a:p>
+            <a:pPr algn="ctr"/>
+          </a:p>
+        </p:txBody>
+      </p:sp>
+      <p:sp>
+        <p:nvSpPr>
+          <p:cNvPr id="10" name="TextBox 9"/>
+          <p:cNvSpPr txBox="1"/>
+          <p:nvPr/>
+        </p:nvSpPr>
+        <p:spPr>
+          <a:xfrm>
+            <a:off x="6446520" y="1344168"/>
+            <a:ext cx="4983480" cy="1664208"/>
+          </a:xfrm>
+          <a:prstGeom prst="rect">
+            <a:avLst/>
+          </a:prstGeom>
+          <a:noFill/>
+        </p:spPr>
+        <p:txBody>
+          <a:bodyPr wrap="square" lIns="0" rIns="0">
+            <a:spAutoFit/>
+          </a:bodyPr>
+          <a:lstStyle/>
+          <a:p>
+            <a:pPr>
+              <a:defRPr b="1" sz="1500">
+                <a:solidFill>
+                  <a:srgbClr val="1E2761"/>
+                </a:solidFill>
+                <a:latin typeface="Aptos Display"/>
+              </a:defRPr>
+            </a:pPr>
+            <a:r>
+              <a:t>Why it helps</a:t>
             </a:r>
           </a:p>
           <a:p>
@@ -11480,29 +11160,25 @@
               </a:defRPr>
             </a:pPr>
             <a:r>
-              <a:t>• Source system</a:t>
+              <a:t>• DAX</a:t>
             </a:r>
             <a:br/>
             <a:r>
-              <a:t>• Power Query</a:t>
-            </a:r>
-            <a:br/>
-            <a:r>
-              <a:t>• Semantic model</a:t>
-            </a:r>
-          </a:p>
-        </p:txBody>
-      </p:sp>
-      <p:sp>
-        <p:nvSpPr>
-          <p:cNvPr id="8" name="Rounded Rectangle 7"/>
+              <a:t>• Visual rendering</a:t>
+            </a:r>
+          </a:p>
+        </p:txBody>
+      </p:sp>
+      <p:sp>
+        <p:nvSpPr>
+          <p:cNvPr id="11" name="Rounded Rectangle 10"/>
           <p:cNvSpPr/>
           <p:nvPr/>
         </p:nvSpPr>
         <p:spPr>
           <a:xfrm>
-            <a:off x="6263640" y="1234440"/>
-            <a:ext cx="5303520" cy="1828800"/>
+            <a:off x="822960" y="4160520"/>
+            <a:ext cx="10424160" cy="868680"/>
           </a:xfrm>
           <a:prstGeom prst="roundRect">
             <a:avLst/>
@@ -11540,20 +11216,20 @@
       </p:sp>
       <p:sp>
         <p:nvSpPr>
-          <p:cNvPr id="9" name="Rectangle 8"/>
+          <p:cNvPr id="12" name="Rectangle 11"/>
           <p:cNvSpPr/>
           <p:nvPr/>
         </p:nvSpPr>
         <p:spPr>
           <a:xfrm>
-            <a:off x="6263640" y="1234440"/>
-            <a:ext cx="91440" cy="1828800"/>
+            <a:off x="822960" y="4160520"/>
+            <a:ext cx="91440" cy="868680"/>
           </a:xfrm>
           <a:prstGeom prst="rect">
             <a:avLst/>
           </a:prstGeom>
           <a:solidFill>
-            <a:srgbClr val="02C39A"/>
+            <a:srgbClr val="F9B700"/>
           </a:solidFill>
           <a:ln>
             <a:noFill/>
@@ -11583,14 +11259,14 @@
       </p:sp>
       <p:sp>
         <p:nvSpPr>
-          <p:cNvPr id="10" name="TextBox 9"/>
+          <p:cNvPr id="13" name="TextBox 12"/>
           <p:cNvSpPr txBox="1"/>
           <p:nvPr/>
         </p:nvSpPr>
         <p:spPr>
           <a:xfrm>
-            <a:off x="6446520" y="1344168"/>
-            <a:ext cx="4983480" cy="1664208"/>
+            <a:off x="1005840" y="4270248"/>
+            <a:ext cx="10104120" cy="704088"/>
           </a:xfrm>
           <a:prstGeom prst="rect">
             <a:avLst/>
@@ -11612,167 +11288,7 @@
               </a:defRPr>
             </a:pPr>
             <a:r>
-              <a:t>Why it helps</a:t>
-            </a:r>
-          </a:p>
-          <a:p>
-            <a:pPr>
-              <a:spcBef>
-                <a:spcPts val="400"/>
-              </a:spcBef>
-              <a:defRPr sz="1050">
-                <a:solidFill>
-                  <a:srgbClr val="242424"/>
-                </a:solidFill>
-                <a:latin typeface="Aptos"/>
-              </a:defRPr>
-            </a:pPr>
-            <a:r>
-              <a:t>• DAX</a:t>
-            </a:r>
-            <a:br/>
-            <a:r>
-              <a:t>• Visual rendering</a:t>
-            </a:r>
-          </a:p>
-        </p:txBody>
-      </p:sp>
-      <p:sp>
-        <p:nvSpPr>
-          <p:cNvPr id="11" name="Rounded Rectangle 10"/>
-          <p:cNvSpPr/>
-          <p:nvPr/>
-        </p:nvSpPr>
-        <p:spPr>
-          <a:xfrm>
-            <a:off x="822960" y="4160520"/>
-            <a:ext cx="10424160" cy="868680"/>
-          </a:xfrm>
-          <a:prstGeom prst="roundRect">
-            <a:avLst/>
-          </a:prstGeom>
-          <a:solidFill>
-            <a:srgbClr val="FFFFFF"/>
-          </a:solidFill>
-          <a:ln>
-            <a:solidFill>
-              <a:srgbClr val="DCDCDC"/>
-            </a:solidFill>
-          </a:ln>
-        </p:spPr>
-        <p:style>
-          <a:lnRef idx="1">
-            <a:schemeClr val="accent1"/>
-          </a:lnRef>
-          <a:fillRef idx="3">
-            <a:schemeClr val="accent1"/>
-          </a:fillRef>
-          <a:effectRef idx="2">
-            <a:schemeClr val="accent1"/>
-          </a:effectRef>
-          <a:fontRef idx="minor">
-            <a:schemeClr val="lt1"/>
-          </a:fontRef>
-        </p:style>
-        <p:txBody>
-          <a:bodyPr rtlCol="0" anchor="ctr"/>
-          <a:lstStyle/>
-          <a:p>
-            <a:pPr algn="ctr"/>
-          </a:p>
-        </p:txBody>
-      </p:sp>
-      <p:sp>
-        <p:nvSpPr>
-          <p:cNvPr id="12" name="Rectangle 11"/>
-          <p:cNvSpPr/>
-          <p:nvPr/>
-        </p:nvSpPr>
-        <p:spPr>
-          <a:xfrm>
-            <a:off x="822960" y="4160520"/>
-            <a:ext cx="91440" cy="868680"/>
-          </a:xfrm>
-          <a:prstGeom prst="rect">
-            <a:avLst/>
-          </a:prstGeom>
-          <a:solidFill>
-            <a:srgbClr val="F9B700"/>
-          </a:solidFill>
-          <a:ln>
-            <a:noFill/>
-          </a:ln>
-        </p:spPr>
-        <p:style>
-          <a:lnRef idx="1">
-            <a:schemeClr val="accent1"/>
-          </a:lnRef>
-          <a:fillRef idx="3">
-            <a:schemeClr val="accent1"/>
-          </a:fillRef>
-          <a:effectRef idx="2">
-            <a:schemeClr val="accent1"/>
-          </a:effectRef>
-          <a:fontRef idx="minor">
-            <a:schemeClr val="lt1"/>
-          </a:fontRef>
-        </p:style>
-        <p:txBody>
-          <a:bodyPr rtlCol="0" anchor="ctr"/>
-          <a:lstStyle/>
-          <a:p>
-            <a:pPr algn="ctr"/>
-          </a:p>
-        </p:txBody>
-      </p:sp>
-      <p:sp>
-        <p:nvSpPr>
-          <p:cNvPr id="13" name="TextBox 12"/>
-          <p:cNvSpPr txBox="1"/>
-          <p:nvPr/>
-        </p:nvSpPr>
-        <p:spPr>
-          <a:xfrm>
-            <a:off x="1005840" y="4270248"/>
-            <a:ext cx="10104120" cy="704088"/>
-          </a:xfrm>
-          <a:prstGeom prst="rect">
-            <a:avLst/>
-          </a:prstGeom>
-          <a:noFill/>
-        </p:spPr>
-        <p:txBody>
-          <a:bodyPr wrap="square" lIns="0" rIns="0">
-            <a:spAutoFit/>
-          </a:bodyPr>
-          <a:lstStyle/>
-          <a:p>
-            <a:pPr>
-              <a:defRPr b="1" sz="1500">
-                <a:solidFill>
-                  <a:srgbClr val="1E2761"/>
-                </a:solidFill>
-                <a:latin typeface="Aptos Display"/>
-              </a:defRPr>
-            </a:pPr>
-            <a:r>
-              <a:t>Lab connection</a:t>
-            </a:r>
-          </a:p>
-          <a:p>
-            <a:pPr>
-              <a:spcBef>
-                <a:spcPts val="400"/>
-              </a:spcBef>
-              <a:defRPr sz="1050">
-                <a:solidFill>
-                  <a:srgbClr val="242424"/>
-                </a:solidFill>
-                <a:latin typeface="Aptos"/>
-              </a:defRPr>
-            </a:pPr>
-            <a:r>
-              <a:t>Coverage: Covered. Use the lab README to demonstrate or discuss this topic. Review terms: layers, rendering, system.</a:t>
+              <a:t>In the lab, you will apply this pattern, validate the expected behavior, and discuss where it fits in a real Power BI solution.</a:t>
             </a:r>
           </a:p>
         </p:txBody>
@@ -11911,42 +11427,6 @@
       </p:sp>
       <p:sp>
         <p:nvSpPr>
-          <p:cNvPr id="4" name="TextBox 3"/>
-          <p:cNvSpPr txBox="1"/>
-          <p:nvPr/>
-        </p:nvSpPr>
-        <p:spPr>
-          <a:xfrm>
-            <a:off x="530352" y="914400"/>
-            <a:ext cx="10515600" cy="320040"/>
-          </a:xfrm>
-          <a:prstGeom prst="rect">
-            <a:avLst/>
-          </a:prstGeom>
-          <a:noFill/>
-        </p:spPr>
-        <p:txBody>
-          <a:bodyPr wrap="none">
-            <a:spAutoFit/>
-          </a:bodyPr>
-          <a:lstStyle/>
-          <a:p>
-            <a:pPr>
-              <a:defRPr sz="1200">
-                <a:solidFill>
-                  <a:srgbClr val="5C5C5C"/>
-                </a:solidFill>
-                <a:latin typeface="Aptos"/>
-              </a:defRPr>
-            </a:pPr>
-            <a:r>
-              <a:t>Talking points, learner value, and lab connection</a:t>
-            </a:r>
-          </a:p>
-        </p:txBody>
-      </p:sp>
-      <p:sp>
-        <p:nvSpPr>
           <p:cNvPr id="5" name="Rounded Rectangle 4"/>
           <p:cNvSpPr/>
           <p:nvPr/>
@@ -12064,7 +11544,143 @@
               </a:defRPr>
             </a:pPr>
             <a:r>
-              <a:t>Talking points</a:t>
+              <a:t>Key ideas</a:t>
+            </a:r>
+            <a:br/>
+            <a:r>
+              <a:t>• Recording interactions</a:t>
+            </a:r>
+            <a:br/>
+            <a:r>
+              <a:t>• Visual display time</a:t>
+            </a:r>
+            <a:br/>
+            <a:r>
+              <a:t>• DAX query time</a:t>
+            </a:r>
+          </a:p>
+        </p:txBody>
+      </p:sp>
+      <p:sp>
+        <p:nvSpPr>
+          <p:cNvPr id="8" name="Rounded Rectangle 7"/>
+          <p:cNvSpPr/>
+          <p:nvPr/>
+        </p:nvSpPr>
+        <p:spPr>
+          <a:xfrm>
+            <a:off x="6263640" y="1234440"/>
+            <a:ext cx="5303520" cy="1828800"/>
+          </a:xfrm>
+          <a:prstGeom prst="roundRect">
+            <a:avLst/>
+          </a:prstGeom>
+          <a:solidFill>
+            <a:srgbClr val="FFFFFF"/>
+          </a:solidFill>
+          <a:ln>
+            <a:solidFill>
+              <a:srgbClr val="DCDCDC"/>
+            </a:solidFill>
+          </a:ln>
+        </p:spPr>
+        <p:style>
+          <a:lnRef idx="1">
+            <a:schemeClr val="accent1"/>
+          </a:lnRef>
+          <a:fillRef idx="3">
+            <a:schemeClr val="accent1"/>
+          </a:fillRef>
+          <a:effectRef idx="2">
+            <a:schemeClr val="accent1"/>
+          </a:effectRef>
+          <a:fontRef idx="minor">
+            <a:schemeClr val="lt1"/>
+          </a:fontRef>
+        </p:style>
+        <p:txBody>
+          <a:bodyPr rtlCol="0" anchor="ctr"/>
+          <a:lstStyle/>
+          <a:p>
+            <a:pPr algn="ctr"/>
+          </a:p>
+        </p:txBody>
+      </p:sp>
+      <p:sp>
+        <p:nvSpPr>
+          <p:cNvPr id="9" name="Rectangle 8"/>
+          <p:cNvSpPr/>
+          <p:nvPr/>
+        </p:nvSpPr>
+        <p:spPr>
+          <a:xfrm>
+            <a:off x="6263640" y="1234440"/>
+            <a:ext cx="91440" cy="1828800"/>
+          </a:xfrm>
+          <a:prstGeom prst="rect">
+            <a:avLst/>
+          </a:prstGeom>
+          <a:solidFill>
+            <a:srgbClr val="02C39A"/>
+          </a:solidFill>
+          <a:ln>
+            <a:noFill/>
+          </a:ln>
+        </p:spPr>
+        <p:style>
+          <a:lnRef idx="1">
+            <a:schemeClr val="accent1"/>
+          </a:lnRef>
+          <a:fillRef idx="3">
+            <a:schemeClr val="accent1"/>
+          </a:fillRef>
+          <a:effectRef idx="2">
+            <a:schemeClr val="accent1"/>
+          </a:effectRef>
+          <a:fontRef idx="minor">
+            <a:schemeClr val="lt1"/>
+          </a:fontRef>
+        </p:style>
+        <p:txBody>
+          <a:bodyPr rtlCol="0" anchor="ctr"/>
+          <a:lstStyle/>
+          <a:p>
+            <a:pPr algn="ctr"/>
+          </a:p>
+        </p:txBody>
+      </p:sp>
+      <p:sp>
+        <p:nvSpPr>
+          <p:cNvPr id="10" name="TextBox 9"/>
+          <p:cNvSpPr txBox="1"/>
+          <p:nvPr/>
+        </p:nvSpPr>
+        <p:spPr>
+          <a:xfrm>
+            <a:off x="6446520" y="1344168"/>
+            <a:ext cx="4983480" cy="1664208"/>
+          </a:xfrm>
+          <a:prstGeom prst="rect">
+            <a:avLst/>
+          </a:prstGeom>
+          <a:noFill/>
+        </p:spPr>
+        <p:txBody>
+          <a:bodyPr wrap="square" lIns="0" rIns="0">
+            <a:spAutoFit/>
+          </a:bodyPr>
+          <a:lstStyle/>
+          <a:p>
+            <a:pPr>
+              <a:defRPr b="1" sz="1500">
+                <a:solidFill>
+                  <a:srgbClr val="1E2761"/>
+                </a:solidFill>
+                <a:latin typeface="Aptos Display"/>
+              </a:defRPr>
+            </a:pPr>
+            <a:r>
+              <a:t>Why it helps</a:t>
             </a:r>
           </a:p>
           <a:p>
@@ -12080,29 +11696,25 @@
               </a:defRPr>
             </a:pPr>
             <a:r>
-              <a:t>• Recording interactions</a:t>
+              <a:t>• Other/render time</a:t>
             </a:r>
             <a:br/>
             <a:r>
-              <a:t>• Visual display time</a:t>
-            </a:r>
-            <a:br/>
-            <a:r>
-              <a:t>• DAX query time</a:t>
-            </a:r>
-          </a:p>
-        </p:txBody>
-      </p:sp>
-      <p:sp>
-        <p:nvSpPr>
-          <p:cNvPr id="8" name="Rounded Rectangle 7"/>
+              <a:t>• Copying queries for deeper analysis</a:t>
+            </a:r>
+          </a:p>
+        </p:txBody>
+      </p:sp>
+      <p:sp>
+        <p:nvSpPr>
+          <p:cNvPr id="11" name="Rounded Rectangle 10"/>
           <p:cNvSpPr/>
           <p:nvPr/>
         </p:nvSpPr>
         <p:spPr>
           <a:xfrm>
-            <a:off x="6263640" y="1234440"/>
-            <a:ext cx="5303520" cy="1828800"/>
+            <a:off x="822960" y="4160520"/>
+            <a:ext cx="10424160" cy="868680"/>
           </a:xfrm>
           <a:prstGeom prst="roundRect">
             <a:avLst/>
@@ -12140,20 +11752,20 @@
       </p:sp>
       <p:sp>
         <p:nvSpPr>
-          <p:cNvPr id="9" name="Rectangle 8"/>
+          <p:cNvPr id="12" name="Rectangle 11"/>
           <p:cNvSpPr/>
           <p:nvPr/>
         </p:nvSpPr>
         <p:spPr>
           <a:xfrm>
-            <a:off x="6263640" y="1234440"/>
-            <a:ext cx="91440" cy="1828800"/>
+            <a:off x="822960" y="4160520"/>
+            <a:ext cx="91440" cy="868680"/>
           </a:xfrm>
           <a:prstGeom prst="rect">
             <a:avLst/>
           </a:prstGeom>
           <a:solidFill>
-            <a:srgbClr val="02C39A"/>
+            <a:srgbClr val="F9B700"/>
           </a:solidFill>
           <a:ln>
             <a:noFill/>
@@ -12183,14 +11795,14 @@
       </p:sp>
       <p:sp>
         <p:nvSpPr>
-          <p:cNvPr id="10" name="TextBox 9"/>
+          <p:cNvPr id="13" name="TextBox 12"/>
           <p:cNvSpPr txBox="1"/>
           <p:nvPr/>
         </p:nvSpPr>
         <p:spPr>
           <a:xfrm>
-            <a:off x="6446520" y="1344168"/>
-            <a:ext cx="4983480" cy="1664208"/>
+            <a:off x="1005840" y="4270248"/>
+            <a:ext cx="10104120" cy="704088"/>
           </a:xfrm>
           <a:prstGeom prst="rect">
             <a:avLst/>
@@ -12212,167 +11824,7 @@
               </a:defRPr>
             </a:pPr>
             <a:r>
-              <a:t>Why it helps</a:t>
-            </a:r>
-          </a:p>
-          <a:p>
-            <a:pPr>
-              <a:spcBef>
-                <a:spcPts val="400"/>
-              </a:spcBef>
-              <a:defRPr sz="1050">
-                <a:solidFill>
-                  <a:srgbClr val="242424"/>
-                </a:solidFill>
-                <a:latin typeface="Aptos"/>
-              </a:defRPr>
-            </a:pPr>
-            <a:r>
-              <a:t>• Other/render time</a:t>
-            </a:r>
-            <a:br/>
-            <a:r>
-              <a:t>• Copying queries for deeper analysis</a:t>
-            </a:r>
-          </a:p>
-        </p:txBody>
-      </p:sp>
-      <p:sp>
-        <p:nvSpPr>
-          <p:cNvPr id="11" name="Rounded Rectangle 10"/>
-          <p:cNvSpPr/>
-          <p:nvPr/>
-        </p:nvSpPr>
-        <p:spPr>
-          <a:xfrm>
-            <a:off x="822960" y="4160520"/>
-            <a:ext cx="10424160" cy="868680"/>
-          </a:xfrm>
-          <a:prstGeom prst="roundRect">
-            <a:avLst/>
-          </a:prstGeom>
-          <a:solidFill>
-            <a:srgbClr val="FFFFFF"/>
-          </a:solidFill>
-          <a:ln>
-            <a:solidFill>
-              <a:srgbClr val="DCDCDC"/>
-            </a:solidFill>
-          </a:ln>
-        </p:spPr>
-        <p:style>
-          <a:lnRef idx="1">
-            <a:schemeClr val="accent1"/>
-          </a:lnRef>
-          <a:fillRef idx="3">
-            <a:schemeClr val="accent1"/>
-          </a:fillRef>
-          <a:effectRef idx="2">
-            <a:schemeClr val="accent1"/>
-          </a:effectRef>
-          <a:fontRef idx="minor">
-            <a:schemeClr val="lt1"/>
-          </a:fontRef>
-        </p:style>
-        <p:txBody>
-          <a:bodyPr rtlCol="0" anchor="ctr"/>
-          <a:lstStyle/>
-          <a:p>
-            <a:pPr algn="ctr"/>
-          </a:p>
-        </p:txBody>
-      </p:sp>
-      <p:sp>
-        <p:nvSpPr>
-          <p:cNvPr id="12" name="Rectangle 11"/>
-          <p:cNvSpPr/>
-          <p:nvPr/>
-        </p:nvSpPr>
-        <p:spPr>
-          <a:xfrm>
-            <a:off x="822960" y="4160520"/>
-            <a:ext cx="91440" cy="868680"/>
-          </a:xfrm>
-          <a:prstGeom prst="rect">
-            <a:avLst/>
-          </a:prstGeom>
-          <a:solidFill>
-            <a:srgbClr val="F9B700"/>
-          </a:solidFill>
-          <a:ln>
-            <a:noFill/>
-          </a:ln>
-        </p:spPr>
-        <p:style>
-          <a:lnRef idx="1">
-            <a:schemeClr val="accent1"/>
-          </a:lnRef>
-          <a:fillRef idx="3">
-            <a:schemeClr val="accent1"/>
-          </a:fillRef>
-          <a:effectRef idx="2">
-            <a:schemeClr val="accent1"/>
-          </a:effectRef>
-          <a:fontRef idx="minor">
-            <a:schemeClr val="lt1"/>
-          </a:fontRef>
-        </p:style>
-        <p:txBody>
-          <a:bodyPr rtlCol="0" anchor="ctr"/>
-          <a:lstStyle/>
-          <a:p>
-            <a:pPr algn="ctr"/>
-          </a:p>
-        </p:txBody>
-      </p:sp>
-      <p:sp>
-        <p:nvSpPr>
-          <p:cNvPr id="13" name="TextBox 12"/>
-          <p:cNvSpPr txBox="1"/>
-          <p:nvPr/>
-        </p:nvSpPr>
-        <p:spPr>
-          <a:xfrm>
-            <a:off x="1005840" y="4270248"/>
-            <a:ext cx="10104120" cy="704088"/>
-          </a:xfrm>
-          <a:prstGeom prst="rect">
-            <a:avLst/>
-          </a:prstGeom>
-          <a:noFill/>
-        </p:spPr>
-        <p:txBody>
-          <a:bodyPr wrap="square" lIns="0" rIns="0">
-            <a:spAutoFit/>
-          </a:bodyPr>
-          <a:lstStyle/>
-          <a:p>
-            <a:pPr>
-              <a:defRPr b="1" sz="1500">
-                <a:solidFill>
-                  <a:srgbClr val="1E2761"/>
-                </a:solidFill>
-                <a:latin typeface="Aptos Display"/>
-              </a:defRPr>
-            </a:pPr>
-            <a:r>
-              <a:t>Lab connection</a:t>
-            </a:r>
-          </a:p>
-          <a:p>
-            <a:pPr>
-              <a:spcBef>
-                <a:spcPts val="400"/>
-              </a:spcBef>
-              <a:defRPr sz="1050">
-                <a:solidFill>
-                  <a:srgbClr val="242424"/>
-                </a:solidFill>
-                <a:latin typeface="Aptos"/>
-              </a:defRPr>
-            </a:pPr>
-            <a:r>
-              <a:t>Coverage: Covered. Use the lab README to demonstrate or discuss this topic. Review terms: analysis, copying.</a:t>
+              <a:t>In the lab, you will apply this pattern, validate the expected behavior, and discuss where it fits in a real Power BI solution.</a:t>
             </a:r>
           </a:p>
         </p:txBody>
@@ -12511,42 +11963,6 @@
       </p:sp>
       <p:sp>
         <p:nvSpPr>
-          <p:cNvPr id="4" name="TextBox 3"/>
-          <p:cNvSpPr txBox="1"/>
-          <p:nvPr/>
-        </p:nvSpPr>
-        <p:spPr>
-          <a:xfrm>
-            <a:off x="530352" y="914400"/>
-            <a:ext cx="10515600" cy="320040"/>
-          </a:xfrm>
-          <a:prstGeom prst="rect">
-            <a:avLst/>
-          </a:prstGeom>
-          <a:noFill/>
-        </p:spPr>
-        <p:txBody>
-          <a:bodyPr wrap="none">
-            <a:spAutoFit/>
-          </a:bodyPr>
-          <a:lstStyle/>
-          <a:p>
-            <a:pPr>
-              <a:defRPr sz="1200">
-                <a:solidFill>
-                  <a:srgbClr val="5C5C5C"/>
-                </a:solidFill>
-                <a:latin typeface="Aptos"/>
-              </a:defRPr>
-            </a:pPr>
-            <a:r>
-              <a:t>Talking points, learner value, and lab connection</a:t>
-            </a:r>
-          </a:p>
-        </p:txBody>
-      </p:sp>
-      <p:sp>
-        <p:nvSpPr>
           <p:cNvPr id="5" name="Rounded Rectangle 4"/>
           <p:cNvSpPr/>
           <p:nvPr/>
@@ -12664,7 +12080,143 @@
               </a:defRPr>
             </a:pPr>
             <a:r>
-              <a:t>Talking points</a:t>
+              <a:t>Key ideas</a:t>
+            </a:r>
+            <a:br/>
+            <a:r>
+              <a:t>• Column cardinality</a:t>
+            </a:r>
+            <a:br/>
+            <a:r>
+              <a:t>• Data types</a:t>
+            </a:r>
+            <a:br/>
+            <a:r>
+              <a:t>• Precision</a:t>
+            </a:r>
+          </a:p>
+        </p:txBody>
+      </p:sp>
+      <p:sp>
+        <p:nvSpPr>
+          <p:cNvPr id="8" name="Rounded Rectangle 7"/>
+          <p:cNvSpPr/>
+          <p:nvPr/>
+        </p:nvSpPr>
+        <p:spPr>
+          <a:xfrm>
+            <a:off x="6263640" y="1234440"/>
+            <a:ext cx="5303520" cy="1828800"/>
+          </a:xfrm>
+          <a:prstGeom prst="roundRect">
+            <a:avLst/>
+          </a:prstGeom>
+          <a:solidFill>
+            <a:srgbClr val="FFFFFF"/>
+          </a:solidFill>
+          <a:ln>
+            <a:solidFill>
+              <a:srgbClr val="DCDCDC"/>
+            </a:solidFill>
+          </a:ln>
+        </p:spPr>
+        <p:style>
+          <a:lnRef idx="1">
+            <a:schemeClr val="accent1"/>
+          </a:lnRef>
+          <a:fillRef idx="3">
+            <a:schemeClr val="accent1"/>
+          </a:fillRef>
+          <a:effectRef idx="2">
+            <a:schemeClr val="accent1"/>
+          </a:effectRef>
+          <a:fontRef idx="minor">
+            <a:schemeClr val="lt1"/>
+          </a:fontRef>
+        </p:style>
+        <p:txBody>
+          <a:bodyPr rtlCol="0" anchor="ctr"/>
+          <a:lstStyle/>
+          <a:p>
+            <a:pPr algn="ctr"/>
+          </a:p>
+        </p:txBody>
+      </p:sp>
+      <p:sp>
+        <p:nvSpPr>
+          <p:cNvPr id="9" name="Rectangle 8"/>
+          <p:cNvSpPr/>
+          <p:nvPr/>
+        </p:nvSpPr>
+        <p:spPr>
+          <a:xfrm>
+            <a:off x="6263640" y="1234440"/>
+            <a:ext cx="91440" cy="1828800"/>
+          </a:xfrm>
+          <a:prstGeom prst="rect">
+            <a:avLst/>
+          </a:prstGeom>
+          <a:solidFill>
+            <a:srgbClr val="02C39A"/>
+          </a:solidFill>
+          <a:ln>
+            <a:noFill/>
+          </a:ln>
+        </p:spPr>
+        <p:style>
+          <a:lnRef idx="1">
+            <a:schemeClr val="accent1"/>
+          </a:lnRef>
+          <a:fillRef idx="3">
+            <a:schemeClr val="accent1"/>
+          </a:fillRef>
+          <a:effectRef idx="2">
+            <a:schemeClr val="accent1"/>
+          </a:effectRef>
+          <a:fontRef idx="minor">
+            <a:schemeClr val="lt1"/>
+          </a:fontRef>
+        </p:style>
+        <p:txBody>
+          <a:bodyPr rtlCol="0" anchor="ctr"/>
+          <a:lstStyle/>
+          <a:p>
+            <a:pPr algn="ctr"/>
+          </a:p>
+        </p:txBody>
+      </p:sp>
+      <p:sp>
+        <p:nvSpPr>
+          <p:cNvPr id="10" name="TextBox 9"/>
+          <p:cNvSpPr txBox="1"/>
+          <p:nvPr/>
+        </p:nvSpPr>
+        <p:spPr>
+          <a:xfrm>
+            <a:off x="6446520" y="1344168"/>
+            <a:ext cx="4983480" cy="1664208"/>
+          </a:xfrm>
+          <a:prstGeom prst="rect">
+            <a:avLst/>
+          </a:prstGeom>
+          <a:noFill/>
+        </p:spPr>
+        <p:txBody>
+          <a:bodyPr wrap="square" lIns="0" rIns="0">
+            <a:spAutoFit/>
+          </a:bodyPr>
+          <a:lstStyle/>
+          <a:p>
+            <a:pPr>
+              <a:defRPr b="1" sz="1500">
+                <a:solidFill>
+                  <a:srgbClr val="1E2761"/>
+                </a:solidFill>
+                <a:latin typeface="Aptos Display"/>
+              </a:defRPr>
+            </a:pPr>
+            <a:r>
+              <a:t>Why it helps</a:t>
             </a:r>
           </a:p>
           <a:p>
@@ -12680,29 +12232,25 @@
               </a:defRPr>
             </a:pPr>
             <a:r>
-              <a:t>• Column cardinality</a:t>
+              <a:t>• Date/time splits</a:t>
             </a:r>
             <a:br/>
             <a:r>
-              <a:t>• Data types</a:t>
-            </a:r>
-            <a:br/>
-            <a:r>
-              <a:t>• Precision</a:t>
-            </a:r>
-          </a:p>
-        </p:txBody>
-      </p:sp>
-      <p:sp>
-        <p:nvSpPr>
-          <p:cNvPr id="8" name="Rounded Rectangle 7"/>
+              <a:t>• Unused columns</a:t>
+            </a:r>
+          </a:p>
+        </p:txBody>
+      </p:sp>
+      <p:sp>
+        <p:nvSpPr>
+          <p:cNvPr id="11" name="Rounded Rectangle 10"/>
           <p:cNvSpPr/>
           <p:nvPr/>
         </p:nvSpPr>
         <p:spPr>
           <a:xfrm>
-            <a:off x="6263640" y="1234440"/>
-            <a:ext cx="5303520" cy="1828800"/>
+            <a:off x="822960" y="4160520"/>
+            <a:ext cx="10424160" cy="868680"/>
           </a:xfrm>
           <a:prstGeom prst="roundRect">
             <a:avLst/>
@@ -12740,20 +12288,20 @@
       </p:sp>
       <p:sp>
         <p:nvSpPr>
-          <p:cNvPr id="9" name="Rectangle 8"/>
+          <p:cNvPr id="12" name="Rectangle 11"/>
           <p:cNvSpPr/>
           <p:nvPr/>
         </p:nvSpPr>
         <p:spPr>
           <a:xfrm>
-            <a:off x="6263640" y="1234440"/>
-            <a:ext cx="91440" cy="1828800"/>
+            <a:off x="822960" y="4160520"/>
+            <a:ext cx="91440" cy="868680"/>
           </a:xfrm>
           <a:prstGeom prst="rect">
             <a:avLst/>
           </a:prstGeom>
           <a:solidFill>
-            <a:srgbClr val="02C39A"/>
+            <a:srgbClr val="F9B700"/>
           </a:solidFill>
           <a:ln>
             <a:noFill/>
@@ -12783,14 +12331,14 @@
       </p:sp>
       <p:sp>
         <p:nvSpPr>
-          <p:cNvPr id="10" name="TextBox 9"/>
+          <p:cNvPr id="13" name="TextBox 12"/>
           <p:cNvSpPr txBox="1"/>
           <p:nvPr/>
         </p:nvSpPr>
         <p:spPr>
           <a:xfrm>
-            <a:off x="6446520" y="1344168"/>
-            <a:ext cx="4983480" cy="1664208"/>
+            <a:off x="1005840" y="4270248"/>
+            <a:ext cx="10104120" cy="704088"/>
           </a:xfrm>
           <a:prstGeom prst="rect">
             <a:avLst/>
@@ -12812,167 +12360,7 @@
               </a:defRPr>
             </a:pPr>
             <a:r>
-              <a:t>Why it helps</a:t>
-            </a:r>
-          </a:p>
-          <a:p>
-            <a:pPr>
-              <a:spcBef>
-                <a:spcPts val="400"/>
-              </a:spcBef>
-              <a:defRPr sz="1050">
-                <a:solidFill>
-                  <a:srgbClr val="242424"/>
-                </a:solidFill>
-                <a:latin typeface="Aptos"/>
-              </a:defRPr>
-            </a:pPr>
-            <a:r>
-              <a:t>• Date/time splits</a:t>
-            </a:r>
-            <a:br/>
-            <a:r>
-              <a:t>• Unused columns</a:t>
-            </a:r>
-          </a:p>
-        </p:txBody>
-      </p:sp>
-      <p:sp>
-        <p:nvSpPr>
-          <p:cNvPr id="11" name="Rounded Rectangle 10"/>
-          <p:cNvSpPr/>
-          <p:nvPr/>
-        </p:nvSpPr>
-        <p:spPr>
-          <a:xfrm>
-            <a:off x="822960" y="4160520"/>
-            <a:ext cx="10424160" cy="868680"/>
-          </a:xfrm>
-          <a:prstGeom prst="roundRect">
-            <a:avLst/>
-          </a:prstGeom>
-          <a:solidFill>
-            <a:srgbClr val="FFFFFF"/>
-          </a:solidFill>
-          <a:ln>
-            <a:solidFill>
-              <a:srgbClr val="DCDCDC"/>
-            </a:solidFill>
-          </a:ln>
-        </p:spPr>
-        <p:style>
-          <a:lnRef idx="1">
-            <a:schemeClr val="accent1"/>
-          </a:lnRef>
-          <a:fillRef idx="3">
-            <a:schemeClr val="accent1"/>
-          </a:fillRef>
-          <a:effectRef idx="2">
-            <a:schemeClr val="accent1"/>
-          </a:effectRef>
-          <a:fontRef idx="minor">
-            <a:schemeClr val="lt1"/>
-          </a:fontRef>
-        </p:style>
-        <p:txBody>
-          <a:bodyPr rtlCol="0" anchor="ctr"/>
-          <a:lstStyle/>
-          <a:p>
-            <a:pPr algn="ctr"/>
-          </a:p>
-        </p:txBody>
-      </p:sp>
-      <p:sp>
-        <p:nvSpPr>
-          <p:cNvPr id="12" name="Rectangle 11"/>
-          <p:cNvSpPr/>
-          <p:nvPr/>
-        </p:nvSpPr>
-        <p:spPr>
-          <a:xfrm>
-            <a:off x="822960" y="4160520"/>
-            <a:ext cx="91440" cy="868680"/>
-          </a:xfrm>
-          <a:prstGeom prst="rect">
-            <a:avLst/>
-          </a:prstGeom>
-          <a:solidFill>
-            <a:srgbClr val="F9B700"/>
-          </a:solidFill>
-          <a:ln>
-            <a:noFill/>
-          </a:ln>
-        </p:spPr>
-        <p:style>
-          <a:lnRef idx="1">
-            <a:schemeClr val="accent1"/>
-          </a:lnRef>
-          <a:fillRef idx="3">
-            <a:schemeClr val="accent1"/>
-          </a:fillRef>
-          <a:effectRef idx="2">
-            <a:schemeClr val="accent1"/>
-          </a:effectRef>
-          <a:fontRef idx="minor">
-            <a:schemeClr val="lt1"/>
-          </a:fontRef>
-        </p:style>
-        <p:txBody>
-          <a:bodyPr rtlCol="0" anchor="ctr"/>
-          <a:lstStyle/>
-          <a:p>
-            <a:pPr algn="ctr"/>
-          </a:p>
-        </p:txBody>
-      </p:sp>
-      <p:sp>
-        <p:nvSpPr>
-          <p:cNvPr id="13" name="TextBox 12"/>
-          <p:cNvSpPr txBox="1"/>
-          <p:nvPr/>
-        </p:nvSpPr>
-        <p:spPr>
-          <a:xfrm>
-            <a:off x="1005840" y="4270248"/>
-            <a:ext cx="10104120" cy="704088"/>
-          </a:xfrm>
-          <a:prstGeom prst="rect">
-            <a:avLst/>
-          </a:prstGeom>
-          <a:noFill/>
-        </p:spPr>
-        <p:txBody>
-          <a:bodyPr wrap="square" lIns="0" rIns="0">
-            <a:spAutoFit/>
-          </a:bodyPr>
-          <a:lstStyle/>
-          <a:p>
-            <a:pPr>
-              <a:defRPr b="1" sz="1500">
-                <a:solidFill>
-                  <a:srgbClr val="1E2761"/>
-                </a:solidFill>
-                <a:latin typeface="Aptos Display"/>
-              </a:defRPr>
-            </a:pPr>
-            <a:r>
-              <a:t>Lab connection</a:t>
-            </a:r>
-          </a:p>
-          <a:p>
-            <a:pPr>
-              <a:spcBef>
-                <a:spcPts val="400"/>
-              </a:spcBef>
-              <a:defRPr sz="1050">
-                <a:solidFill>
-                  <a:srgbClr val="242424"/>
-                </a:solidFill>
-                <a:latin typeface="Aptos"/>
-              </a:defRPr>
-            </a:pPr>
-            <a:r>
-              <a:t>Coverage: Covered. Use the lab README to demonstrate or discuss this topic. Review terms: relationship, splits, types.</a:t>
+              <a:t>In the lab, you will apply this pattern, validate the expected behavior, and discuss where it fits in a real Power BI solution.</a:t>
             </a:r>
           </a:p>
         </p:txBody>
@@ -13111,42 +12499,6 @@
       </p:sp>
       <p:sp>
         <p:nvSpPr>
-          <p:cNvPr id="4" name="TextBox 3"/>
-          <p:cNvSpPr txBox="1"/>
-          <p:nvPr/>
-        </p:nvSpPr>
-        <p:spPr>
-          <a:xfrm>
-            <a:off x="530352" y="914400"/>
-            <a:ext cx="10515600" cy="320040"/>
-          </a:xfrm>
-          <a:prstGeom prst="rect">
-            <a:avLst/>
-          </a:prstGeom>
-          <a:noFill/>
-        </p:spPr>
-        <p:txBody>
-          <a:bodyPr wrap="none">
-            <a:spAutoFit/>
-          </a:bodyPr>
-          <a:lstStyle/>
-          <a:p>
-            <a:pPr>
-              <a:defRPr sz="1200">
-                <a:solidFill>
-                  <a:srgbClr val="5C5C5C"/>
-                </a:solidFill>
-                <a:latin typeface="Aptos"/>
-              </a:defRPr>
-            </a:pPr>
-            <a:r>
-              <a:t>Talking points, learner value, and lab connection</a:t>
-            </a:r>
-          </a:p>
-        </p:txBody>
-      </p:sp>
-      <p:sp>
-        <p:nvSpPr>
           <p:cNvPr id="5" name="Rounded Rectangle 4"/>
           <p:cNvSpPr/>
           <p:nvPr/>
@@ -13264,7 +12616,143 @@
               </a:defRPr>
             </a:pPr>
             <a:r>
-              <a:t>Talking points</a:t>
+              <a:t>Key ideas</a:t>
+            </a:r>
+            <a:br/>
+            <a:r>
+              <a:t>• Variables</a:t>
+            </a:r>
+            <a:br/>
+            <a:r>
+              <a:t>• Measure branching</a:t>
+            </a:r>
+            <a:br/>
+            <a:r>
+              <a:t>• Avoiding repeated logic</a:t>
+            </a:r>
+          </a:p>
+        </p:txBody>
+      </p:sp>
+      <p:sp>
+        <p:nvSpPr>
+          <p:cNvPr id="8" name="Rounded Rectangle 7"/>
+          <p:cNvSpPr/>
+          <p:nvPr/>
+        </p:nvSpPr>
+        <p:spPr>
+          <a:xfrm>
+            <a:off x="6263640" y="1234440"/>
+            <a:ext cx="5303520" cy="1828800"/>
+          </a:xfrm>
+          <a:prstGeom prst="roundRect">
+            <a:avLst/>
+          </a:prstGeom>
+          <a:solidFill>
+            <a:srgbClr val="FFFFFF"/>
+          </a:solidFill>
+          <a:ln>
+            <a:solidFill>
+              <a:srgbClr val="DCDCDC"/>
+            </a:solidFill>
+          </a:ln>
+        </p:spPr>
+        <p:style>
+          <a:lnRef idx="1">
+            <a:schemeClr val="accent1"/>
+          </a:lnRef>
+          <a:fillRef idx="3">
+            <a:schemeClr val="accent1"/>
+          </a:fillRef>
+          <a:effectRef idx="2">
+            <a:schemeClr val="accent1"/>
+          </a:effectRef>
+          <a:fontRef idx="minor">
+            <a:schemeClr val="lt1"/>
+          </a:fontRef>
+        </p:style>
+        <p:txBody>
+          <a:bodyPr rtlCol="0" anchor="ctr"/>
+          <a:lstStyle/>
+          <a:p>
+            <a:pPr algn="ctr"/>
+          </a:p>
+        </p:txBody>
+      </p:sp>
+      <p:sp>
+        <p:nvSpPr>
+          <p:cNvPr id="9" name="Rectangle 8"/>
+          <p:cNvSpPr/>
+          <p:nvPr/>
+        </p:nvSpPr>
+        <p:spPr>
+          <a:xfrm>
+            <a:off x="6263640" y="1234440"/>
+            <a:ext cx="91440" cy="1828800"/>
+          </a:xfrm>
+          <a:prstGeom prst="rect">
+            <a:avLst/>
+          </a:prstGeom>
+          <a:solidFill>
+            <a:srgbClr val="02C39A"/>
+          </a:solidFill>
+          <a:ln>
+            <a:noFill/>
+          </a:ln>
+        </p:spPr>
+        <p:style>
+          <a:lnRef idx="1">
+            <a:schemeClr val="accent1"/>
+          </a:lnRef>
+          <a:fillRef idx="3">
+            <a:schemeClr val="accent1"/>
+          </a:fillRef>
+          <a:effectRef idx="2">
+            <a:schemeClr val="accent1"/>
+          </a:effectRef>
+          <a:fontRef idx="minor">
+            <a:schemeClr val="lt1"/>
+          </a:fontRef>
+        </p:style>
+        <p:txBody>
+          <a:bodyPr rtlCol="0" anchor="ctr"/>
+          <a:lstStyle/>
+          <a:p>
+            <a:pPr algn="ctr"/>
+          </a:p>
+        </p:txBody>
+      </p:sp>
+      <p:sp>
+        <p:nvSpPr>
+          <p:cNvPr id="10" name="TextBox 9"/>
+          <p:cNvSpPr txBox="1"/>
+          <p:nvPr/>
+        </p:nvSpPr>
+        <p:spPr>
+          <a:xfrm>
+            <a:off x="6446520" y="1344168"/>
+            <a:ext cx="4983480" cy="1664208"/>
+          </a:xfrm>
+          <a:prstGeom prst="rect">
+            <a:avLst/>
+          </a:prstGeom>
+          <a:noFill/>
+        </p:spPr>
+        <p:txBody>
+          <a:bodyPr wrap="square" lIns="0" rIns="0">
+            <a:spAutoFit/>
+          </a:bodyPr>
+          <a:lstStyle/>
+          <a:p>
+            <a:pPr>
+              <a:defRPr b="1" sz="1500">
+                <a:solidFill>
+                  <a:srgbClr val="1E2761"/>
+                </a:solidFill>
+                <a:latin typeface="Aptos Display"/>
+              </a:defRPr>
+            </a:pPr>
+            <a:r>
+              <a:t>Why it helps</a:t>
             </a:r>
           </a:p>
           <a:p>
@@ -13280,29 +12768,25 @@
               </a:defRPr>
             </a:pPr>
             <a:r>
-              <a:t>• Variables</a:t>
+              <a:t>• Filter scope</a:t>
             </a:r>
             <a:br/>
             <a:r>
-              <a:t>• Measure branching</a:t>
-            </a:r>
-            <a:br/>
-            <a:r>
-              <a:t>• Avoiding repeated logic</a:t>
-            </a:r>
-          </a:p>
-        </p:txBody>
-      </p:sp>
-      <p:sp>
-        <p:nvSpPr>
-          <p:cNvPr id="8" name="Rounded Rectangle 7"/>
+              <a:t>• Iterator caution</a:t>
+            </a:r>
+          </a:p>
+        </p:txBody>
+      </p:sp>
+      <p:sp>
+        <p:nvSpPr>
+          <p:cNvPr id="11" name="Rounded Rectangle 10"/>
           <p:cNvSpPr/>
           <p:nvPr/>
         </p:nvSpPr>
         <p:spPr>
           <a:xfrm>
-            <a:off x="6263640" y="1234440"/>
-            <a:ext cx="5303520" cy="1828800"/>
+            <a:off x="822960" y="4160520"/>
+            <a:ext cx="10424160" cy="868680"/>
           </a:xfrm>
           <a:prstGeom prst="roundRect">
             <a:avLst/>
@@ -13340,20 +12824,20 @@
       </p:sp>
       <p:sp>
         <p:nvSpPr>
-          <p:cNvPr id="9" name="Rectangle 8"/>
+          <p:cNvPr id="12" name="Rectangle 11"/>
           <p:cNvSpPr/>
           <p:nvPr/>
         </p:nvSpPr>
         <p:spPr>
           <a:xfrm>
-            <a:off x="6263640" y="1234440"/>
-            <a:ext cx="91440" cy="1828800"/>
+            <a:off x="822960" y="4160520"/>
+            <a:ext cx="91440" cy="868680"/>
           </a:xfrm>
           <a:prstGeom prst="rect">
             <a:avLst/>
           </a:prstGeom>
           <a:solidFill>
-            <a:srgbClr val="02C39A"/>
+            <a:srgbClr val="F9B700"/>
           </a:solidFill>
           <a:ln>
             <a:noFill/>
@@ -13383,14 +12867,14 @@
       </p:sp>
       <p:sp>
         <p:nvSpPr>
-          <p:cNvPr id="10" name="TextBox 9"/>
+          <p:cNvPr id="13" name="TextBox 12"/>
           <p:cNvSpPr txBox="1"/>
           <p:nvPr/>
         </p:nvSpPr>
         <p:spPr>
           <a:xfrm>
-            <a:off x="6446520" y="1344168"/>
-            <a:ext cx="4983480" cy="1664208"/>
+            <a:off x="1005840" y="4270248"/>
+            <a:ext cx="10104120" cy="704088"/>
           </a:xfrm>
           <a:prstGeom prst="rect">
             <a:avLst/>
@@ -13412,167 +12896,7 @@
               </a:defRPr>
             </a:pPr>
             <a:r>
-              <a:t>Why it helps</a:t>
-            </a:r>
-          </a:p>
-          <a:p>
-            <a:pPr>
-              <a:spcBef>
-                <a:spcPts val="400"/>
-              </a:spcBef>
-              <a:defRPr sz="1050">
-                <a:solidFill>
-                  <a:srgbClr val="242424"/>
-                </a:solidFill>
-                <a:latin typeface="Aptos"/>
-              </a:defRPr>
-            </a:pPr>
-            <a:r>
-              <a:t>• Filter scope</a:t>
-            </a:r>
-            <a:br/>
-            <a:r>
-              <a:t>• Iterator caution</a:t>
-            </a:r>
-          </a:p>
-        </p:txBody>
-      </p:sp>
-      <p:sp>
-        <p:nvSpPr>
-          <p:cNvPr id="11" name="Rounded Rectangle 10"/>
-          <p:cNvSpPr/>
-          <p:nvPr/>
-        </p:nvSpPr>
-        <p:spPr>
-          <a:xfrm>
-            <a:off x="822960" y="4160520"/>
-            <a:ext cx="10424160" cy="868680"/>
-          </a:xfrm>
-          <a:prstGeom prst="roundRect">
-            <a:avLst/>
-          </a:prstGeom>
-          <a:solidFill>
-            <a:srgbClr val="FFFFFF"/>
-          </a:solidFill>
-          <a:ln>
-            <a:solidFill>
-              <a:srgbClr val="DCDCDC"/>
-            </a:solidFill>
-          </a:ln>
-        </p:spPr>
-        <p:style>
-          <a:lnRef idx="1">
-            <a:schemeClr val="accent1"/>
-          </a:lnRef>
-          <a:fillRef idx="3">
-            <a:schemeClr val="accent1"/>
-          </a:fillRef>
-          <a:effectRef idx="2">
-            <a:schemeClr val="accent1"/>
-          </a:effectRef>
-          <a:fontRef idx="minor">
-            <a:schemeClr val="lt1"/>
-          </a:fontRef>
-        </p:style>
-        <p:txBody>
-          <a:bodyPr rtlCol="0" anchor="ctr"/>
-          <a:lstStyle/>
-          <a:p>
-            <a:pPr algn="ctr"/>
-          </a:p>
-        </p:txBody>
-      </p:sp>
-      <p:sp>
-        <p:nvSpPr>
-          <p:cNvPr id="12" name="Rectangle 11"/>
-          <p:cNvSpPr/>
-          <p:nvPr/>
-        </p:nvSpPr>
-        <p:spPr>
-          <a:xfrm>
-            <a:off x="822960" y="4160520"/>
-            <a:ext cx="91440" cy="868680"/>
-          </a:xfrm>
-          <a:prstGeom prst="rect">
-            <a:avLst/>
-          </a:prstGeom>
-          <a:solidFill>
-            <a:srgbClr val="F9B700"/>
-          </a:solidFill>
-          <a:ln>
-            <a:noFill/>
-          </a:ln>
-        </p:spPr>
-        <p:style>
-          <a:lnRef idx="1">
-            <a:schemeClr val="accent1"/>
-          </a:lnRef>
-          <a:fillRef idx="3">
-            <a:schemeClr val="accent1"/>
-          </a:fillRef>
-          <a:effectRef idx="2">
-            <a:schemeClr val="accent1"/>
-          </a:effectRef>
-          <a:fontRef idx="minor">
-            <a:schemeClr val="lt1"/>
-          </a:fontRef>
-        </p:style>
-        <p:txBody>
-          <a:bodyPr rtlCol="0" anchor="ctr"/>
-          <a:lstStyle/>
-          <a:p>
-            <a:pPr algn="ctr"/>
-          </a:p>
-        </p:txBody>
-      </p:sp>
-      <p:sp>
-        <p:nvSpPr>
-          <p:cNvPr id="13" name="TextBox 12"/>
-          <p:cNvSpPr txBox="1"/>
-          <p:nvPr/>
-        </p:nvSpPr>
-        <p:spPr>
-          <a:xfrm>
-            <a:off x="1005840" y="4270248"/>
-            <a:ext cx="10104120" cy="704088"/>
-          </a:xfrm>
-          <a:prstGeom prst="rect">
-            <a:avLst/>
-          </a:prstGeom>
-          <a:noFill/>
-        </p:spPr>
-        <p:txBody>
-          <a:bodyPr wrap="square" lIns="0" rIns="0">
-            <a:spAutoFit/>
-          </a:bodyPr>
-          <a:lstStyle/>
-          <a:p>
-            <a:pPr>
-              <a:defRPr b="1" sz="1500">
-                <a:solidFill>
-                  <a:srgbClr val="1E2761"/>
-                </a:solidFill>
-                <a:latin typeface="Aptos Display"/>
-              </a:defRPr>
-            </a:pPr>
-            <a:r>
-              <a:t>Lab connection</a:t>
-            </a:r>
-          </a:p>
-          <a:p>
-            <a:pPr>
-              <a:spcBef>
-                <a:spcPts val="400"/>
-              </a:spcBef>
-              <a:defRPr sz="1050">
-                <a:solidFill>
-                  <a:srgbClr val="242424"/>
-                </a:solidFill>
-                <a:latin typeface="Aptos"/>
-              </a:defRPr>
-            </a:pPr>
-            <a:r>
-              <a:t>Coverage: Covered. Use the lab README to demonstrate or discuss this topic. Review terms: avoiding, caution, iterator, scope.</a:t>
+              <a:t>In the lab, you will apply this pattern, validate the expected behavior, and discuss where it fits in a real Power BI solution.</a:t>
             </a:r>
           </a:p>
         </p:txBody>
@@ -13711,42 +13035,6 @@
       </p:sp>
       <p:sp>
         <p:nvSpPr>
-          <p:cNvPr id="4" name="TextBox 3"/>
-          <p:cNvSpPr txBox="1"/>
-          <p:nvPr/>
-        </p:nvSpPr>
-        <p:spPr>
-          <a:xfrm>
-            <a:off x="530352" y="914400"/>
-            <a:ext cx="10515600" cy="320040"/>
-          </a:xfrm>
-          <a:prstGeom prst="rect">
-            <a:avLst/>
-          </a:prstGeom>
-          <a:noFill/>
-        </p:spPr>
-        <p:txBody>
-          <a:bodyPr wrap="none">
-            <a:spAutoFit/>
-          </a:bodyPr>
-          <a:lstStyle/>
-          <a:p>
-            <a:pPr>
-              <a:defRPr sz="1200">
-                <a:solidFill>
-                  <a:srgbClr val="5C5C5C"/>
-                </a:solidFill>
-                <a:latin typeface="Aptos"/>
-              </a:defRPr>
-            </a:pPr>
-            <a:r>
-              <a:t>Talking points, learner value, and lab connection</a:t>
-            </a:r>
-          </a:p>
-        </p:txBody>
-      </p:sp>
-      <p:sp>
-        <p:nvSpPr>
           <p:cNvPr id="5" name="Rounded Rectangle 4"/>
           <p:cNvSpPr/>
           <p:nvPr/>
@@ -13864,7 +13152,143 @@
               </a:defRPr>
             </a:pPr>
             <a:r>
-              <a:t>Talking points</a:t>
+              <a:t>Key ideas</a:t>
+            </a:r>
+            <a:br/>
+            <a:r>
+              <a:t>• Visual count</a:t>
+            </a:r>
+            <a:br/>
+            <a:r>
+              <a:t>• High-cardinality visuals</a:t>
+            </a:r>
+            <a:br/>
+            <a:r>
+              <a:t>• Tables and matrices</a:t>
+            </a:r>
+          </a:p>
+        </p:txBody>
+      </p:sp>
+      <p:sp>
+        <p:nvSpPr>
+          <p:cNvPr id="8" name="Rounded Rectangle 7"/>
+          <p:cNvSpPr/>
+          <p:nvPr/>
+        </p:nvSpPr>
+        <p:spPr>
+          <a:xfrm>
+            <a:off x="6263640" y="1234440"/>
+            <a:ext cx="5303520" cy="1828800"/>
+          </a:xfrm>
+          <a:prstGeom prst="roundRect">
+            <a:avLst/>
+          </a:prstGeom>
+          <a:solidFill>
+            <a:srgbClr val="FFFFFF"/>
+          </a:solidFill>
+          <a:ln>
+            <a:solidFill>
+              <a:srgbClr val="DCDCDC"/>
+            </a:solidFill>
+          </a:ln>
+        </p:spPr>
+        <p:style>
+          <a:lnRef idx="1">
+            <a:schemeClr val="accent1"/>
+          </a:lnRef>
+          <a:fillRef idx="3">
+            <a:schemeClr val="accent1"/>
+          </a:fillRef>
+          <a:effectRef idx="2">
+            <a:schemeClr val="accent1"/>
+          </a:effectRef>
+          <a:fontRef idx="minor">
+            <a:schemeClr val="lt1"/>
+          </a:fontRef>
+        </p:style>
+        <p:txBody>
+          <a:bodyPr rtlCol="0" anchor="ctr"/>
+          <a:lstStyle/>
+          <a:p>
+            <a:pPr algn="ctr"/>
+          </a:p>
+        </p:txBody>
+      </p:sp>
+      <p:sp>
+        <p:nvSpPr>
+          <p:cNvPr id="9" name="Rectangle 8"/>
+          <p:cNvSpPr/>
+          <p:nvPr/>
+        </p:nvSpPr>
+        <p:spPr>
+          <a:xfrm>
+            <a:off x="6263640" y="1234440"/>
+            <a:ext cx="91440" cy="1828800"/>
+          </a:xfrm>
+          <a:prstGeom prst="rect">
+            <a:avLst/>
+          </a:prstGeom>
+          <a:solidFill>
+            <a:srgbClr val="02C39A"/>
+          </a:solidFill>
+          <a:ln>
+            <a:noFill/>
+          </a:ln>
+        </p:spPr>
+        <p:style>
+          <a:lnRef idx="1">
+            <a:schemeClr val="accent1"/>
+          </a:lnRef>
+          <a:fillRef idx="3">
+            <a:schemeClr val="accent1"/>
+          </a:fillRef>
+          <a:effectRef idx="2">
+            <a:schemeClr val="accent1"/>
+          </a:effectRef>
+          <a:fontRef idx="minor">
+            <a:schemeClr val="lt1"/>
+          </a:fontRef>
+        </p:style>
+        <p:txBody>
+          <a:bodyPr rtlCol="0" anchor="ctr"/>
+          <a:lstStyle/>
+          <a:p>
+            <a:pPr algn="ctr"/>
+          </a:p>
+        </p:txBody>
+      </p:sp>
+      <p:sp>
+        <p:nvSpPr>
+          <p:cNvPr id="10" name="TextBox 9"/>
+          <p:cNvSpPr txBox="1"/>
+          <p:nvPr/>
+        </p:nvSpPr>
+        <p:spPr>
+          <a:xfrm>
+            <a:off x="6446520" y="1344168"/>
+            <a:ext cx="4983480" cy="1664208"/>
+          </a:xfrm>
+          <a:prstGeom prst="rect">
+            <a:avLst/>
+          </a:prstGeom>
+          <a:noFill/>
+        </p:spPr>
+        <p:txBody>
+          <a:bodyPr wrap="square" lIns="0" rIns="0">
+            <a:spAutoFit/>
+          </a:bodyPr>
+          <a:lstStyle/>
+          <a:p>
+            <a:pPr>
+              <a:defRPr b="1" sz="1500">
+                <a:solidFill>
+                  <a:srgbClr val="1E2761"/>
+                </a:solidFill>
+                <a:latin typeface="Aptos Display"/>
+              </a:defRPr>
+            </a:pPr>
+            <a:r>
+              <a:t>Why it helps</a:t>
             </a:r>
           </a:p>
           <a:p>
@@ -13880,29 +13304,25 @@
               </a:defRPr>
             </a:pPr>
             <a:r>
-              <a:t>• Visual count</a:t>
+              <a:t>• Cross-highlighting</a:t>
             </a:r>
             <a:br/>
             <a:r>
-              <a:t>• High-cardinality visuals</a:t>
-            </a:r>
-            <a:br/>
-            <a:r>
-              <a:t>• Tables and matrices</a:t>
-            </a:r>
-          </a:p>
-        </p:txBody>
-      </p:sp>
-      <p:sp>
-        <p:nvSpPr>
-          <p:cNvPr id="8" name="Rounded Rectangle 7"/>
+              <a:t>• Custom visuals</a:t>
+            </a:r>
+          </a:p>
+        </p:txBody>
+      </p:sp>
+      <p:sp>
+        <p:nvSpPr>
+          <p:cNvPr id="11" name="Rounded Rectangle 10"/>
           <p:cNvSpPr/>
           <p:nvPr/>
         </p:nvSpPr>
         <p:spPr>
           <a:xfrm>
-            <a:off x="6263640" y="1234440"/>
-            <a:ext cx="5303520" cy="1828800"/>
+            <a:off x="822960" y="4160520"/>
+            <a:ext cx="10424160" cy="868680"/>
           </a:xfrm>
           <a:prstGeom prst="roundRect">
             <a:avLst/>
@@ -13940,20 +13360,20 @@
       </p:sp>
       <p:sp>
         <p:nvSpPr>
-          <p:cNvPr id="9" name="Rectangle 8"/>
+          <p:cNvPr id="12" name="Rectangle 11"/>
           <p:cNvSpPr/>
           <p:nvPr/>
         </p:nvSpPr>
         <p:spPr>
           <a:xfrm>
-            <a:off x="6263640" y="1234440"/>
-            <a:ext cx="91440" cy="1828800"/>
+            <a:off x="822960" y="4160520"/>
+            <a:ext cx="91440" cy="868680"/>
           </a:xfrm>
           <a:prstGeom prst="rect">
             <a:avLst/>
           </a:prstGeom>
           <a:solidFill>
-            <a:srgbClr val="02C39A"/>
+            <a:srgbClr val="F9B700"/>
           </a:solidFill>
           <a:ln>
             <a:noFill/>
@@ -13983,14 +13403,14 @@
       </p:sp>
       <p:sp>
         <p:nvSpPr>
-          <p:cNvPr id="10" name="TextBox 9"/>
+          <p:cNvPr id="13" name="TextBox 12"/>
           <p:cNvSpPr txBox="1"/>
           <p:nvPr/>
         </p:nvSpPr>
         <p:spPr>
           <a:xfrm>
-            <a:off x="6446520" y="1344168"/>
-            <a:ext cx="4983480" cy="1664208"/>
+            <a:off x="1005840" y="4270248"/>
+            <a:ext cx="10104120" cy="704088"/>
           </a:xfrm>
           <a:prstGeom prst="rect">
             <a:avLst/>
@@ -14012,167 +13432,7 @@
               </a:defRPr>
             </a:pPr>
             <a:r>
-              <a:t>Why it helps</a:t>
-            </a:r>
-          </a:p>
-          <a:p>
-            <a:pPr>
-              <a:spcBef>
-                <a:spcPts val="400"/>
-              </a:spcBef>
-              <a:defRPr sz="1050">
-                <a:solidFill>
-                  <a:srgbClr val="242424"/>
-                </a:solidFill>
-                <a:latin typeface="Aptos"/>
-              </a:defRPr>
-            </a:pPr>
-            <a:r>
-              <a:t>• Cross-highlighting</a:t>
-            </a:r>
-            <a:br/>
-            <a:r>
-              <a:t>• Custom visuals</a:t>
-            </a:r>
-          </a:p>
-        </p:txBody>
-      </p:sp>
-      <p:sp>
-        <p:nvSpPr>
-          <p:cNvPr id="11" name="Rounded Rectangle 10"/>
-          <p:cNvSpPr/>
-          <p:nvPr/>
-        </p:nvSpPr>
-        <p:spPr>
-          <a:xfrm>
-            <a:off x="822960" y="4160520"/>
-            <a:ext cx="10424160" cy="868680"/>
-          </a:xfrm>
-          <a:prstGeom prst="roundRect">
-            <a:avLst/>
-          </a:prstGeom>
-          <a:solidFill>
-            <a:srgbClr val="FFFFFF"/>
-          </a:solidFill>
-          <a:ln>
-            <a:solidFill>
-              <a:srgbClr val="DCDCDC"/>
-            </a:solidFill>
-          </a:ln>
-        </p:spPr>
-        <p:style>
-          <a:lnRef idx="1">
-            <a:schemeClr val="accent1"/>
-          </a:lnRef>
-          <a:fillRef idx="3">
-            <a:schemeClr val="accent1"/>
-          </a:fillRef>
-          <a:effectRef idx="2">
-            <a:schemeClr val="accent1"/>
-          </a:effectRef>
-          <a:fontRef idx="minor">
-            <a:schemeClr val="lt1"/>
-          </a:fontRef>
-        </p:style>
-        <p:txBody>
-          <a:bodyPr rtlCol="0" anchor="ctr"/>
-          <a:lstStyle/>
-          <a:p>
-            <a:pPr algn="ctr"/>
-          </a:p>
-        </p:txBody>
-      </p:sp>
-      <p:sp>
-        <p:nvSpPr>
-          <p:cNvPr id="12" name="Rectangle 11"/>
-          <p:cNvSpPr/>
-          <p:nvPr/>
-        </p:nvSpPr>
-        <p:spPr>
-          <a:xfrm>
-            <a:off x="822960" y="4160520"/>
-            <a:ext cx="91440" cy="868680"/>
-          </a:xfrm>
-          <a:prstGeom prst="rect">
-            <a:avLst/>
-          </a:prstGeom>
-          <a:solidFill>
-            <a:srgbClr val="F9B700"/>
-          </a:solidFill>
-          <a:ln>
-            <a:noFill/>
-          </a:ln>
-        </p:spPr>
-        <p:style>
-          <a:lnRef idx="1">
-            <a:schemeClr val="accent1"/>
-          </a:lnRef>
-          <a:fillRef idx="3">
-            <a:schemeClr val="accent1"/>
-          </a:fillRef>
-          <a:effectRef idx="2">
-            <a:schemeClr val="accent1"/>
-          </a:effectRef>
-          <a:fontRef idx="minor">
-            <a:schemeClr val="lt1"/>
-          </a:fontRef>
-        </p:style>
-        <p:txBody>
-          <a:bodyPr rtlCol="0" anchor="ctr"/>
-          <a:lstStyle/>
-          <a:p>
-            <a:pPr algn="ctr"/>
-          </a:p>
-        </p:txBody>
-      </p:sp>
-      <p:sp>
-        <p:nvSpPr>
-          <p:cNvPr id="13" name="TextBox 12"/>
-          <p:cNvSpPr txBox="1"/>
-          <p:nvPr/>
-        </p:nvSpPr>
-        <p:spPr>
-          <a:xfrm>
-            <a:off x="1005840" y="4270248"/>
-            <a:ext cx="10104120" cy="704088"/>
-          </a:xfrm>
-          <a:prstGeom prst="rect">
-            <a:avLst/>
-          </a:prstGeom>
-          <a:noFill/>
-        </p:spPr>
-        <p:txBody>
-          <a:bodyPr wrap="square" lIns="0" rIns="0">
-            <a:spAutoFit/>
-          </a:bodyPr>
-          <a:lstStyle/>
-          <a:p>
-            <a:pPr>
-              <a:defRPr b="1" sz="1500">
-                <a:solidFill>
-                  <a:srgbClr val="1E2761"/>
-                </a:solidFill>
-                <a:latin typeface="Aptos Display"/>
-              </a:defRPr>
-            </a:pPr>
-            <a:r>
-              <a:t>Lab connection</a:t>
-            </a:r>
-          </a:p>
-          <a:p>
-            <a:pPr>
-              <a:spcBef>
-                <a:spcPts val="400"/>
-              </a:spcBef>
-              <a:defRPr sz="1050">
-                <a:solidFill>
-                  <a:srgbClr val="242424"/>
-                </a:solidFill>
-                <a:latin typeface="Aptos"/>
-              </a:defRPr>
-            </a:pPr>
-            <a:r>
-              <a:t>Coverage: Covered. Use the lab README to demonstrate or discuss this topic. Review terms: complexity, custom, highlighting, matrices.</a:t>
+              <a:t>In the lab, you will apply this pattern, validate the expected behavior, and discuss where it fits in a real Power BI solution.</a:t>
             </a:r>
           </a:p>
         </p:txBody>
@@ -14311,42 +13571,6 @@
       </p:sp>
       <p:sp>
         <p:nvSpPr>
-          <p:cNvPr id="4" name="TextBox 3"/>
-          <p:cNvSpPr txBox="1"/>
-          <p:nvPr/>
-        </p:nvSpPr>
-        <p:spPr>
-          <a:xfrm>
-            <a:off x="530352" y="914400"/>
-            <a:ext cx="10515600" cy="320040"/>
-          </a:xfrm>
-          <a:prstGeom prst="rect">
-            <a:avLst/>
-          </a:prstGeom>
-          <a:noFill/>
-        </p:spPr>
-        <p:txBody>
-          <a:bodyPr wrap="none">
-            <a:spAutoFit/>
-          </a:bodyPr>
-          <a:lstStyle/>
-          <a:p>
-            <a:pPr>
-              <a:defRPr sz="1200">
-                <a:solidFill>
-                  <a:srgbClr val="5C5C5C"/>
-                </a:solidFill>
-                <a:latin typeface="Aptos"/>
-              </a:defRPr>
-            </a:pPr>
-            <a:r>
-              <a:t>Talking points, learner value, and lab connection</a:t>
-            </a:r>
-          </a:p>
-        </p:txBody>
-      </p:sp>
-      <p:sp>
-        <p:nvSpPr>
           <p:cNvPr id="5" name="Rounded Rectangle 4"/>
           <p:cNvSpPr/>
           <p:nvPr/>
@@ -14464,7 +13688,143 @@
               </a:defRPr>
             </a:pPr>
             <a:r>
-              <a:t>Talking points</a:t>
+              <a:t>Key ideas</a:t>
+            </a:r>
+            <a:br/>
+            <a:r>
+              <a:t>• Query folding</a:t>
+            </a:r>
+            <a:br/>
+            <a:r>
+              <a:t>• Staging</a:t>
+            </a:r>
+            <a:br/>
+            <a:r>
+              <a:t>• Filtering early</a:t>
+            </a:r>
+          </a:p>
+        </p:txBody>
+      </p:sp>
+      <p:sp>
+        <p:nvSpPr>
+          <p:cNvPr id="8" name="Rounded Rectangle 7"/>
+          <p:cNvSpPr/>
+          <p:nvPr/>
+        </p:nvSpPr>
+        <p:spPr>
+          <a:xfrm>
+            <a:off x="6263640" y="1234440"/>
+            <a:ext cx="5303520" cy="1828800"/>
+          </a:xfrm>
+          <a:prstGeom prst="roundRect">
+            <a:avLst/>
+          </a:prstGeom>
+          <a:solidFill>
+            <a:srgbClr val="FFFFFF"/>
+          </a:solidFill>
+          <a:ln>
+            <a:solidFill>
+              <a:srgbClr val="DCDCDC"/>
+            </a:solidFill>
+          </a:ln>
+        </p:spPr>
+        <p:style>
+          <a:lnRef idx="1">
+            <a:schemeClr val="accent1"/>
+          </a:lnRef>
+          <a:fillRef idx="3">
+            <a:schemeClr val="accent1"/>
+          </a:fillRef>
+          <a:effectRef idx="2">
+            <a:schemeClr val="accent1"/>
+          </a:effectRef>
+          <a:fontRef idx="minor">
+            <a:schemeClr val="lt1"/>
+          </a:fontRef>
+        </p:style>
+        <p:txBody>
+          <a:bodyPr rtlCol="0" anchor="ctr"/>
+          <a:lstStyle/>
+          <a:p>
+            <a:pPr algn="ctr"/>
+          </a:p>
+        </p:txBody>
+      </p:sp>
+      <p:sp>
+        <p:nvSpPr>
+          <p:cNvPr id="9" name="Rectangle 8"/>
+          <p:cNvSpPr/>
+          <p:nvPr/>
+        </p:nvSpPr>
+        <p:spPr>
+          <a:xfrm>
+            <a:off x="6263640" y="1234440"/>
+            <a:ext cx="91440" cy="1828800"/>
+          </a:xfrm>
+          <a:prstGeom prst="rect">
+            <a:avLst/>
+          </a:prstGeom>
+          <a:solidFill>
+            <a:srgbClr val="02C39A"/>
+          </a:solidFill>
+          <a:ln>
+            <a:noFill/>
+          </a:ln>
+        </p:spPr>
+        <p:style>
+          <a:lnRef idx="1">
+            <a:schemeClr val="accent1"/>
+          </a:lnRef>
+          <a:fillRef idx="3">
+            <a:schemeClr val="accent1"/>
+          </a:fillRef>
+          <a:effectRef idx="2">
+            <a:schemeClr val="accent1"/>
+          </a:effectRef>
+          <a:fontRef idx="minor">
+            <a:schemeClr val="lt1"/>
+          </a:fontRef>
+        </p:style>
+        <p:txBody>
+          <a:bodyPr rtlCol="0" anchor="ctr"/>
+          <a:lstStyle/>
+          <a:p>
+            <a:pPr algn="ctr"/>
+          </a:p>
+        </p:txBody>
+      </p:sp>
+      <p:sp>
+        <p:nvSpPr>
+          <p:cNvPr id="10" name="TextBox 9"/>
+          <p:cNvSpPr txBox="1"/>
+          <p:nvPr/>
+        </p:nvSpPr>
+        <p:spPr>
+          <a:xfrm>
+            <a:off x="6446520" y="1344168"/>
+            <a:ext cx="4983480" cy="1664208"/>
+          </a:xfrm>
+          <a:prstGeom prst="rect">
+            <a:avLst/>
+          </a:prstGeom>
+          <a:noFill/>
+        </p:spPr>
+        <p:txBody>
+          <a:bodyPr wrap="square" lIns="0" rIns="0">
+            <a:spAutoFit/>
+          </a:bodyPr>
+          <a:lstStyle/>
+          <a:p>
+            <a:pPr>
+              <a:defRPr b="1" sz="1500">
+                <a:solidFill>
+                  <a:srgbClr val="1E2761"/>
+                </a:solidFill>
+                <a:latin typeface="Aptos Display"/>
+              </a:defRPr>
+            </a:pPr>
+            <a:r>
+              <a:t>Why it helps</a:t>
             </a:r>
           </a:p>
           <a:p>
@@ -14480,29 +13840,25 @@
               </a:defRPr>
             </a:pPr>
             <a:r>
-              <a:t>• Query folding</a:t>
+              <a:t>• Removing columns early</a:t>
             </a:r>
             <a:br/>
             <a:r>
-              <a:t>• Staging</a:t>
-            </a:r>
-            <a:br/>
-            <a:r>
-              <a:t>• Filtering early</a:t>
-            </a:r>
-          </a:p>
-        </p:txBody>
-      </p:sp>
-      <p:sp>
-        <p:nvSpPr>
-          <p:cNvPr id="8" name="Rounded Rectangle 7"/>
+              <a:t>• Incremental refresh preparation</a:t>
+            </a:r>
+          </a:p>
+        </p:txBody>
+      </p:sp>
+      <p:sp>
+        <p:nvSpPr>
+          <p:cNvPr id="11" name="Rounded Rectangle 10"/>
           <p:cNvSpPr/>
           <p:nvPr/>
         </p:nvSpPr>
         <p:spPr>
           <a:xfrm>
-            <a:off x="6263640" y="1234440"/>
-            <a:ext cx="5303520" cy="1828800"/>
+            <a:off x="822960" y="4160520"/>
+            <a:ext cx="10424160" cy="868680"/>
           </a:xfrm>
           <a:prstGeom prst="roundRect">
             <a:avLst/>
@@ -14540,20 +13896,20 @@
       </p:sp>
       <p:sp>
         <p:nvSpPr>
-          <p:cNvPr id="9" name="Rectangle 8"/>
+          <p:cNvPr id="12" name="Rectangle 11"/>
           <p:cNvSpPr/>
           <p:nvPr/>
         </p:nvSpPr>
         <p:spPr>
           <a:xfrm>
-            <a:off x="6263640" y="1234440"/>
-            <a:ext cx="91440" cy="1828800"/>
+            <a:off x="822960" y="4160520"/>
+            <a:ext cx="91440" cy="868680"/>
           </a:xfrm>
           <a:prstGeom prst="rect">
             <a:avLst/>
           </a:prstGeom>
           <a:solidFill>
-            <a:srgbClr val="02C39A"/>
+            <a:srgbClr val="F9B700"/>
           </a:solidFill>
           <a:ln>
             <a:noFill/>
@@ -14583,14 +13939,14 @@
       </p:sp>
       <p:sp>
         <p:nvSpPr>
-          <p:cNvPr id="10" name="TextBox 9"/>
+          <p:cNvPr id="13" name="TextBox 12"/>
           <p:cNvSpPr txBox="1"/>
           <p:nvPr/>
         </p:nvSpPr>
         <p:spPr>
           <a:xfrm>
-            <a:off x="6446520" y="1344168"/>
-            <a:ext cx="4983480" cy="1664208"/>
+            <a:off x="1005840" y="4270248"/>
+            <a:ext cx="10104120" cy="704088"/>
           </a:xfrm>
           <a:prstGeom prst="rect">
             <a:avLst/>
@@ -14612,167 +13968,7 @@
               </a:defRPr>
             </a:pPr>
             <a:r>
-              <a:t>Why it helps</a:t>
-            </a:r>
-          </a:p>
-          <a:p>
-            <a:pPr>
-              <a:spcBef>
-                <a:spcPts val="400"/>
-              </a:spcBef>
-              <a:defRPr sz="1050">
-                <a:solidFill>
-                  <a:srgbClr val="242424"/>
-                </a:solidFill>
-                <a:latin typeface="Aptos"/>
-              </a:defRPr>
-            </a:pPr>
-            <a:r>
-              <a:t>• Removing columns early</a:t>
-            </a:r>
-            <a:br/>
-            <a:r>
-              <a:t>• Incremental refresh preparation</a:t>
-            </a:r>
-          </a:p>
-        </p:txBody>
-      </p:sp>
-      <p:sp>
-        <p:nvSpPr>
-          <p:cNvPr id="11" name="Rounded Rectangle 10"/>
-          <p:cNvSpPr/>
-          <p:nvPr/>
-        </p:nvSpPr>
-        <p:spPr>
-          <a:xfrm>
-            <a:off x="822960" y="4160520"/>
-            <a:ext cx="10424160" cy="868680"/>
-          </a:xfrm>
-          <a:prstGeom prst="roundRect">
-            <a:avLst/>
-          </a:prstGeom>
-          <a:solidFill>
-            <a:srgbClr val="FFFFFF"/>
-          </a:solidFill>
-          <a:ln>
-            <a:solidFill>
-              <a:srgbClr val="DCDCDC"/>
-            </a:solidFill>
-          </a:ln>
-        </p:spPr>
-        <p:style>
-          <a:lnRef idx="1">
-            <a:schemeClr val="accent1"/>
-          </a:lnRef>
-          <a:fillRef idx="3">
-            <a:schemeClr val="accent1"/>
-          </a:fillRef>
-          <a:effectRef idx="2">
-            <a:schemeClr val="accent1"/>
-          </a:effectRef>
-          <a:fontRef idx="minor">
-            <a:schemeClr val="lt1"/>
-          </a:fontRef>
-        </p:style>
-        <p:txBody>
-          <a:bodyPr rtlCol="0" anchor="ctr"/>
-          <a:lstStyle/>
-          <a:p>
-            <a:pPr algn="ctr"/>
-          </a:p>
-        </p:txBody>
-      </p:sp>
-      <p:sp>
-        <p:nvSpPr>
-          <p:cNvPr id="12" name="Rectangle 11"/>
-          <p:cNvSpPr/>
-          <p:nvPr/>
-        </p:nvSpPr>
-        <p:spPr>
-          <a:xfrm>
-            <a:off x="822960" y="4160520"/>
-            <a:ext cx="91440" cy="868680"/>
-          </a:xfrm>
-          <a:prstGeom prst="rect">
-            <a:avLst/>
-          </a:prstGeom>
-          <a:solidFill>
-            <a:srgbClr val="F9B700"/>
-          </a:solidFill>
-          <a:ln>
-            <a:noFill/>
-          </a:ln>
-        </p:spPr>
-        <p:style>
-          <a:lnRef idx="1">
-            <a:schemeClr val="accent1"/>
-          </a:lnRef>
-          <a:fillRef idx="3">
-            <a:schemeClr val="accent1"/>
-          </a:fillRef>
-          <a:effectRef idx="2">
-            <a:schemeClr val="accent1"/>
-          </a:effectRef>
-          <a:fontRef idx="minor">
-            <a:schemeClr val="lt1"/>
-          </a:fontRef>
-        </p:style>
-        <p:txBody>
-          <a:bodyPr rtlCol="0" anchor="ctr"/>
-          <a:lstStyle/>
-          <a:p>
-            <a:pPr algn="ctr"/>
-          </a:p>
-        </p:txBody>
-      </p:sp>
-      <p:sp>
-        <p:nvSpPr>
-          <p:cNvPr id="13" name="TextBox 12"/>
-          <p:cNvSpPr txBox="1"/>
-          <p:nvPr/>
-        </p:nvSpPr>
-        <p:spPr>
-          <a:xfrm>
-            <a:off x="1005840" y="4270248"/>
-            <a:ext cx="10104120" cy="704088"/>
-          </a:xfrm>
-          <a:prstGeom prst="rect">
-            <a:avLst/>
-          </a:prstGeom>
-          <a:noFill/>
-        </p:spPr>
-        <p:txBody>
-          <a:bodyPr wrap="square" lIns="0" rIns="0">
-            <a:spAutoFit/>
-          </a:bodyPr>
-          <a:lstStyle/>
-          <a:p>
-            <a:pPr>
-              <a:defRPr b="1" sz="1500">
-                <a:solidFill>
-                  <a:srgbClr val="1E2761"/>
-                </a:solidFill>
-                <a:latin typeface="Aptos Display"/>
-              </a:defRPr>
-            </a:pPr>
-            <a:r>
-              <a:t>Lab connection</a:t>
-            </a:r>
-          </a:p>
-          <a:p>
-            <a:pPr>
-              <a:spcBef>
-                <a:spcPts val="400"/>
-              </a:spcBef>
-              <a:defRPr sz="1050">
-                <a:solidFill>
-                  <a:srgbClr val="242424"/>
-                </a:solidFill>
-                <a:latin typeface="Aptos"/>
-              </a:defRPr>
-            </a:pPr>
-            <a:r>
-              <a:t>Coverage: Partial. Use the lab README to demonstrate or discuss this topic. Review terms: early, filtering, folding, preparation, removing.</a:t>
+              <a:t>In the lab, you will apply this pattern, validate the expected behavior, and discuss where it fits in a real Power BI solution.</a:t>
             </a:r>
           </a:p>
         </p:txBody>
